--- a/report/tool_access_table.pptx
+++ b/report/tool_access_table.pptx
@@ -6,6 +6,11 @@
   </p:sldMasterIdLst>
   <p:sldIdLst>
     <p:sldId id="256" r:id="rId7"/>
+    <p:sldId id="257" r:id="rId8"/>
+    <p:sldId id="258" r:id="rId9"/>
+    <p:sldId id="259" r:id="rId10"/>
+    <p:sldId id="260" r:id="rId11"/>
+    <p:sldId id="261" r:id="rId12"/>
   </p:sldIdLst>
   <p:sldSz cx="9144000" cy="6858000" type="screen4x3"/>
   <p:notesSz cx="6858000" cy="9144000"/>
@@ -3090,14 +3095,31 @@
       <p:grpSpPr/>
       <p:sp>
         <p:nvSpPr>
-          <p:cNvPr id="2" name="TextBox 1"/>
+          <p:cNvPr id="2" name="Title 1"/>
+          <p:cNvSpPr>
+            <a:spLocks noGrp="1"/>
+          </p:cNvSpPr>
+          <p:nvPr>
+            <p:ph type="title"/>
+          </p:nvPr>
+        </p:nvSpPr>
+        <p:spPr/>
+        <p:txBody>
+          <a:bodyPr/>
+          <a:lstStyle/>
+          <a:p/>
+        </p:txBody>
+      </p:sp>
+      <p:sp>
+        <p:nvSpPr>
+          <p:cNvPr id="3" name="TextBox 2"/>
           <p:cNvSpPr txBox="1"/>
           <p:nvPr/>
         </p:nvSpPr>
         <p:spPr>
           <a:xfrm>
-            <a:off x="457200" y="274320"/>
-            <a:ext cx="8229600" cy="548640"/>
+            <a:off x="548640" y="731520"/>
+            <a:ext cx="10972800" cy="914400"/>
           </a:xfrm>
           <a:prstGeom prst="rect">
             <a:avLst/>
@@ -3110,1133 +3132,17 @@
           </a:bodyPr>
           <a:lstStyle/>
           <a:p>
-            <a:pPr algn="ctr">
-              <a:defRPr sz="3200" b="1">
-                <a:solidFill>
-                  <a:srgbClr val="1E3A8A"/>
-                </a:solidFill>
+            <a:pPr>
+              <a:defRPr sz="3600" b="1">
+                <a:latin typeface="Calibri"/>
               </a:defRPr>
             </a:pPr>
             <a:r>
-              <a:t>Agent Tool Access Matrix</a:t>
+              <a:t>Slurm Agent Tool Access Inventory</a:t>
             </a:r>
           </a:p>
         </p:txBody>
       </p:sp>
-      <p:graphicFrame>
-        <p:nvGraphicFramePr>
-          <p:cNvPr id="3" name="Table 2"/>
-          <p:cNvGraphicFramePr>
-            <a:graphicFrameLocks noGrp="1"/>
-          </p:cNvGraphicFramePr>
-          <p:nvPr/>
-        </p:nvGraphicFramePr>
-        <p:xfrm>
-          <a:off x="457200" y="1097280"/>
-          <a:ext cx="8229600" cy="5029200"/>
-        </p:xfrm>
-        <a:graphic>
-          <a:graphicData uri="http://schemas.openxmlformats.org/drawingml/2006/table">
-            <a:tbl>
-              <a:tblPr firstRow="1" bandRow="1">
-                <a:tableStyleId>{5C22544A-7EE6-4342-B048-85BDC9FD1C3A}</a:tableStyleId>
-              </a:tblPr>
-              <a:tblGrid>
-                <a:gridCol w="1645920"/>
-                <a:gridCol w="1097280"/>
-                <a:gridCol w="1188720"/>
-                <a:gridCol w="1097280"/>
-                <a:gridCol w="1371600"/>
-                <a:gridCol w="1828800"/>
-              </a:tblGrid>
-              <a:tr h="502920">
-                <a:tc>
-                  <a:txBody>
-                    <a:bodyPr/>
-                    <a:lstStyle/>
-                    <a:p>
-                      <a:pPr algn="ctr">
-                        <a:defRPr sz="1100" b="1">
-                          <a:solidFill>
-                            <a:srgbClr val="FFFFFF"/>
-                          </a:solidFill>
-                        </a:defRPr>
-                      </a:pPr>
-                      <a:r>
-                        <a:t>Tool</a:t>
-                      </a:r>
-                    </a:p>
-                  </a:txBody>
-                  <a:tcPr>
-                    <a:solidFill>
-                      <a:srgbClr val="1E3A8A"/>
-                    </a:solidFill>
-                  </a:tcPr>
-                </a:tc>
-                <a:tc>
-                  <a:txBody>
-                    <a:bodyPr/>
-                    <a:lstStyle/>
-                    <a:p>
-                      <a:pPr algn="ctr">
-                        <a:defRPr sz="1100" b="1">
-                          <a:solidFill>
-                            <a:srgbClr val="FFFFFF"/>
-                          </a:solidFill>
-                        </a:defRPr>
-                      </a:pPr>
-                      <a:r>
-                        <a:t>Main Agent</a:t>
-                      </a:r>
-                    </a:p>
-                  </a:txBody>
-                  <a:tcPr>
-                    <a:solidFill>
-                      <a:srgbClr val="1E3A8A"/>
-                    </a:solidFill>
-                  </a:tcPr>
-                </a:tc>
-                <a:tc>
-                  <a:txBody>
-                    <a:bodyPr/>
-                    <a:lstStyle/>
-                    <a:p>
-                      <a:pPr algn="ctr">
-                        <a:defRPr sz="1100" b="1">
-                          <a:solidFill>
-                            <a:srgbClr val="FFFFFF"/>
-                          </a:solidFill>
-                        </a:defRPr>
-                      </a:pPr>
-                      <a:r>
-                        <a:t>Analysis Sub</a:t>
-                      </a:r>
-                    </a:p>
-                  </a:txBody>
-                  <a:tcPr>
-                    <a:solidFill>
-                      <a:srgbClr val="1E3A8A"/>
-                    </a:solidFill>
-                  </a:tcPr>
-                </a:tc>
-                <a:tc>
-                  <a:txBody>
-                    <a:bodyPr/>
-                    <a:lstStyle/>
-                    <a:p>
-                      <a:pPr algn="ctr">
-                        <a:defRPr sz="1100" b="1">
-                          <a:solidFill>
-                            <a:srgbClr val="FFFFFF"/>
-                          </a:solidFill>
-                        </a:defRPr>
-                      </a:pPr>
-                      <a:r>
-                        <a:t>Action Sub</a:t>
-                      </a:r>
-                    </a:p>
-                  </a:txBody>
-                  <a:tcPr>
-                    <a:solidFill>
-                      <a:srgbClr val="1E3A8A"/>
-                    </a:solidFill>
-                  </a:tcPr>
-                </a:tc>
-                <a:tc>
-                  <a:txBody>
-                    <a:bodyPr/>
-                    <a:lstStyle/>
-                    <a:p>
-                      <a:pPr algn="ctr">
-                        <a:defRPr sz="1100" b="1">
-                          <a:solidFill>
-                            <a:srgbClr val="FFFFFF"/>
-                          </a:solidFill>
-                        </a:defRPr>
-                      </a:pPr>
-                      <a:r>
-                        <a:t>Safety</a:t>
-                      </a:r>
-                    </a:p>
-                  </a:txBody>
-                  <a:tcPr>
-                    <a:solidFill>
-                      <a:srgbClr val="1E3A8A"/>
-                    </a:solidFill>
-                  </a:tcPr>
-                </a:tc>
-                <a:tc>
-                  <a:txBody>
-                    <a:bodyPr/>
-                    <a:lstStyle/>
-                    <a:p>
-                      <a:pPr algn="ctr">
-                        <a:defRPr sz="1100" b="1">
-                          <a:solidFill>
-                            <a:srgbClr val="FFFFFF"/>
-                          </a:solidFill>
-                        </a:defRPr>
-                      </a:pPr>
-                      <a:r>
-                        <a:t>Purpose</a:t>
-                      </a:r>
-                    </a:p>
-                  </a:txBody>
-                  <a:tcPr>
-                    <a:solidFill>
-                      <a:srgbClr val="1E3A8A"/>
-                    </a:solidFill>
-                  </a:tcPr>
-                </a:tc>
-              </a:tr>
-              <a:tr h="502920">
-                <a:tc>
-                  <a:txBody>
-                    <a:bodyPr/>
-                    <a:lstStyle/>
-                    <a:p>
-                      <a:pPr>
-                        <a:defRPr sz="1000" b="1"/>
-                      </a:pPr>
-                      <a:r>
-                        <a:t>squeue/sacct/sinfo</a:t>
-                      </a:r>
-                    </a:p>
-                  </a:txBody>
-                  <a:tcPr/>
-                </a:tc>
-                <a:tc>
-                  <a:txBody>
-                    <a:bodyPr/>
-                    <a:lstStyle/>
-                    <a:p>
-                      <a:pPr algn="ctr">
-                        <a:defRPr sz="1000"/>
-                      </a:pPr>
-                      <a:r>
-                        <a:t>❌</a:t>
-                      </a:r>
-                    </a:p>
-                  </a:txBody>
-                  <a:tcPr/>
-                </a:tc>
-                <a:tc>
-                  <a:txBody>
-                    <a:bodyPr/>
-                    <a:lstStyle/>
-                    <a:p>
-                      <a:pPr algn="ctr">
-                        <a:defRPr sz="1000"/>
-                      </a:pPr>
-                      <a:r>
-                        <a:t>✅</a:t>
-                      </a:r>
-                    </a:p>
-                  </a:txBody>
-                  <a:tcPr/>
-                </a:tc>
-                <a:tc>
-                  <a:txBody>
-                    <a:bodyPr/>
-                    <a:lstStyle/>
-                    <a:p>
-                      <a:pPr algn="ctr">
-                        <a:defRPr sz="1000"/>
-                      </a:pPr>
-                      <a:r>
-                        <a:t>✅</a:t>
-                      </a:r>
-                    </a:p>
-                  </a:txBody>
-                  <a:tcPr/>
-                </a:tc>
-                <a:tc>
-                  <a:txBody>
-                    <a:bodyPr/>
-                    <a:lstStyle/>
-                    <a:p>
-                      <a:pPr algn="ctr">
-                        <a:defRPr sz="1000"/>
-                      </a:pPr>
-                      <a:r>
-                        <a:t>✅ Safe</a:t>
-                      </a:r>
-                    </a:p>
-                  </a:txBody>
-                  <a:tcPr>
-                    <a:solidFill>
-                      <a:srgbClr val="DCFCE7"/>
-                    </a:solidFill>
-                  </a:tcPr>
-                </a:tc>
-                <a:tc>
-                  <a:txBody>
-                    <a:bodyPr/>
-                    <a:lstStyle/>
-                    <a:p>
-                      <a:pPr>
-                        <a:defRPr sz="1000"/>
-                      </a:pPr>
-                      <a:r>
-                        <a:t>Query cluster state</a:t>
-                      </a:r>
-                    </a:p>
-                  </a:txBody>
-                  <a:tcPr/>
-                </a:tc>
-              </a:tr>
-              <a:tr h="502920">
-                <a:tc>
-                  <a:txBody>
-                    <a:bodyPr/>
-                    <a:lstStyle/>
-                    <a:p>
-                      <a:pPr>
-                        <a:defRPr sz="1000" b="1"/>
-                      </a:pPr>
-                      <a:r>
-                        <a:t>run_analysis</a:t>
-                      </a:r>
-                    </a:p>
-                  </a:txBody>
-                  <a:tcPr>
-                    <a:solidFill>
-                      <a:srgbClr val="F8FAFC"/>
-                    </a:solidFill>
-                  </a:tcPr>
-                </a:tc>
-                <a:tc>
-                  <a:txBody>
-                    <a:bodyPr/>
-                    <a:lstStyle/>
-                    <a:p>
-                      <a:pPr algn="ctr">
-                        <a:defRPr sz="1000"/>
-                      </a:pPr>
-                      <a:r>
-                        <a:t>❌</a:t>
-                      </a:r>
-                    </a:p>
-                  </a:txBody>
-                  <a:tcPr>
-                    <a:solidFill>
-                      <a:srgbClr val="F8FAFC"/>
-                    </a:solidFill>
-                  </a:tcPr>
-                </a:tc>
-                <a:tc>
-                  <a:txBody>
-                    <a:bodyPr/>
-                    <a:lstStyle/>
-                    <a:p>
-                      <a:pPr algn="ctr">
-                        <a:defRPr sz="1000"/>
-                      </a:pPr>
-                      <a:r>
-                        <a:t>✅</a:t>
-                      </a:r>
-                    </a:p>
-                  </a:txBody>
-                  <a:tcPr>
-                    <a:solidFill>
-                      <a:srgbClr val="F8FAFC"/>
-                    </a:solidFill>
-                  </a:tcPr>
-                </a:tc>
-                <a:tc>
-                  <a:txBody>
-                    <a:bodyPr/>
-                    <a:lstStyle/>
-                    <a:p>
-                      <a:pPr algn="ctr">
-                        <a:defRPr sz="1000"/>
-                      </a:pPr>
-                      <a:r>
-                        <a:t>❌</a:t>
-                      </a:r>
-                    </a:p>
-                  </a:txBody>
-                  <a:tcPr>
-                    <a:solidFill>
-                      <a:srgbClr val="F8FAFC"/>
-                    </a:solidFill>
-                  </a:tcPr>
-                </a:tc>
-                <a:tc>
-                  <a:txBody>
-                    <a:bodyPr/>
-                    <a:lstStyle/>
-                    <a:p>
-                      <a:pPr algn="ctr">
-                        <a:defRPr sz="1000"/>
-                      </a:pPr>
-                      <a:r>
-                        <a:t>✅ Safe</a:t>
-                      </a:r>
-                    </a:p>
-                  </a:txBody>
-                  <a:tcPr>
-                    <a:solidFill>
-                      <a:srgbClr val="DCFCE7"/>
-                    </a:solidFill>
-                  </a:tcPr>
-                </a:tc>
-                <a:tc>
-                  <a:txBody>
-                    <a:bodyPr/>
-                    <a:lstStyle/>
-                    <a:p>
-                      <a:pPr>
-                        <a:defRPr sz="1000"/>
-                      </a:pPr>
-                      <a:r>
-                        <a:t>Predefined diagnostics</a:t>
-                      </a:r>
-                    </a:p>
-                  </a:txBody>
-                  <a:tcPr>
-                    <a:solidFill>
-                      <a:srgbClr val="F8FAFC"/>
-                    </a:solidFill>
-                  </a:tcPr>
-                </a:tc>
-              </a:tr>
-              <a:tr h="502920">
-                <a:tc>
-                  <a:txBody>
-                    <a:bodyPr/>
-                    <a:lstStyle/>
-                    <a:p>
-                      <a:pPr>
-                        <a:defRPr sz="1000" b="1"/>
-                      </a:pPr>
-                      <a:r>
-                        <a:t>web_search</a:t>
-                      </a:r>
-                    </a:p>
-                  </a:txBody>
-                  <a:tcPr/>
-                </a:tc>
-                <a:tc>
-                  <a:txBody>
-                    <a:bodyPr/>
-                    <a:lstStyle/>
-                    <a:p>
-                      <a:pPr algn="ctr">
-                        <a:defRPr sz="1000"/>
-                      </a:pPr>
-                      <a:r>
-                        <a:t>❌</a:t>
-                      </a:r>
-                    </a:p>
-                  </a:txBody>
-                  <a:tcPr/>
-                </a:tc>
-                <a:tc>
-                  <a:txBody>
-                    <a:bodyPr/>
-                    <a:lstStyle/>
-                    <a:p>
-                      <a:pPr algn="ctr">
-                        <a:defRPr sz="1000"/>
-                      </a:pPr>
-                      <a:r>
-                        <a:t>✅</a:t>
-                      </a:r>
-                    </a:p>
-                  </a:txBody>
-                  <a:tcPr/>
-                </a:tc>
-                <a:tc>
-                  <a:txBody>
-                    <a:bodyPr/>
-                    <a:lstStyle/>
-                    <a:p>
-                      <a:pPr algn="ctr">
-                        <a:defRPr sz="1000"/>
-                      </a:pPr>
-                      <a:r>
-                        <a:t>✅</a:t>
-                      </a:r>
-                    </a:p>
-                  </a:txBody>
-                  <a:tcPr/>
-                </a:tc>
-                <a:tc>
-                  <a:txBody>
-                    <a:bodyPr/>
-                    <a:lstStyle/>
-                    <a:p>
-                      <a:pPr algn="ctr">
-                        <a:defRPr sz="1000"/>
-                      </a:pPr>
-                      <a:r>
-                        <a:t>✅ Safe</a:t>
-                      </a:r>
-                    </a:p>
-                  </a:txBody>
-                  <a:tcPr>
-                    <a:solidFill>
-                      <a:srgbClr val="DCFCE7"/>
-                    </a:solidFill>
-                  </a:tcPr>
-                </a:tc>
-                <a:tc>
-                  <a:txBody>
-                    <a:bodyPr/>
-                    <a:lstStyle/>
-                    <a:p>
-                      <a:pPr>
-                        <a:defRPr sz="1000"/>
-                      </a:pPr>
-                      <a:r>
-                        <a:t>Documentation lookup</a:t>
-                      </a:r>
-                    </a:p>
-                  </a:txBody>
-                  <a:tcPr/>
-                </a:tc>
-              </a:tr>
-              <a:tr h="502920">
-                <a:tc>
-                  <a:txBody>
-                    <a:bodyPr/>
-                    <a:lstStyle/>
-                    <a:p>
-                      <a:pPr>
-                        <a:defRPr sz="1000" b="1"/>
-                      </a:pPr>
-                      <a:r>
-                        <a:t>srun/salloc</a:t>
-                      </a:r>
-                    </a:p>
-                  </a:txBody>
-                  <a:tcPr>
-                    <a:solidFill>
-                      <a:srgbClr val="F8FAFC"/>
-                    </a:solidFill>
-                  </a:tcPr>
-                </a:tc>
-                <a:tc>
-                  <a:txBody>
-                    <a:bodyPr/>
-                    <a:lstStyle/>
-                    <a:p>
-                      <a:pPr algn="ctr">
-                        <a:defRPr sz="1000"/>
-                      </a:pPr>
-                      <a:r>
-                        <a:t>❌</a:t>
-                      </a:r>
-                    </a:p>
-                  </a:txBody>
-                  <a:tcPr>
-                    <a:solidFill>
-                      <a:srgbClr val="F8FAFC"/>
-                    </a:solidFill>
-                  </a:tcPr>
-                </a:tc>
-                <a:tc>
-                  <a:txBody>
-                    <a:bodyPr/>
-                    <a:lstStyle/>
-                    <a:p>
-                      <a:pPr algn="ctr">
-                        <a:defRPr sz="1000"/>
-                      </a:pPr>
-                      <a:r>
-                        <a:t>❌</a:t>
-                      </a:r>
-                    </a:p>
-                  </a:txBody>
-                  <a:tcPr>
-                    <a:solidFill>
-                      <a:srgbClr val="F8FAFC"/>
-                    </a:solidFill>
-                  </a:tcPr>
-                </a:tc>
-                <a:tc>
-                  <a:txBody>
-                    <a:bodyPr/>
-                    <a:lstStyle/>
-                    <a:p>
-                      <a:pPr algn="ctr">
-                        <a:defRPr sz="1000"/>
-                      </a:pPr>
-                      <a:r>
-                        <a:t>✅</a:t>
-                      </a:r>
-                    </a:p>
-                  </a:txBody>
-                  <a:tcPr>
-                    <a:solidFill>
-                      <a:srgbClr val="F8FAFC"/>
-                    </a:solidFill>
-                  </a:tcPr>
-                </a:tc>
-                <a:tc>
-                  <a:txBody>
-                    <a:bodyPr/>
-                    <a:lstStyle/>
-                    <a:p>
-                      <a:pPr algn="ctr">
-                        <a:defRPr sz="1000"/>
-                      </a:pPr>
-                      <a:r>
-                        <a:t>✅ Safe</a:t>
-                      </a:r>
-                    </a:p>
-                  </a:txBody>
-                  <a:tcPr>
-                    <a:solidFill>
-                      <a:srgbClr val="DCFCE7"/>
-                    </a:solidFill>
-                  </a:tcPr>
-                </a:tc>
-                <a:tc>
-                  <a:txBody>
-                    <a:bodyPr/>
-                    <a:lstStyle/>
-                    <a:p>
-                      <a:pPr>
-                        <a:defRPr sz="1000"/>
-                      </a:pPr>
-                      <a:r>
-                        <a:t>Interactive execution</a:t>
-                      </a:r>
-                    </a:p>
-                  </a:txBody>
-                  <a:tcPr>
-                    <a:solidFill>
-                      <a:srgbClr val="F8FAFC"/>
-                    </a:solidFill>
-                  </a:tcPr>
-                </a:tc>
-              </a:tr>
-              <a:tr h="502920">
-                <a:tc>
-                  <a:txBody>
-                    <a:bodyPr/>
-                    <a:lstStyle/>
-                    <a:p>
-                      <a:pPr>
-                        <a:defRPr sz="1000" b="1"/>
-                      </a:pPr>
-                      <a:r>
-                        <a:t>scancel/sbatch</a:t>
-                      </a:r>
-                    </a:p>
-                  </a:txBody>
-                  <a:tcPr/>
-                </a:tc>
-                <a:tc>
-                  <a:txBody>
-                    <a:bodyPr/>
-                    <a:lstStyle/>
-                    <a:p>
-                      <a:pPr algn="ctr">
-                        <a:defRPr sz="1000"/>
-                      </a:pPr>
-                      <a:r>
-                        <a:t>❌</a:t>
-                      </a:r>
-                    </a:p>
-                  </a:txBody>
-                  <a:tcPr/>
-                </a:tc>
-                <a:tc>
-                  <a:txBody>
-                    <a:bodyPr/>
-                    <a:lstStyle/>
-                    <a:p>
-                      <a:pPr algn="ctr">
-                        <a:defRPr sz="1000"/>
-                      </a:pPr>
-                      <a:r>
-                        <a:t>❌</a:t>
-                      </a:r>
-                    </a:p>
-                  </a:txBody>
-                  <a:tcPr/>
-                </a:tc>
-                <a:tc>
-                  <a:txBody>
-                    <a:bodyPr/>
-                    <a:lstStyle/>
-                    <a:p>
-                      <a:pPr algn="ctr">
-                        <a:defRPr sz="1000"/>
-                      </a:pPr>
-                      <a:r>
-                        <a:t>✅</a:t>
-                      </a:r>
-                    </a:p>
-                  </a:txBody>
-                  <a:tcPr/>
-                </a:tc>
-                <a:tc>
-                  <a:txBody>
-                    <a:bodyPr/>
-                    <a:lstStyle/>
-                    <a:p>
-                      <a:pPr algn="ctr">
-                        <a:defRPr sz="1000"/>
-                      </a:pPr>
-                      <a:r>
-                        <a:t>⚠️ Dangerous</a:t>
-                      </a:r>
-                    </a:p>
-                  </a:txBody>
-                  <a:tcPr>
-                    <a:solidFill>
-                      <a:srgbClr val="FEE2E2"/>
-                    </a:solidFill>
-                  </a:tcPr>
-                </a:tc>
-                <a:tc>
-                  <a:txBody>
-                    <a:bodyPr/>
-                    <a:lstStyle/>
-                    <a:p>
-                      <a:pPr>
-                        <a:defRPr sz="1000"/>
-                      </a:pPr>
-                      <a:r>
-                        <a:t>Job lifecycle control</a:t>
-                      </a:r>
-                    </a:p>
-                  </a:txBody>
-                  <a:tcPr/>
-                </a:tc>
-              </a:tr>
-              <a:tr h="502920">
-                <a:tc>
-                  <a:txBody>
-                    <a:bodyPr/>
-                    <a:lstStyle/>
-                    <a:p>
-                      <a:pPr>
-                        <a:defRPr sz="1000" b="1"/>
-                      </a:pPr>
-                      <a:r>
-                        <a:t>scontrol_*</a:t>
-                      </a:r>
-                    </a:p>
-                  </a:txBody>
-                  <a:tcPr>
-                    <a:solidFill>
-                      <a:srgbClr val="F8FAFC"/>
-                    </a:solidFill>
-                  </a:tcPr>
-                </a:tc>
-                <a:tc>
-                  <a:txBody>
-                    <a:bodyPr/>
-                    <a:lstStyle/>
-                    <a:p>
-                      <a:pPr algn="ctr">
-                        <a:defRPr sz="1000"/>
-                      </a:pPr>
-                      <a:r>
-                        <a:t>❌</a:t>
-                      </a:r>
-                    </a:p>
-                  </a:txBody>
-                  <a:tcPr>
-                    <a:solidFill>
-                      <a:srgbClr val="F8FAFC"/>
-                    </a:solidFill>
-                  </a:tcPr>
-                </a:tc>
-                <a:tc>
-                  <a:txBody>
-                    <a:bodyPr/>
-                    <a:lstStyle/>
-                    <a:p>
-                      <a:pPr algn="ctr">
-                        <a:defRPr sz="1000"/>
-                      </a:pPr>
-                      <a:r>
-                        <a:t>❌</a:t>
-                      </a:r>
-                    </a:p>
-                  </a:txBody>
-                  <a:tcPr>
-                    <a:solidFill>
-                      <a:srgbClr val="F8FAFC"/>
-                    </a:solidFill>
-                  </a:tcPr>
-                </a:tc>
-                <a:tc>
-                  <a:txBody>
-                    <a:bodyPr/>
-                    <a:lstStyle/>
-                    <a:p>
-                      <a:pPr algn="ctr">
-                        <a:defRPr sz="1000"/>
-                      </a:pPr>
-                      <a:r>
-                        <a:t>✅</a:t>
-                      </a:r>
-                    </a:p>
-                  </a:txBody>
-                  <a:tcPr>
-                    <a:solidFill>
-                      <a:srgbClr val="F8FAFC"/>
-                    </a:solidFill>
-                  </a:tcPr>
-                </a:tc>
-                <a:tc>
-                  <a:txBody>
-                    <a:bodyPr/>
-                    <a:lstStyle/>
-                    <a:p>
-                      <a:pPr algn="ctr">
-                        <a:defRPr sz="1000"/>
-                      </a:pPr>
-                      <a:r>
-                        <a:t>⚠️ Dangerous</a:t>
-                      </a:r>
-                    </a:p>
-                  </a:txBody>
-                  <a:tcPr>
-                    <a:solidFill>
-                      <a:srgbClr val="FEE2E2"/>
-                    </a:solidFill>
-                  </a:tcPr>
-                </a:tc>
-                <a:tc>
-                  <a:txBody>
-                    <a:bodyPr/>
-                    <a:lstStyle/>
-                    <a:p>
-                      <a:pPr>
-                        <a:defRPr sz="1000"/>
-                      </a:pPr>
-                      <a:r>
-                        <a:t>Job/cluster modification</a:t>
-                      </a:r>
-                    </a:p>
-                  </a:txBody>
-                  <a:tcPr>
-                    <a:solidFill>
-                      <a:srgbClr val="F8FAFC"/>
-                    </a:solidFill>
-                  </a:tcPr>
-                </a:tc>
-              </a:tr>
-              <a:tr h="502920">
-                <a:tc>
-                  <a:txBody>
-                    <a:bodyPr/>
-                    <a:lstStyle/>
-                    <a:p>
-                      <a:pPr>
-                        <a:defRPr sz="1000" b="1"/>
-                      </a:pPr>
-                      <a:r>
-                        <a:t>sacctmgr_*</a:t>
-                      </a:r>
-                    </a:p>
-                  </a:txBody>
-                  <a:tcPr/>
-                </a:tc>
-                <a:tc>
-                  <a:txBody>
-                    <a:bodyPr/>
-                    <a:lstStyle/>
-                    <a:p>
-                      <a:pPr algn="ctr">
-                        <a:defRPr sz="1000"/>
-                      </a:pPr>
-                      <a:r>
-                        <a:t>❌</a:t>
-                      </a:r>
-                    </a:p>
-                  </a:txBody>
-                  <a:tcPr/>
-                </a:tc>
-                <a:tc>
-                  <a:txBody>
-                    <a:bodyPr/>
-                    <a:lstStyle/>
-                    <a:p>
-                      <a:pPr algn="ctr">
-                        <a:defRPr sz="1000"/>
-                      </a:pPr>
-                      <a:r>
-                        <a:t>❌</a:t>
-                      </a:r>
-                    </a:p>
-                  </a:txBody>
-                  <a:tcPr/>
-                </a:tc>
-                <a:tc>
-                  <a:txBody>
-                    <a:bodyPr/>
-                    <a:lstStyle/>
-                    <a:p>
-                      <a:pPr algn="ctr">
-                        <a:defRPr sz="1000"/>
-                      </a:pPr>
-                      <a:r>
-                        <a:t>✅</a:t>
-                      </a:r>
-                    </a:p>
-                  </a:txBody>
-                  <a:tcPr/>
-                </a:tc>
-                <a:tc>
-                  <a:txBody>
-                    <a:bodyPr/>
-                    <a:lstStyle/>
-                    <a:p>
-                      <a:pPr algn="ctr">
-                        <a:defRPr sz="1000"/>
-                      </a:pPr>
-                      <a:r>
-                        <a:t>⚠️ Dangerous</a:t>
-                      </a:r>
-                    </a:p>
-                  </a:txBody>
-                  <a:tcPr>
-                    <a:solidFill>
-                      <a:srgbClr val="FEE2E2"/>
-                    </a:solidFill>
-                  </a:tcPr>
-                </a:tc>
-                <a:tc>
-                  <a:txBody>
-                    <a:bodyPr/>
-                    <a:lstStyle/>
-                    <a:p>
-                      <a:pPr>
-                        <a:defRPr sz="1000"/>
-                      </a:pPr>
-                      <a:r>
-                        <a:t>Account management</a:t>
-                      </a:r>
-                    </a:p>
-                  </a:txBody>
-                  <a:tcPr/>
-                </a:tc>
-              </a:tr>
-              <a:tr h="502920">
-                <a:tc>
-                  <a:txBody>
-                    <a:bodyPr/>
-                    <a:lstStyle/>
-                    <a:p>
-                      <a:pPr>
-                        <a:defRPr sz="1000" b="1"/>
-                      </a:pPr>
-                      <a:r>
-                        <a:t>generate_chart</a:t>
-                      </a:r>
-                    </a:p>
-                  </a:txBody>
-                  <a:tcPr>
-                    <a:solidFill>
-                      <a:srgbClr val="F8FAFC"/>
-                    </a:solidFill>
-                  </a:tcPr>
-                </a:tc>
-                <a:tc>
-                  <a:txBody>
-                    <a:bodyPr/>
-                    <a:lstStyle/>
-                    <a:p>
-                      <a:pPr algn="ctr">
-                        <a:defRPr sz="1000"/>
-                      </a:pPr>
-                      <a:r>
-                        <a:t>✅</a:t>
-                      </a:r>
-                    </a:p>
-                  </a:txBody>
-                  <a:tcPr>
-                    <a:solidFill>
-                      <a:srgbClr val="F8FAFC"/>
-                    </a:solidFill>
-                  </a:tcPr>
-                </a:tc>
-                <a:tc>
-                  <a:txBody>
-                    <a:bodyPr/>
-                    <a:lstStyle/>
-                    <a:p>
-                      <a:pPr algn="ctr">
-                        <a:defRPr sz="1000"/>
-                      </a:pPr>
-                      <a:r>
-                        <a:t>❌</a:t>
-                      </a:r>
-                    </a:p>
-                  </a:txBody>
-                  <a:tcPr>
-                    <a:solidFill>
-                      <a:srgbClr val="F8FAFC"/>
-                    </a:solidFill>
-                  </a:tcPr>
-                </a:tc>
-                <a:tc>
-                  <a:txBody>
-                    <a:bodyPr/>
-                    <a:lstStyle/>
-                    <a:p>
-                      <a:pPr algn="ctr">
-                        <a:defRPr sz="1000"/>
-                      </a:pPr>
-                      <a:r>
-                        <a:t>❌</a:t>
-                      </a:r>
-                    </a:p>
-                  </a:txBody>
-                  <a:tcPr>
-                    <a:solidFill>
-                      <a:srgbClr val="F8FAFC"/>
-                    </a:solidFill>
-                  </a:tcPr>
-                </a:tc>
-                <a:tc>
-                  <a:txBody>
-                    <a:bodyPr/>
-                    <a:lstStyle/>
-                    <a:p>
-                      <a:pPr algn="ctr">
-                        <a:defRPr sz="1000"/>
-                      </a:pPr>
-                      <a:r>
-                        <a:t>✅ Safe</a:t>
-                      </a:r>
-                    </a:p>
-                  </a:txBody>
-                  <a:tcPr>
-                    <a:solidFill>
-                      <a:srgbClr val="DCFCE7"/>
-                    </a:solidFill>
-                  </a:tcPr>
-                </a:tc>
-                <a:tc>
-                  <a:txBody>
-                    <a:bodyPr/>
-                    <a:lstStyle/>
-                    <a:p>
-                      <a:pPr>
-                        <a:defRPr sz="1000"/>
-                      </a:pPr>
-                      <a:r>
-                        <a:t>Visualization</a:t>
-                      </a:r>
-                    </a:p>
-                  </a:txBody>
-                  <a:tcPr>
-                    <a:solidFill>
-                      <a:srgbClr val="F8FAFC"/>
-                    </a:solidFill>
-                  </a:tcPr>
-                </a:tc>
-              </a:tr>
-              <a:tr h="502920">
-                <a:tc>
-                  <a:txBody>
-                    <a:bodyPr/>
-                    <a:lstStyle/>
-                    <a:p>
-                      <a:pPr>
-                        <a:defRPr sz="1000" b="1"/>
-                      </a:pPr>
-                      <a:r>
-                        <a:t>confirm/cancel</a:t>
-                      </a:r>
-                    </a:p>
-                  </a:txBody>
-                  <a:tcPr/>
-                </a:tc>
-                <a:tc>
-                  <a:txBody>
-                    <a:bodyPr/>
-                    <a:lstStyle/>
-                    <a:p>
-                      <a:pPr algn="ctr">
-                        <a:defRPr sz="1000"/>
-                      </a:pPr>
-                      <a:r>
-                        <a:t>✅</a:t>
-                      </a:r>
-                    </a:p>
-                  </a:txBody>
-                  <a:tcPr/>
-                </a:tc>
-                <a:tc>
-                  <a:txBody>
-                    <a:bodyPr/>
-                    <a:lstStyle/>
-                    <a:p>
-                      <a:pPr algn="ctr">
-                        <a:defRPr sz="1000"/>
-                      </a:pPr>
-                      <a:r>
-                        <a:t>❌</a:t>
-                      </a:r>
-                    </a:p>
-                  </a:txBody>
-                  <a:tcPr/>
-                </a:tc>
-                <a:tc>
-                  <a:txBody>
-                    <a:bodyPr/>
-                    <a:lstStyle/>
-                    <a:p>
-                      <a:pPr algn="ctr">
-                        <a:defRPr sz="1000"/>
-                      </a:pPr>
-                      <a:r>
-                        <a:t>❌</a:t>
-                      </a:r>
-                    </a:p>
-                  </a:txBody>
-                  <a:tcPr/>
-                </a:tc>
-                <a:tc>
-                  <a:txBody>
-                    <a:bodyPr/>
-                    <a:lstStyle/>
-                    <a:p>
-                      <a:pPr algn="ctr">
-                        <a:defRPr sz="1000"/>
-                      </a:pPr>
-                      <a:r>
-                        <a:t>🔐 Protected</a:t>
-                      </a:r>
-                    </a:p>
-                  </a:txBody>
-                  <a:tcPr>
-                    <a:solidFill>
-                      <a:srgbClr val="FEF3C7"/>
-                    </a:solidFill>
-                  </a:tcPr>
-                </a:tc>
-                <a:tc>
-                  <a:txBody>
-                    <a:bodyPr/>
-                    <a:lstStyle/>
-                    <a:p>
-                      <a:pPr>
-                        <a:defRPr sz="1000"/>
-                      </a:pPr>
-                      <a:r>
-                        <a:t>Confirmation flow</a:t>
-                      </a:r>
-                    </a:p>
-                  </a:txBody>
-                  <a:tcPr/>
-                </a:tc>
-              </a:tr>
-            </a:tbl>
-          </a:graphicData>
-        </a:graphic>
-      </p:graphicFrame>
       <p:sp>
         <p:nvSpPr>
           <p:cNvPr id="4" name="TextBox 3"/>
@@ -4245,8 +3151,8 @@
         </p:nvSpPr>
         <p:spPr>
           <a:xfrm>
-            <a:off x="457200" y="6309360"/>
-            <a:ext cx="8229600" cy="365760"/>
+            <a:off x="548640" y="1828800"/>
+            <a:ext cx="10972800" cy="1097280"/>
           </a:xfrm>
           <a:prstGeom prst="rect">
             <a:avLst/>
@@ -4259,15 +3165,6442 @@
           </a:bodyPr>
           <a:lstStyle/>
           <a:p>
-            <a:pPr algn="ctr">
-              <a:defRPr sz="900">
-                <a:solidFill>
-                  <a:srgbClr val="4B5563"/>
-                </a:solidFill>
+            <a:pPr>
+              <a:defRPr sz="2000">
+                <a:latin typeface="Calibri"/>
               </a:defRPr>
             </a:pPr>
             <a:r>
-              <a:t>Legend: ✅ = Has Access, ❌ = No Access | Safety: ✅ Safe (Execute immediately) | ⚠️ Dangerous (Needs confirmation) | 🔐 Protected (User control)</a:t>
+              <a:t>Observer and Operator Tool Surfaces (Current Configuration)</a:t>
+            </a:r>
+          </a:p>
+        </p:txBody>
+      </p:sp>
+    </p:spTree>
+  </p:cSld>
+  <p:clrMapOvr>
+    <a:masterClrMapping/>
+  </p:clrMapOvr>
+</p:sld>
+</file>
+
+<file path=ppt/slides/slide2.xml><?xml version="1.0" encoding="utf-8"?>
+<p:sld xmlns:a="http://schemas.openxmlformats.org/drawingml/2006/main" xmlns:p="http://schemas.openxmlformats.org/presentationml/2006/main" xmlns:r="http://schemas.openxmlformats.org/officeDocument/2006/relationships">
+  <p:cSld>
+    <p:spTree>
+      <p:nvGrpSpPr>
+        <p:cNvPr id="1" name=""/>
+        <p:cNvGrpSpPr/>
+        <p:nvPr/>
+      </p:nvGrpSpPr>
+      <p:grpSpPr/>
+      <p:sp>
+        <p:nvSpPr>
+          <p:cNvPr id="2" name="Title 1"/>
+          <p:cNvSpPr>
+            <a:spLocks noGrp="1"/>
+          </p:cNvSpPr>
+          <p:nvPr>
+            <p:ph type="title"/>
+          </p:nvPr>
+        </p:nvSpPr>
+        <p:spPr/>
+        <p:txBody>
+          <a:bodyPr/>
+          <a:lstStyle/>
+          <a:p/>
+        </p:txBody>
+      </p:sp>
+      <p:sp>
+        <p:nvSpPr>
+          <p:cNvPr id="3" name="TextBox 2"/>
+          <p:cNvSpPr txBox="1"/>
+          <p:nvPr/>
+        </p:nvSpPr>
+        <p:spPr>
+          <a:xfrm>
+            <a:off x="365760" y="182880"/>
+            <a:ext cx="11521440" cy="548640"/>
+          </a:xfrm>
+          <a:prstGeom prst="rect">
+            <a:avLst/>
+          </a:prstGeom>
+          <a:noFill/>
+        </p:spPr>
+        <p:txBody>
+          <a:bodyPr wrap="none">
+            <a:spAutoFit/>
+          </a:bodyPr>
+          <a:lstStyle/>
+          <a:p>
+            <a:pPr>
+              <a:defRPr sz="2400" b="1">
+                <a:latin typeface="Calibri"/>
+              </a:defRPr>
+            </a:pPr>
+            <a:r>
+              <a:t>Observer Tool Inventory</a:t>
+            </a:r>
+          </a:p>
+        </p:txBody>
+      </p:sp>
+      <p:graphicFrame>
+        <p:nvGraphicFramePr>
+          <p:cNvPr id="4" name="Table 3"/>
+          <p:cNvGraphicFramePr>
+            <a:graphicFrameLocks noGrp="1"/>
+          </p:cNvGraphicFramePr>
+          <p:nvPr/>
+        </p:nvGraphicFramePr>
+        <p:xfrm>
+          <a:off x="365760" y="822960"/>
+          <a:ext cx="11521440" cy="5303520"/>
+        </p:xfrm>
+        <a:graphic>
+          <a:graphicData uri="http://schemas.openxmlformats.org/drawingml/2006/table">
+            <a:tbl>
+              <a:tblPr firstRow="1" bandRow="1">
+                <a:tableStyleId>{5C22544A-7EE6-4342-B048-85BDC9FD1C3A}</a:tableStyleId>
+              </a:tblPr>
+              <a:tblGrid>
+                <a:gridCol w="731520"/>
+                <a:gridCol w="5029200"/>
+                <a:gridCol w="2560320"/>
+                <a:gridCol w="3200400"/>
+              </a:tblGrid>
+              <a:tr h="331470">
+                <a:tc>
+                  <a:txBody>
+                    <a:bodyPr/>
+                    <a:lstStyle/>
+                    <a:p>
+                      <a:pPr>
+                        <a:defRPr b="1" sz="1100">
+                          <a:latin typeface="Calibri"/>
+                        </a:defRPr>
+                      </a:pPr>
+                      <a:r>
+                        <a:t>#</a:t>
+                      </a:r>
+                    </a:p>
+                  </a:txBody>
+                  <a:tcPr>
+                    <a:solidFill>
+                      <a:srgbClr val="E6E6E6"/>
+                    </a:solidFill>
+                  </a:tcPr>
+                </a:tc>
+                <a:tc>
+                  <a:txBody>
+                    <a:bodyPr/>
+                    <a:lstStyle/>
+                    <a:p>
+                      <a:pPr>
+                        <a:defRPr b="1" sz="1100">
+                          <a:latin typeface="Calibri"/>
+                        </a:defRPr>
+                      </a:pPr>
+                      <a:r>
+                        <a:t>Tool</a:t>
+                      </a:r>
+                    </a:p>
+                  </a:txBody>
+                  <a:tcPr>
+                    <a:solidFill>
+                      <a:srgbClr val="E6E6E6"/>
+                    </a:solidFill>
+                  </a:tcPr>
+                </a:tc>
+                <a:tc>
+                  <a:txBody>
+                    <a:bodyPr/>
+                    <a:lstStyle/>
+                    <a:p>
+                      <a:pPr>
+                        <a:defRPr b="1" sz="1100">
+                          <a:latin typeface="Calibri"/>
+                        </a:defRPr>
+                      </a:pPr>
+                      <a:r>
+                        <a:t>Type</a:t>
+                      </a:r>
+                    </a:p>
+                  </a:txBody>
+                  <a:tcPr>
+                    <a:solidFill>
+                      <a:srgbClr val="E6E6E6"/>
+                    </a:solidFill>
+                  </a:tcPr>
+                </a:tc>
+                <a:tc>
+                  <a:txBody>
+                    <a:bodyPr/>
+                    <a:lstStyle/>
+                    <a:p>
+                      <a:pPr>
+                        <a:defRPr b="1" sz="1100">
+                          <a:latin typeface="Calibri"/>
+                        </a:defRPr>
+                      </a:pPr>
+                      <a:r>
+                        <a:t>Category</a:t>
+                      </a:r>
+                    </a:p>
+                  </a:txBody>
+                  <a:tcPr>
+                    <a:solidFill>
+                      <a:srgbClr val="E6E6E6"/>
+                    </a:solidFill>
+                  </a:tcPr>
+                </a:tc>
+              </a:tr>
+              <a:tr h="331470">
+                <a:tc>
+                  <a:txBody>
+                    <a:bodyPr/>
+                    <a:lstStyle/>
+                    <a:p>
+                      <a:pPr>
+                        <a:defRPr sz="1100">
+                          <a:latin typeface="Calibri"/>
+                        </a:defRPr>
+                      </a:pPr>
+                      <a:r>
+                        <a:t>1</a:t>
+                      </a:r>
+                    </a:p>
+                  </a:txBody>
+                  <a:tcPr/>
+                </a:tc>
+                <a:tc>
+                  <a:txBody>
+                    <a:bodyPr/>
+                    <a:lstStyle/>
+                    <a:p>
+                      <a:pPr>
+                        <a:defRPr sz="1100">
+                          <a:latin typeface="Calibri"/>
+                        </a:defRPr>
+                      </a:pPr>
+                      <a:r>
+                        <a:t>squeue</a:t>
+                      </a:r>
+                    </a:p>
+                  </a:txBody>
+                  <a:tcPr/>
+                </a:tc>
+                <a:tc>
+                  <a:txBody>
+                    <a:bodyPr/>
+                    <a:lstStyle/>
+                    <a:p>
+                      <a:pPr>
+                        <a:defRPr sz="1100">
+                          <a:latin typeface="Calibri"/>
+                        </a:defRPr>
+                      </a:pPr>
+                      <a:r>
+                        <a:t>MCP</a:t>
+                      </a:r>
+                    </a:p>
+                  </a:txBody>
+                  <a:tcPr/>
+                </a:tc>
+                <a:tc>
+                  <a:txBody>
+                    <a:bodyPr/>
+                    <a:lstStyle/>
+                    <a:p>
+                      <a:pPr>
+                        <a:defRPr sz="1100">
+                          <a:latin typeface="Calibri"/>
+                        </a:defRPr>
+                      </a:pPr>
+                      <a:r>
+                        <a:t>job queries</a:t>
+                      </a:r>
+                    </a:p>
+                  </a:txBody>
+                  <a:tcPr/>
+                </a:tc>
+              </a:tr>
+              <a:tr h="331470">
+                <a:tc>
+                  <a:txBody>
+                    <a:bodyPr/>
+                    <a:lstStyle/>
+                    <a:p>
+                      <a:pPr>
+                        <a:defRPr sz="1100">
+                          <a:latin typeface="Calibri"/>
+                        </a:defRPr>
+                      </a:pPr>
+                      <a:r>
+                        <a:t>2</a:t>
+                      </a:r>
+                    </a:p>
+                  </a:txBody>
+                  <a:tcPr>
+                    <a:solidFill>
+                      <a:srgbClr val="F8F8F8"/>
+                    </a:solidFill>
+                  </a:tcPr>
+                </a:tc>
+                <a:tc>
+                  <a:txBody>
+                    <a:bodyPr/>
+                    <a:lstStyle/>
+                    <a:p>
+                      <a:pPr>
+                        <a:defRPr sz="1100">
+                          <a:latin typeface="Calibri"/>
+                        </a:defRPr>
+                      </a:pPr>
+                      <a:r>
+                        <a:t>sacct</a:t>
+                      </a:r>
+                    </a:p>
+                  </a:txBody>
+                  <a:tcPr>
+                    <a:solidFill>
+                      <a:srgbClr val="F8F8F8"/>
+                    </a:solidFill>
+                  </a:tcPr>
+                </a:tc>
+                <a:tc>
+                  <a:txBody>
+                    <a:bodyPr/>
+                    <a:lstStyle/>
+                    <a:p>
+                      <a:pPr>
+                        <a:defRPr sz="1100">
+                          <a:latin typeface="Calibri"/>
+                        </a:defRPr>
+                      </a:pPr>
+                      <a:r>
+                        <a:t>MCP</a:t>
+                      </a:r>
+                    </a:p>
+                  </a:txBody>
+                  <a:tcPr>
+                    <a:solidFill>
+                      <a:srgbClr val="F8F8F8"/>
+                    </a:solidFill>
+                  </a:tcPr>
+                </a:tc>
+                <a:tc>
+                  <a:txBody>
+                    <a:bodyPr/>
+                    <a:lstStyle/>
+                    <a:p>
+                      <a:pPr>
+                        <a:defRPr sz="1100">
+                          <a:latin typeface="Calibri"/>
+                        </a:defRPr>
+                      </a:pPr>
+                      <a:r>
+                        <a:t>job queries</a:t>
+                      </a:r>
+                    </a:p>
+                  </a:txBody>
+                  <a:tcPr>
+                    <a:solidFill>
+                      <a:srgbClr val="F8F8F8"/>
+                    </a:solidFill>
+                  </a:tcPr>
+                </a:tc>
+              </a:tr>
+              <a:tr h="331470">
+                <a:tc>
+                  <a:txBody>
+                    <a:bodyPr/>
+                    <a:lstStyle/>
+                    <a:p>
+                      <a:pPr>
+                        <a:defRPr sz="1100">
+                          <a:latin typeface="Calibri"/>
+                        </a:defRPr>
+                      </a:pPr>
+                      <a:r>
+                        <a:t>3</a:t>
+                      </a:r>
+                    </a:p>
+                  </a:txBody>
+                  <a:tcPr/>
+                </a:tc>
+                <a:tc>
+                  <a:txBody>
+                    <a:bodyPr/>
+                    <a:lstStyle/>
+                    <a:p>
+                      <a:pPr>
+                        <a:defRPr sz="1100">
+                          <a:latin typeface="Calibri"/>
+                        </a:defRPr>
+                      </a:pPr>
+                      <a:r>
+                        <a:t>sstat</a:t>
+                      </a:r>
+                    </a:p>
+                  </a:txBody>
+                  <a:tcPr/>
+                </a:tc>
+                <a:tc>
+                  <a:txBody>
+                    <a:bodyPr/>
+                    <a:lstStyle/>
+                    <a:p>
+                      <a:pPr>
+                        <a:defRPr sz="1100">
+                          <a:latin typeface="Calibri"/>
+                        </a:defRPr>
+                      </a:pPr>
+                      <a:r>
+                        <a:t>MCP</a:t>
+                      </a:r>
+                    </a:p>
+                  </a:txBody>
+                  <a:tcPr/>
+                </a:tc>
+                <a:tc>
+                  <a:txBody>
+                    <a:bodyPr/>
+                    <a:lstStyle/>
+                    <a:p>
+                      <a:pPr>
+                        <a:defRPr sz="1100">
+                          <a:latin typeface="Calibri"/>
+                        </a:defRPr>
+                      </a:pPr>
+                      <a:r>
+                        <a:t>job queries</a:t>
+                      </a:r>
+                    </a:p>
+                  </a:txBody>
+                  <a:tcPr/>
+                </a:tc>
+              </a:tr>
+              <a:tr h="331470">
+                <a:tc>
+                  <a:txBody>
+                    <a:bodyPr/>
+                    <a:lstStyle/>
+                    <a:p>
+                      <a:pPr>
+                        <a:defRPr sz="1100">
+                          <a:latin typeface="Calibri"/>
+                        </a:defRPr>
+                      </a:pPr>
+                      <a:r>
+                        <a:t>4</a:t>
+                      </a:r>
+                    </a:p>
+                  </a:txBody>
+                  <a:tcPr>
+                    <a:solidFill>
+                      <a:srgbClr val="F8F8F8"/>
+                    </a:solidFill>
+                  </a:tcPr>
+                </a:tc>
+                <a:tc>
+                  <a:txBody>
+                    <a:bodyPr/>
+                    <a:lstStyle/>
+                    <a:p>
+                      <a:pPr>
+                        <a:defRPr sz="1100">
+                          <a:latin typeface="Calibri"/>
+                        </a:defRPr>
+                      </a:pPr>
+                      <a:r>
+                        <a:t>squeue_steps</a:t>
+                      </a:r>
+                    </a:p>
+                  </a:txBody>
+                  <a:tcPr>
+                    <a:solidFill>
+                      <a:srgbClr val="F8F8F8"/>
+                    </a:solidFill>
+                  </a:tcPr>
+                </a:tc>
+                <a:tc>
+                  <a:txBody>
+                    <a:bodyPr/>
+                    <a:lstStyle/>
+                    <a:p>
+                      <a:pPr>
+                        <a:defRPr sz="1100">
+                          <a:latin typeface="Calibri"/>
+                        </a:defRPr>
+                      </a:pPr>
+                      <a:r>
+                        <a:t>MCP</a:t>
+                      </a:r>
+                    </a:p>
+                  </a:txBody>
+                  <a:tcPr>
+                    <a:solidFill>
+                      <a:srgbClr val="F8F8F8"/>
+                    </a:solidFill>
+                  </a:tcPr>
+                </a:tc>
+                <a:tc>
+                  <a:txBody>
+                    <a:bodyPr/>
+                    <a:lstStyle/>
+                    <a:p>
+                      <a:pPr>
+                        <a:defRPr sz="1100">
+                          <a:latin typeface="Calibri"/>
+                        </a:defRPr>
+                      </a:pPr>
+                      <a:r>
+                        <a:t>job queries</a:t>
+                      </a:r>
+                    </a:p>
+                  </a:txBody>
+                  <a:tcPr>
+                    <a:solidFill>
+                      <a:srgbClr val="F8F8F8"/>
+                    </a:solidFill>
+                  </a:tcPr>
+                </a:tc>
+              </a:tr>
+              <a:tr h="331470">
+                <a:tc>
+                  <a:txBody>
+                    <a:bodyPr/>
+                    <a:lstStyle/>
+                    <a:p>
+                      <a:pPr>
+                        <a:defRPr sz="1100">
+                          <a:latin typeface="Calibri"/>
+                        </a:defRPr>
+                      </a:pPr>
+                      <a:r>
+                        <a:t>5</a:t>
+                      </a:r>
+                    </a:p>
+                  </a:txBody>
+                  <a:tcPr/>
+                </a:tc>
+                <a:tc>
+                  <a:txBody>
+                    <a:bodyPr/>
+                    <a:lstStyle/>
+                    <a:p>
+                      <a:pPr>
+                        <a:defRPr sz="1100">
+                          <a:latin typeface="Calibri"/>
+                        </a:defRPr>
+                      </a:pPr>
+                      <a:r>
+                        <a:t>squeue_reservation</a:t>
+                      </a:r>
+                    </a:p>
+                  </a:txBody>
+                  <a:tcPr/>
+                </a:tc>
+                <a:tc>
+                  <a:txBody>
+                    <a:bodyPr/>
+                    <a:lstStyle/>
+                    <a:p>
+                      <a:pPr>
+                        <a:defRPr sz="1100">
+                          <a:latin typeface="Calibri"/>
+                        </a:defRPr>
+                      </a:pPr>
+                      <a:r>
+                        <a:t>MCP</a:t>
+                      </a:r>
+                    </a:p>
+                  </a:txBody>
+                  <a:tcPr/>
+                </a:tc>
+                <a:tc>
+                  <a:txBody>
+                    <a:bodyPr/>
+                    <a:lstStyle/>
+                    <a:p>
+                      <a:pPr>
+                        <a:defRPr sz="1100">
+                          <a:latin typeface="Calibri"/>
+                        </a:defRPr>
+                      </a:pPr>
+                      <a:r>
+                        <a:t>job queries</a:t>
+                      </a:r>
+                    </a:p>
+                  </a:txBody>
+                  <a:tcPr/>
+                </a:tc>
+              </a:tr>
+              <a:tr h="331470">
+                <a:tc>
+                  <a:txBody>
+                    <a:bodyPr/>
+                    <a:lstStyle/>
+                    <a:p>
+                      <a:pPr>
+                        <a:defRPr sz="1100">
+                          <a:latin typeface="Calibri"/>
+                        </a:defRPr>
+                      </a:pPr>
+                      <a:r>
+                        <a:t>6</a:t>
+                      </a:r>
+                    </a:p>
+                  </a:txBody>
+                  <a:tcPr>
+                    <a:solidFill>
+                      <a:srgbClr val="F8F8F8"/>
+                    </a:solidFill>
+                  </a:tcPr>
+                </a:tc>
+                <a:tc>
+                  <a:txBody>
+                    <a:bodyPr/>
+                    <a:lstStyle/>
+                    <a:p>
+                      <a:pPr>
+                        <a:defRPr sz="1100">
+                          <a:latin typeface="Calibri"/>
+                        </a:defRPr>
+                      </a:pPr>
+                      <a:r>
+                        <a:t>sinfo</a:t>
+                      </a:r>
+                    </a:p>
+                  </a:txBody>
+                  <a:tcPr>
+                    <a:solidFill>
+                      <a:srgbClr val="F8F8F8"/>
+                    </a:solidFill>
+                  </a:tcPr>
+                </a:tc>
+                <a:tc>
+                  <a:txBody>
+                    <a:bodyPr/>
+                    <a:lstStyle/>
+                    <a:p>
+                      <a:pPr>
+                        <a:defRPr sz="1100">
+                          <a:latin typeface="Calibri"/>
+                        </a:defRPr>
+                      </a:pPr>
+                      <a:r>
+                        <a:t>MCP</a:t>
+                      </a:r>
+                    </a:p>
+                  </a:txBody>
+                  <a:tcPr>
+                    <a:solidFill>
+                      <a:srgbClr val="F8F8F8"/>
+                    </a:solidFill>
+                  </a:tcPr>
+                </a:tc>
+                <a:tc>
+                  <a:txBody>
+                    <a:bodyPr/>
+                    <a:lstStyle/>
+                    <a:p>
+                      <a:pPr>
+                        <a:defRPr sz="1100">
+                          <a:latin typeface="Calibri"/>
+                        </a:defRPr>
+                      </a:pPr>
+                      <a:r>
+                        <a:t>node/cluster</a:t>
+                      </a:r>
+                    </a:p>
+                  </a:txBody>
+                  <a:tcPr>
+                    <a:solidFill>
+                      <a:srgbClr val="F8F8F8"/>
+                    </a:solidFill>
+                  </a:tcPr>
+                </a:tc>
+              </a:tr>
+              <a:tr h="331470">
+                <a:tc>
+                  <a:txBody>
+                    <a:bodyPr/>
+                    <a:lstStyle/>
+                    <a:p>
+                      <a:pPr>
+                        <a:defRPr sz="1100">
+                          <a:latin typeface="Calibri"/>
+                        </a:defRPr>
+                      </a:pPr>
+                      <a:r>
+                        <a:t>7</a:t>
+                      </a:r>
+                    </a:p>
+                  </a:txBody>
+                  <a:tcPr/>
+                </a:tc>
+                <a:tc>
+                  <a:txBody>
+                    <a:bodyPr/>
+                    <a:lstStyle/>
+                    <a:p>
+                      <a:pPr>
+                        <a:defRPr sz="1100">
+                          <a:latin typeface="Calibri"/>
+                        </a:defRPr>
+                      </a:pPr>
+                      <a:r>
+                        <a:t>sinfo_node</a:t>
+                      </a:r>
+                    </a:p>
+                  </a:txBody>
+                  <a:tcPr/>
+                </a:tc>
+                <a:tc>
+                  <a:txBody>
+                    <a:bodyPr/>
+                    <a:lstStyle/>
+                    <a:p>
+                      <a:pPr>
+                        <a:defRPr sz="1100">
+                          <a:latin typeface="Calibri"/>
+                        </a:defRPr>
+                      </a:pPr>
+                      <a:r>
+                        <a:t>MCP</a:t>
+                      </a:r>
+                    </a:p>
+                  </a:txBody>
+                  <a:tcPr/>
+                </a:tc>
+                <a:tc>
+                  <a:txBody>
+                    <a:bodyPr/>
+                    <a:lstStyle/>
+                    <a:p>
+                      <a:pPr>
+                        <a:defRPr sz="1100">
+                          <a:latin typeface="Calibri"/>
+                        </a:defRPr>
+                      </a:pPr>
+                      <a:r>
+                        <a:t>node/cluster</a:t>
+                      </a:r>
+                    </a:p>
+                  </a:txBody>
+                  <a:tcPr/>
+                </a:tc>
+              </a:tr>
+              <a:tr h="331470">
+                <a:tc>
+                  <a:txBody>
+                    <a:bodyPr/>
+                    <a:lstStyle/>
+                    <a:p>
+                      <a:pPr>
+                        <a:defRPr sz="1100">
+                          <a:latin typeface="Calibri"/>
+                        </a:defRPr>
+                      </a:pPr>
+                      <a:r>
+                        <a:t>8</a:t>
+                      </a:r>
+                    </a:p>
+                  </a:txBody>
+                  <a:tcPr>
+                    <a:solidFill>
+                      <a:srgbClr val="F8F8F8"/>
+                    </a:solidFill>
+                  </a:tcPr>
+                </a:tc>
+                <a:tc>
+                  <a:txBody>
+                    <a:bodyPr/>
+                    <a:lstStyle/>
+                    <a:p>
+                      <a:pPr>
+                        <a:defRPr sz="1100">
+                          <a:latin typeface="Calibri"/>
+                        </a:defRPr>
+                      </a:pPr>
+                      <a:r>
+                        <a:t>sinfo_reasons</a:t>
+                      </a:r>
+                    </a:p>
+                  </a:txBody>
+                  <a:tcPr>
+                    <a:solidFill>
+                      <a:srgbClr val="F8F8F8"/>
+                    </a:solidFill>
+                  </a:tcPr>
+                </a:tc>
+                <a:tc>
+                  <a:txBody>
+                    <a:bodyPr/>
+                    <a:lstStyle/>
+                    <a:p>
+                      <a:pPr>
+                        <a:defRPr sz="1100">
+                          <a:latin typeface="Calibri"/>
+                        </a:defRPr>
+                      </a:pPr>
+                      <a:r>
+                        <a:t>MCP</a:t>
+                      </a:r>
+                    </a:p>
+                  </a:txBody>
+                  <a:tcPr>
+                    <a:solidFill>
+                      <a:srgbClr val="F8F8F8"/>
+                    </a:solidFill>
+                  </a:tcPr>
+                </a:tc>
+                <a:tc>
+                  <a:txBody>
+                    <a:bodyPr/>
+                    <a:lstStyle/>
+                    <a:p>
+                      <a:pPr>
+                        <a:defRPr sz="1100">
+                          <a:latin typeface="Calibri"/>
+                        </a:defRPr>
+                      </a:pPr>
+                      <a:r>
+                        <a:t>node/cluster</a:t>
+                      </a:r>
+                    </a:p>
+                  </a:txBody>
+                  <a:tcPr>
+                    <a:solidFill>
+                      <a:srgbClr val="F8F8F8"/>
+                    </a:solidFill>
+                  </a:tcPr>
+                </a:tc>
+              </a:tr>
+              <a:tr h="331470">
+                <a:tc>
+                  <a:txBody>
+                    <a:bodyPr/>
+                    <a:lstStyle/>
+                    <a:p>
+                      <a:pPr>
+                        <a:defRPr sz="1100">
+                          <a:latin typeface="Calibri"/>
+                        </a:defRPr>
+                      </a:pPr>
+                      <a:r>
+                        <a:t>9</a:t>
+                      </a:r>
+                    </a:p>
+                  </a:txBody>
+                  <a:tcPr/>
+                </a:tc>
+                <a:tc>
+                  <a:txBody>
+                    <a:bodyPr/>
+                    <a:lstStyle/>
+                    <a:p>
+                      <a:pPr>
+                        <a:defRPr sz="1100">
+                          <a:latin typeface="Calibri"/>
+                        </a:defRPr>
+                      </a:pPr>
+                      <a:r>
+                        <a:t>scontrol_show</a:t>
+                      </a:r>
+                    </a:p>
+                  </a:txBody>
+                  <a:tcPr/>
+                </a:tc>
+                <a:tc>
+                  <a:txBody>
+                    <a:bodyPr/>
+                    <a:lstStyle/>
+                    <a:p>
+                      <a:pPr>
+                        <a:defRPr sz="1100">
+                          <a:latin typeface="Calibri"/>
+                        </a:defRPr>
+                      </a:pPr>
+                      <a:r>
+                        <a:t>MCP</a:t>
+                      </a:r>
+                    </a:p>
+                  </a:txBody>
+                  <a:tcPr/>
+                </a:tc>
+                <a:tc>
+                  <a:txBody>
+                    <a:bodyPr/>
+                    <a:lstStyle/>
+                    <a:p>
+                      <a:pPr>
+                        <a:defRPr sz="1100">
+                          <a:latin typeface="Calibri"/>
+                        </a:defRPr>
+                      </a:pPr>
+                      <a:r>
+                        <a:t>node/cluster</a:t>
+                      </a:r>
+                    </a:p>
+                  </a:txBody>
+                  <a:tcPr/>
+                </a:tc>
+              </a:tr>
+              <a:tr h="331470">
+                <a:tc>
+                  <a:txBody>
+                    <a:bodyPr/>
+                    <a:lstStyle/>
+                    <a:p>
+                      <a:pPr>
+                        <a:defRPr sz="1100">
+                          <a:latin typeface="Calibri"/>
+                        </a:defRPr>
+                      </a:pPr>
+                      <a:r>
+                        <a:t>10</a:t>
+                      </a:r>
+                    </a:p>
+                  </a:txBody>
+                  <a:tcPr>
+                    <a:solidFill>
+                      <a:srgbClr val="F8F8F8"/>
+                    </a:solidFill>
+                  </a:tcPr>
+                </a:tc>
+                <a:tc>
+                  <a:txBody>
+                    <a:bodyPr/>
+                    <a:lstStyle/>
+                    <a:p>
+                      <a:pPr>
+                        <a:defRPr sz="1100">
+                          <a:latin typeface="Calibri"/>
+                        </a:defRPr>
+                      </a:pPr>
+                      <a:r>
+                        <a:t>scontrol_show_config</a:t>
+                      </a:r>
+                    </a:p>
+                  </a:txBody>
+                  <a:tcPr>
+                    <a:solidFill>
+                      <a:srgbClr val="F8F8F8"/>
+                    </a:solidFill>
+                  </a:tcPr>
+                </a:tc>
+                <a:tc>
+                  <a:txBody>
+                    <a:bodyPr/>
+                    <a:lstStyle/>
+                    <a:p>
+                      <a:pPr>
+                        <a:defRPr sz="1100">
+                          <a:latin typeface="Calibri"/>
+                        </a:defRPr>
+                      </a:pPr>
+                      <a:r>
+                        <a:t>MCP</a:t>
+                      </a:r>
+                    </a:p>
+                  </a:txBody>
+                  <a:tcPr>
+                    <a:solidFill>
+                      <a:srgbClr val="F8F8F8"/>
+                    </a:solidFill>
+                  </a:tcPr>
+                </a:tc>
+                <a:tc>
+                  <a:txBody>
+                    <a:bodyPr/>
+                    <a:lstStyle/>
+                    <a:p>
+                      <a:pPr>
+                        <a:defRPr sz="1100">
+                          <a:latin typeface="Calibri"/>
+                        </a:defRPr>
+                      </a:pPr>
+                      <a:r>
+                        <a:t>node/cluster</a:t>
+                      </a:r>
+                    </a:p>
+                  </a:txBody>
+                  <a:tcPr>
+                    <a:solidFill>
+                      <a:srgbClr val="F8F8F8"/>
+                    </a:solidFill>
+                  </a:tcPr>
+                </a:tc>
+              </a:tr>
+              <a:tr h="331470">
+                <a:tc>
+                  <a:txBody>
+                    <a:bodyPr/>
+                    <a:lstStyle/>
+                    <a:p>
+                      <a:pPr>
+                        <a:defRPr sz="1100">
+                          <a:latin typeface="Calibri"/>
+                        </a:defRPr>
+                      </a:pPr>
+                      <a:r>
+                        <a:t>11</a:t>
+                      </a:r>
+                    </a:p>
+                  </a:txBody>
+                  <a:tcPr/>
+                </a:tc>
+                <a:tc>
+                  <a:txBody>
+                    <a:bodyPr/>
+                    <a:lstStyle/>
+                    <a:p>
+                      <a:pPr>
+                        <a:defRPr sz="1100">
+                          <a:latin typeface="Calibri"/>
+                        </a:defRPr>
+                      </a:pPr>
+                      <a:r>
+                        <a:t>scontrol_show_topology</a:t>
+                      </a:r>
+                    </a:p>
+                  </a:txBody>
+                  <a:tcPr/>
+                </a:tc>
+                <a:tc>
+                  <a:txBody>
+                    <a:bodyPr/>
+                    <a:lstStyle/>
+                    <a:p>
+                      <a:pPr>
+                        <a:defRPr sz="1100">
+                          <a:latin typeface="Calibri"/>
+                        </a:defRPr>
+                      </a:pPr>
+                      <a:r>
+                        <a:t>MCP</a:t>
+                      </a:r>
+                    </a:p>
+                  </a:txBody>
+                  <a:tcPr/>
+                </a:tc>
+                <a:tc>
+                  <a:txBody>
+                    <a:bodyPr/>
+                    <a:lstStyle/>
+                    <a:p>
+                      <a:pPr>
+                        <a:defRPr sz="1100">
+                          <a:latin typeface="Calibri"/>
+                        </a:defRPr>
+                      </a:pPr>
+                      <a:r>
+                        <a:t>node/cluster</a:t>
+                      </a:r>
+                    </a:p>
+                  </a:txBody>
+                  <a:tcPr/>
+                </a:tc>
+              </a:tr>
+              <a:tr h="331470">
+                <a:tc>
+                  <a:txBody>
+                    <a:bodyPr/>
+                    <a:lstStyle/>
+                    <a:p>
+                      <a:pPr>
+                        <a:defRPr sz="1100">
+                          <a:latin typeface="Calibri"/>
+                        </a:defRPr>
+                      </a:pPr>
+                      <a:r>
+                        <a:t>12</a:t>
+                      </a:r>
+                    </a:p>
+                  </a:txBody>
+                  <a:tcPr>
+                    <a:solidFill>
+                      <a:srgbClr val="F8F8F8"/>
+                    </a:solidFill>
+                  </a:tcPr>
+                </a:tc>
+                <a:tc>
+                  <a:txBody>
+                    <a:bodyPr/>
+                    <a:lstStyle/>
+                    <a:p>
+                      <a:pPr>
+                        <a:defRPr sz="1100">
+                          <a:latin typeface="Calibri"/>
+                        </a:defRPr>
+                      </a:pPr>
+                      <a:r>
+                        <a:t>scontrol_show_step</a:t>
+                      </a:r>
+                    </a:p>
+                  </a:txBody>
+                  <a:tcPr>
+                    <a:solidFill>
+                      <a:srgbClr val="F8F8F8"/>
+                    </a:solidFill>
+                  </a:tcPr>
+                </a:tc>
+                <a:tc>
+                  <a:txBody>
+                    <a:bodyPr/>
+                    <a:lstStyle/>
+                    <a:p>
+                      <a:pPr>
+                        <a:defRPr sz="1100">
+                          <a:latin typeface="Calibri"/>
+                        </a:defRPr>
+                      </a:pPr>
+                      <a:r>
+                        <a:t>MCP</a:t>
+                      </a:r>
+                    </a:p>
+                  </a:txBody>
+                  <a:tcPr>
+                    <a:solidFill>
+                      <a:srgbClr val="F8F8F8"/>
+                    </a:solidFill>
+                  </a:tcPr>
+                </a:tc>
+                <a:tc>
+                  <a:txBody>
+                    <a:bodyPr/>
+                    <a:lstStyle/>
+                    <a:p>
+                      <a:pPr>
+                        <a:defRPr sz="1100">
+                          <a:latin typeface="Calibri"/>
+                        </a:defRPr>
+                      </a:pPr>
+                      <a:r>
+                        <a:t>node/cluster</a:t>
+                      </a:r>
+                    </a:p>
+                  </a:txBody>
+                  <a:tcPr>
+                    <a:solidFill>
+                      <a:srgbClr val="F8F8F8"/>
+                    </a:solidFill>
+                  </a:tcPr>
+                </a:tc>
+              </a:tr>
+              <a:tr h="331470">
+                <a:tc>
+                  <a:txBody>
+                    <a:bodyPr/>
+                    <a:lstStyle/>
+                    <a:p>
+                      <a:pPr>
+                        <a:defRPr sz="1100">
+                          <a:latin typeface="Calibri"/>
+                        </a:defRPr>
+                      </a:pPr>
+                      <a:r>
+                        <a:t>13</a:t>
+                      </a:r>
+                    </a:p>
+                  </a:txBody>
+                  <a:tcPr/>
+                </a:tc>
+                <a:tc>
+                  <a:txBody>
+                    <a:bodyPr/>
+                    <a:lstStyle/>
+                    <a:p>
+                      <a:pPr>
+                        <a:defRPr sz="1100">
+                          <a:latin typeface="Calibri"/>
+                        </a:defRPr>
+                      </a:pPr>
+                      <a:r>
+                        <a:t>scontrol_show_federation</a:t>
+                      </a:r>
+                    </a:p>
+                  </a:txBody>
+                  <a:tcPr/>
+                </a:tc>
+                <a:tc>
+                  <a:txBody>
+                    <a:bodyPr/>
+                    <a:lstStyle/>
+                    <a:p>
+                      <a:pPr>
+                        <a:defRPr sz="1100">
+                          <a:latin typeface="Calibri"/>
+                        </a:defRPr>
+                      </a:pPr>
+                      <a:r>
+                        <a:t>MCP</a:t>
+                      </a:r>
+                    </a:p>
+                  </a:txBody>
+                  <a:tcPr/>
+                </a:tc>
+                <a:tc>
+                  <a:txBody>
+                    <a:bodyPr/>
+                    <a:lstStyle/>
+                    <a:p>
+                      <a:pPr>
+                        <a:defRPr sz="1100">
+                          <a:latin typeface="Calibri"/>
+                        </a:defRPr>
+                      </a:pPr>
+                      <a:r>
+                        <a:t>node/cluster</a:t>
+                      </a:r>
+                    </a:p>
+                  </a:txBody>
+                  <a:tcPr/>
+                </a:tc>
+              </a:tr>
+              <a:tr h="331470">
+                <a:tc>
+                  <a:txBody>
+                    <a:bodyPr/>
+                    <a:lstStyle/>
+                    <a:p>
+                      <a:pPr>
+                        <a:defRPr sz="1100">
+                          <a:latin typeface="Calibri"/>
+                        </a:defRPr>
+                      </a:pPr>
+                      <a:r>
+                        <a:t>14</a:t>
+                      </a:r>
+                    </a:p>
+                  </a:txBody>
+                  <a:tcPr>
+                    <a:solidFill>
+                      <a:srgbClr val="F8F8F8"/>
+                    </a:solidFill>
+                  </a:tcPr>
+                </a:tc>
+                <a:tc>
+                  <a:txBody>
+                    <a:bodyPr/>
+                    <a:lstStyle/>
+                    <a:p>
+                      <a:pPr>
+                        <a:defRPr sz="1100">
+                          <a:latin typeface="Calibri"/>
+                        </a:defRPr>
+                      </a:pPr>
+                      <a:r>
+                        <a:t>scontrol_show_burstbuffer</a:t>
+                      </a:r>
+                    </a:p>
+                  </a:txBody>
+                  <a:tcPr>
+                    <a:solidFill>
+                      <a:srgbClr val="F8F8F8"/>
+                    </a:solidFill>
+                  </a:tcPr>
+                </a:tc>
+                <a:tc>
+                  <a:txBody>
+                    <a:bodyPr/>
+                    <a:lstStyle/>
+                    <a:p>
+                      <a:pPr>
+                        <a:defRPr sz="1100">
+                          <a:latin typeface="Calibri"/>
+                        </a:defRPr>
+                      </a:pPr>
+                      <a:r>
+                        <a:t>MCP</a:t>
+                      </a:r>
+                    </a:p>
+                  </a:txBody>
+                  <a:tcPr>
+                    <a:solidFill>
+                      <a:srgbClr val="F8F8F8"/>
+                    </a:solidFill>
+                  </a:tcPr>
+                </a:tc>
+                <a:tc>
+                  <a:txBody>
+                    <a:bodyPr/>
+                    <a:lstStyle/>
+                    <a:p>
+                      <a:pPr>
+                        <a:defRPr sz="1100">
+                          <a:latin typeface="Calibri"/>
+                        </a:defRPr>
+                      </a:pPr>
+                      <a:r>
+                        <a:t>node/cluster</a:t>
+                      </a:r>
+                    </a:p>
+                  </a:txBody>
+                  <a:tcPr>
+                    <a:solidFill>
+                      <a:srgbClr val="F8F8F8"/>
+                    </a:solidFill>
+                  </a:tcPr>
+                </a:tc>
+              </a:tr>
+              <a:tr h="331470">
+                <a:tc>
+                  <a:txBody>
+                    <a:bodyPr/>
+                    <a:lstStyle/>
+                    <a:p>
+                      <a:pPr>
+                        <a:defRPr sz="1100">
+                          <a:latin typeface="Calibri"/>
+                        </a:defRPr>
+                      </a:pPr>
+                      <a:r>
+                        <a:t>15</a:t>
+                      </a:r>
+                    </a:p>
+                  </a:txBody>
+                  <a:tcPr/>
+                </a:tc>
+                <a:tc>
+                  <a:txBody>
+                    <a:bodyPr/>
+                    <a:lstStyle/>
+                    <a:p>
+                      <a:pPr>
+                        <a:defRPr sz="1100">
+                          <a:latin typeface="Calibri"/>
+                        </a:defRPr>
+                      </a:pPr>
+                      <a:r>
+                        <a:t>scontrol_show_aliases</a:t>
+                      </a:r>
+                    </a:p>
+                  </a:txBody>
+                  <a:tcPr/>
+                </a:tc>
+                <a:tc>
+                  <a:txBody>
+                    <a:bodyPr/>
+                    <a:lstStyle/>
+                    <a:p>
+                      <a:pPr>
+                        <a:defRPr sz="1100">
+                          <a:latin typeface="Calibri"/>
+                        </a:defRPr>
+                      </a:pPr>
+                      <a:r>
+                        <a:t>MCP</a:t>
+                      </a:r>
+                    </a:p>
+                  </a:txBody>
+                  <a:tcPr/>
+                </a:tc>
+                <a:tc>
+                  <a:txBody>
+                    <a:bodyPr/>
+                    <a:lstStyle/>
+                    <a:p>
+                      <a:pPr>
+                        <a:defRPr sz="1100">
+                          <a:latin typeface="Calibri"/>
+                        </a:defRPr>
+                      </a:pPr>
+                      <a:r>
+                        <a:t>node/cluster</a:t>
+                      </a:r>
+                    </a:p>
+                  </a:txBody>
+                  <a:tcPr/>
+                </a:tc>
+              </a:tr>
+            </a:tbl>
+          </a:graphicData>
+        </a:graphic>
+      </p:graphicFrame>
+      <p:sp>
+        <p:nvSpPr>
+          <p:cNvPr id="5" name="TextBox 4"/>
+          <p:cNvSpPr txBox="1"/>
+          <p:nvPr/>
+        </p:nvSpPr>
+        <p:spPr>
+          <a:xfrm>
+            <a:off x="411480" y="6217920"/>
+            <a:ext cx="11155680" cy="411480"/>
+          </a:xfrm>
+          <a:prstGeom prst="rect">
+            <a:avLst/>
+          </a:prstGeom>
+          <a:noFill/>
+        </p:spPr>
+        <p:txBody>
+          <a:bodyPr wrap="none">
+            <a:spAutoFit/>
+          </a:bodyPr>
+          <a:lstStyle/>
+          <a:p>
+            <a:pPr>
+              <a:defRPr sz="1100" i="1">
+                <a:latin typeface="Calibri"/>
+              </a:defRPr>
+            </a:pPr>
+            <a:r>
+              <a:t>Part 1 of 2</a:t>
+            </a:r>
+          </a:p>
+        </p:txBody>
+      </p:sp>
+    </p:spTree>
+  </p:cSld>
+  <p:clrMapOvr>
+    <a:masterClrMapping/>
+  </p:clrMapOvr>
+</p:sld>
+</file>
+
+<file path=ppt/slides/slide3.xml><?xml version="1.0" encoding="utf-8"?>
+<p:sld xmlns:a="http://schemas.openxmlformats.org/drawingml/2006/main" xmlns:p="http://schemas.openxmlformats.org/presentationml/2006/main" xmlns:r="http://schemas.openxmlformats.org/officeDocument/2006/relationships">
+  <p:cSld>
+    <p:spTree>
+      <p:nvGrpSpPr>
+        <p:cNvPr id="1" name=""/>
+        <p:cNvGrpSpPr/>
+        <p:nvPr/>
+      </p:nvGrpSpPr>
+      <p:grpSpPr/>
+      <p:sp>
+        <p:nvSpPr>
+          <p:cNvPr id="2" name="Title 1"/>
+          <p:cNvSpPr>
+            <a:spLocks noGrp="1"/>
+          </p:cNvSpPr>
+          <p:nvPr>
+            <p:ph type="title"/>
+          </p:nvPr>
+        </p:nvSpPr>
+        <p:spPr/>
+        <p:txBody>
+          <a:bodyPr/>
+          <a:lstStyle/>
+          <a:p/>
+        </p:txBody>
+      </p:sp>
+      <p:sp>
+        <p:nvSpPr>
+          <p:cNvPr id="3" name="TextBox 2"/>
+          <p:cNvSpPr txBox="1"/>
+          <p:nvPr/>
+        </p:nvSpPr>
+        <p:spPr>
+          <a:xfrm>
+            <a:off x="365760" y="182880"/>
+            <a:ext cx="11521440" cy="548640"/>
+          </a:xfrm>
+          <a:prstGeom prst="rect">
+            <a:avLst/>
+          </a:prstGeom>
+          <a:noFill/>
+        </p:spPr>
+        <p:txBody>
+          <a:bodyPr wrap="none">
+            <a:spAutoFit/>
+          </a:bodyPr>
+          <a:lstStyle/>
+          <a:p>
+            <a:pPr>
+              <a:defRPr sz="2400" b="1">
+                <a:latin typeface="Calibri"/>
+              </a:defRPr>
+            </a:pPr>
+            <a:r>
+              <a:t>Observer Tool Inventory</a:t>
+            </a:r>
+          </a:p>
+        </p:txBody>
+      </p:sp>
+      <p:graphicFrame>
+        <p:nvGraphicFramePr>
+          <p:cNvPr id="4" name="Table 3"/>
+          <p:cNvGraphicFramePr>
+            <a:graphicFrameLocks noGrp="1"/>
+          </p:cNvGraphicFramePr>
+          <p:nvPr/>
+        </p:nvGraphicFramePr>
+        <p:xfrm>
+          <a:off x="365760" y="822960"/>
+          <a:ext cx="11521440" cy="5303520"/>
+        </p:xfrm>
+        <a:graphic>
+          <a:graphicData uri="http://schemas.openxmlformats.org/drawingml/2006/table">
+            <a:tbl>
+              <a:tblPr firstRow="1" bandRow="1">
+                <a:tableStyleId>{5C22544A-7EE6-4342-B048-85BDC9FD1C3A}</a:tableStyleId>
+              </a:tblPr>
+              <a:tblGrid>
+                <a:gridCol w="731520"/>
+                <a:gridCol w="5029200"/>
+                <a:gridCol w="2560320"/>
+                <a:gridCol w="3200400"/>
+              </a:tblGrid>
+              <a:tr h="331470">
+                <a:tc>
+                  <a:txBody>
+                    <a:bodyPr/>
+                    <a:lstStyle/>
+                    <a:p>
+                      <a:pPr>
+                        <a:defRPr b="1" sz="1100">
+                          <a:latin typeface="Calibri"/>
+                        </a:defRPr>
+                      </a:pPr>
+                      <a:r>
+                        <a:t>#</a:t>
+                      </a:r>
+                    </a:p>
+                  </a:txBody>
+                  <a:tcPr>
+                    <a:solidFill>
+                      <a:srgbClr val="E6E6E6"/>
+                    </a:solidFill>
+                  </a:tcPr>
+                </a:tc>
+                <a:tc>
+                  <a:txBody>
+                    <a:bodyPr/>
+                    <a:lstStyle/>
+                    <a:p>
+                      <a:pPr>
+                        <a:defRPr b="1" sz="1100">
+                          <a:latin typeface="Calibri"/>
+                        </a:defRPr>
+                      </a:pPr>
+                      <a:r>
+                        <a:t>Tool</a:t>
+                      </a:r>
+                    </a:p>
+                  </a:txBody>
+                  <a:tcPr>
+                    <a:solidFill>
+                      <a:srgbClr val="E6E6E6"/>
+                    </a:solidFill>
+                  </a:tcPr>
+                </a:tc>
+                <a:tc>
+                  <a:txBody>
+                    <a:bodyPr/>
+                    <a:lstStyle/>
+                    <a:p>
+                      <a:pPr>
+                        <a:defRPr b="1" sz="1100">
+                          <a:latin typeface="Calibri"/>
+                        </a:defRPr>
+                      </a:pPr>
+                      <a:r>
+                        <a:t>Type</a:t>
+                      </a:r>
+                    </a:p>
+                  </a:txBody>
+                  <a:tcPr>
+                    <a:solidFill>
+                      <a:srgbClr val="E6E6E6"/>
+                    </a:solidFill>
+                  </a:tcPr>
+                </a:tc>
+                <a:tc>
+                  <a:txBody>
+                    <a:bodyPr/>
+                    <a:lstStyle/>
+                    <a:p>
+                      <a:pPr>
+                        <a:defRPr b="1" sz="1100">
+                          <a:latin typeface="Calibri"/>
+                        </a:defRPr>
+                      </a:pPr>
+                      <a:r>
+                        <a:t>Category</a:t>
+                      </a:r>
+                    </a:p>
+                  </a:txBody>
+                  <a:tcPr>
+                    <a:solidFill>
+                      <a:srgbClr val="E6E6E6"/>
+                    </a:solidFill>
+                  </a:tcPr>
+                </a:tc>
+              </a:tr>
+              <a:tr h="331470">
+                <a:tc>
+                  <a:txBody>
+                    <a:bodyPr/>
+                    <a:lstStyle/>
+                    <a:p>
+                      <a:pPr>
+                        <a:defRPr sz="1100">
+                          <a:latin typeface="Calibri"/>
+                        </a:defRPr>
+                      </a:pPr>
+                      <a:r>
+                        <a:t>16</a:t>
+                      </a:r>
+                    </a:p>
+                  </a:txBody>
+                  <a:tcPr/>
+                </a:tc>
+                <a:tc>
+                  <a:txBody>
+                    <a:bodyPr/>
+                    <a:lstStyle/>
+                    <a:p>
+                      <a:pPr>
+                        <a:defRPr sz="1100">
+                          <a:latin typeface="Calibri"/>
+                        </a:defRPr>
+                      </a:pPr>
+                      <a:r>
+                        <a:t>scontrol_ping</a:t>
+                      </a:r>
+                    </a:p>
+                  </a:txBody>
+                  <a:tcPr/>
+                </a:tc>
+                <a:tc>
+                  <a:txBody>
+                    <a:bodyPr/>
+                    <a:lstStyle/>
+                    <a:p>
+                      <a:pPr>
+                        <a:defRPr sz="1100">
+                          <a:latin typeface="Calibri"/>
+                        </a:defRPr>
+                      </a:pPr>
+                      <a:r>
+                        <a:t>MCP</a:t>
+                      </a:r>
+                    </a:p>
+                  </a:txBody>
+                  <a:tcPr/>
+                </a:tc>
+                <a:tc>
+                  <a:txBody>
+                    <a:bodyPr/>
+                    <a:lstStyle/>
+                    <a:p>
+                      <a:pPr>
+                        <a:defRPr sz="1100">
+                          <a:latin typeface="Calibri"/>
+                        </a:defRPr>
+                      </a:pPr>
+                      <a:r>
+                        <a:t>node/cluster</a:t>
+                      </a:r>
+                    </a:p>
+                  </a:txBody>
+                  <a:tcPr/>
+                </a:tc>
+              </a:tr>
+              <a:tr h="331470">
+                <a:tc>
+                  <a:txBody>
+                    <a:bodyPr/>
+                    <a:lstStyle/>
+                    <a:p>
+                      <a:pPr>
+                        <a:defRPr sz="1100">
+                          <a:latin typeface="Calibri"/>
+                        </a:defRPr>
+                      </a:pPr>
+                      <a:r>
+                        <a:t>17</a:t>
+                      </a:r>
+                    </a:p>
+                  </a:txBody>
+                  <a:tcPr>
+                    <a:solidFill>
+                      <a:srgbClr val="F8F8F8"/>
+                    </a:solidFill>
+                  </a:tcPr>
+                </a:tc>
+                <a:tc>
+                  <a:txBody>
+                    <a:bodyPr/>
+                    <a:lstStyle/>
+                    <a:p>
+                      <a:pPr>
+                        <a:defRPr sz="1100">
+                          <a:latin typeface="Calibri"/>
+                        </a:defRPr>
+                      </a:pPr>
+                      <a:r>
+                        <a:t>scontrol_license</a:t>
+                      </a:r>
+                    </a:p>
+                  </a:txBody>
+                  <a:tcPr>
+                    <a:solidFill>
+                      <a:srgbClr val="F8F8F8"/>
+                    </a:solidFill>
+                  </a:tcPr>
+                </a:tc>
+                <a:tc>
+                  <a:txBody>
+                    <a:bodyPr/>
+                    <a:lstStyle/>
+                    <a:p>
+                      <a:pPr>
+                        <a:defRPr sz="1100">
+                          <a:latin typeface="Calibri"/>
+                        </a:defRPr>
+                      </a:pPr>
+                      <a:r>
+                        <a:t>MCP</a:t>
+                      </a:r>
+                    </a:p>
+                  </a:txBody>
+                  <a:tcPr>
+                    <a:solidFill>
+                      <a:srgbClr val="F8F8F8"/>
+                    </a:solidFill>
+                  </a:tcPr>
+                </a:tc>
+                <a:tc>
+                  <a:txBody>
+                    <a:bodyPr/>
+                    <a:lstStyle/>
+                    <a:p>
+                      <a:pPr>
+                        <a:defRPr sz="1100">
+                          <a:latin typeface="Calibri"/>
+                        </a:defRPr>
+                      </a:pPr>
+                      <a:r>
+                        <a:t>node/cluster</a:t>
+                      </a:r>
+                    </a:p>
+                  </a:txBody>
+                  <a:tcPr>
+                    <a:solidFill>
+                      <a:srgbClr val="F8F8F8"/>
+                    </a:solidFill>
+                  </a:tcPr>
+                </a:tc>
+              </a:tr>
+              <a:tr h="331470">
+                <a:tc>
+                  <a:txBody>
+                    <a:bodyPr/>
+                    <a:lstStyle/>
+                    <a:p>
+                      <a:pPr>
+                        <a:defRPr sz="1100">
+                          <a:latin typeface="Calibri"/>
+                        </a:defRPr>
+                      </a:pPr>
+                      <a:r>
+                        <a:t>18</a:t>
+                      </a:r>
+                    </a:p>
+                  </a:txBody>
+                  <a:tcPr/>
+                </a:tc>
+                <a:tc>
+                  <a:txBody>
+                    <a:bodyPr/>
+                    <a:lstStyle/>
+                    <a:p>
+                      <a:pPr>
+                        <a:defRPr sz="1100">
+                          <a:latin typeface="Calibri"/>
+                        </a:defRPr>
+                      </a:pPr>
+                      <a:r>
+                        <a:t>scontrol_reservation_show</a:t>
+                      </a:r>
+                    </a:p>
+                  </a:txBody>
+                  <a:tcPr/>
+                </a:tc>
+                <a:tc>
+                  <a:txBody>
+                    <a:bodyPr/>
+                    <a:lstStyle/>
+                    <a:p>
+                      <a:pPr>
+                        <a:defRPr sz="1100">
+                          <a:latin typeface="Calibri"/>
+                        </a:defRPr>
+                      </a:pPr>
+                      <a:r>
+                        <a:t>MCP</a:t>
+                      </a:r>
+                    </a:p>
+                  </a:txBody>
+                  <a:tcPr/>
+                </a:tc>
+                <a:tc>
+                  <a:txBody>
+                    <a:bodyPr/>
+                    <a:lstStyle/>
+                    <a:p>
+                      <a:pPr>
+                        <a:defRPr sz="1100">
+                          <a:latin typeface="Calibri"/>
+                        </a:defRPr>
+                      </a:pPr>
+                      <a:r>
+                        <a:t>reservations</a:t>
+                      </a:r>
+                    </a:p>
+                  </a:txBody>
+                  <a:tcPr/>
+                </a:tc>
+              </a:tr>
+              <a:tr h="331470">
+                <a:tc>
+                  <a:txBody>
+                    <a:bodyPr/>
+                    <a:lstStyle/>
+                    <a:p>
+                      <a:pPr>
+                        <a:defRPr sz="1100">
+                          <a:latin typeface="Calibri"/>
+                        </a:defRPr>
+                      </a:pPr>
+                      <a:r>
+                        <a:t>19</a:t>
+                      </a:r>
+                    </a:p>
+                  </a:txBody>
+                  <a:tcPr>
+                    <a:solidFill>
+                      <a:srgbClr val="F8F8F8"/>
+                    </a:solidFill>
+                  </a:tcPr>
+                </a:tc>
+                <a:tc>
+                  <a:txBody>
+                    <a:bodyPr/>
+                    <a:lstStyle/>
+                    <a:p>
+                      <a:pPr>
+                        <a:defRPr sz="1100">
+                          <a:latin typeface="Calibri"/>
+                        </a:defRPr>
+                      </a:pPr>
+                      <a:r>
+                        <a:t>sacctmgr_list</a:t>
+                      </a:r>
+                    </a:p>
+                  </a:txBody>
+                  <a:tcPr>
+                    <a:solidFill>
+                      <a:srgbClr val="F8F8F8"/>
+                    </a:solidFill>
+                  </a:tcPr>
+                </a:tc>
+                <a:tc>
+                  <a:txBody>
+                    <a:bodyPr/>
+                    <a:lstStyle/>
+                    <a:p>
+                      <a:pPr>
+                        <a:defRPr sz="1100">
+                          <a:latin typeface="Calibri"/>
+                        </a:defRPr>
+                      </a:pPr>
+                      <a:r>
+                        <a:t>MCP</a:t>
+                      </a:r>
+                    </a:p>
+                  </a:txBody>
+                  <a:tcPr>
+                    <a:solidFill>
+                      <a:srgbClr val="F8F8F8"/>
+                    </a:solidFill>
+                  </a:tcPr>
+                </a:tc>
+                <a:tc>
+                  <a:txBody>
+                    <a:bodyPr/>
+                    <a:lstStyle/>
+                    <a:p>
+                      <a:pPr>
+                        <a:defRPr sz="1100">
+                          <a:latin typeface="Calibri"/>
+                        </a:defRPr>
+                      </a:pPr>
+                      <a:r>
+                        <a:t>accounting</a:t>
+                      </a:r>
+                    </a:p>
+                  </a:txBody>
+                  <a:tcPr>
+                    <a:solidFill>
+                      <a:srgbClr val="F8F8F8"/>
+                    </a:solidFill>
+                  </a:tcPr>
+                </a:tc>
+              </a:tr>
+              <a:tr h="331470">
+                <a:tc>
+                  <a:txBody>
+                    <a:bodyPr/>
+                    <a:lstStyle/>
+                    <a:p>
+                      <a:pPr>
+                        <a:defRPr sz="1100">
+                          <a:latin typeface="Calibri"/>
+                        </a:defRPr>
+                      </a:pPr>
+                      <a:r>
+                        <a:t>20</a:t>
+                      </a:r>
+                    </a:p>
+                  </a:txBody>
+                  <a:tcPr/>
+                </a:tc>
+                <a:tc>
+                  <a:txBody>
+                    <a:bodyPr/>
+                    <a:lstStyle/>
+                    <a:p>
+                      <a:pPr>
+                        <a:defRPr sz="1100">
+                          <a:latin typeface="Calibri"/>
+                        </a:defRPr>
+                      </a:pPr>
+                      <a:r>
+                        <a:t>sacctmgr_show_problems</a:t>
+                      </a:r>
+                    </a:p>
+                  </a:txBody>
+                  <a:tcPr/>
+                </a:tc>
+                <a:tc>
+                  <a:txBody>
+                    <a:bodyPr/>
+                    <a:lstStyle/>
+                    <a:p>
+                      <a:pPr>
+                        <a:defRPr sz="1100">
+                          <a:latin typeface="Calibri"/>
+                        </a:defRPr>
+                      </a:pPr>
+                      <a:r>
+                        <a:t>MCP</a:t>
+                      </a:r>
+                    </a:p>
+                  </a:txBody>
+                  <a:tcPr/>
+                </a:tc>
+                <a:tc>
+                  <a:txBody>
+                    <a:bodyPr/>
+                    <a:lstStyle/>
+                    <a:p>
+                      <a:pPr>
+                        <a:defRPr sz="1100">
+                          <a:latin typeface="Calibri"/>
+                        </a:defRPr>
+                      </a:pPr>
+                      <a:r>
+                        <a:t>accounting</a:t>
+                      </a:r>
+                    </a:p>
+                  </a:txBody>
+                  <a:tcPr/>
+                </a:tc>
+              </a:tr>
+              <a:tr h="331470">
+                <a:tc>
+                  <a:txBody>
+                    <a:bodyPr/>
+                    <a:lstStyle/>
+                    <a:p>
+                      <a:pPr>
+                        <a:defRPr sz="1100">
+                          <a:latin typeface="Calibri"/>
+                        </a:defRPr>
+                      </a:pPr>
+                      <a:r>
+                        <a:t>21</a:t>
+                      </a:r>
+                    </a:p>
+                  </a:txBody>
+                  <a:tcPr>
+                    <a:solidFill>
+                      <a:srgbClr val="F8F8F8"/>
+                    </a:solidFill>
+                  </a:tcPr>
+                </a:tc>
+                <a:tc>
+                  <a:txBody>
+                    <a:bodyPr/>
+                    <a:lstStyle/>
+                    <a:p>
+                      <a:pPr>
+                        <a:defRPr sz="1100">
+                          <a:latin typeface="Calibri"/>
+                        </a:defRPr>
+                      </a:pPr>
+                      <a:r>
+                        <a:t>sshare</a:t>
+                      </a:r>
+                    </a:p>
+                  </a:txBody>
+                  <a:tcPr>
+                    <a:solidFill>
+                      <a:srgbClr val="F8F8F8"/>
+                    </a:solidFill>
+                  </a:tcPr>
+                </a:tc>
+                <a:tc>
+                  <a:txBody>
+                    <a:bodyPr/>
+                    <a:lstStyle/>
+                    <a:p>
+                      <a:pPr>
+                        <a:defRPr sz="1100">
+                          <a:latin typeface="Calibri"/>
+                        </a:defRPr>
+                      </a:pPr>
+                      <a:r>
+                        <a:t>MCP</a:t>
+                      </a:r>
+                    </a:p>
+                  </a:txBody>
+                  <a:tcPr>
+                    <a:solidFill>
+                      <a:srgbClr val="F8F8F8"/>
+                    </a:solidFill>
+                  </a:tcPr>
+                </a:tc>
+                <a:tc>
+                  <a:txBody>
+                    <a:bodyPr/>
+                    <a:lstStyle/>
+                    <a:p>
+                      <a:pPr>
+                        <a:defRPr sz="1100">
+                          <a:latin typeface="Calibri"/>
+                        </a:defRPr>
+                      </a:pPr>
+                      <a:r>
+                        <a:t>fairshare</a:t>
+                      </a:r>
+                    </a:p>
+                  </a:txBody>
+                  <a:tcPr>
+                    <a:solidFill>
+                      <a:srgbClr val="F8F8F8"/>
+                    </a:solidFill>
+                  </a:tcPr>
+                </a:tc>
+              </a:tr>
+              <a:tr h="331470">
+                <a:tc>
+                  <a:txBody>
+                    <a:bodyPr/>
+                    <a:lstStyle/>
+                    <a:p>
+                      <a:pPr>
+                        <a:defRPr sz="1100">
+                          <a:latin typeface="Calibri"/>
+                        </a:defRPr>
+                      </a:pPr>
+                      <a:r>
+                        <a:t>22</a:t>
+                      </a:r>
+                    </a:p>
+                  </a:txBody>
+                  <a:tcPr/>
+                </a:tc>
+                <a:tc>
+                  <a:txBody>
+                    <a:bodyPr/>
+                    <a:lstStyle/>
+                    <a:p>
+                      <a:pPr>
+                        <a:defRPr sz="1100">
+                          <a:latin typeface="Calibri"/>
+                        </a:defRPr>
+                      </a:pPr>
+                      <a:r>
+                        <a:t>sprio</a:t>
+                      </a:r>
+                    </a:p>
+                  </a:txBody>
+                  <a:tcPr/>
+                </a:tc>
+                <a:tc>
+                  <a:txBody>
+                    <a:bodyPr/>
+                    <a:lstStyle/>
+                    <a:p>
+                      <a:pPr>
+                        <a:defRPr sz="1100">
+                          <a:latin typeface="Calibri"/>
+                        </a:defRPr>
+                      </a:pPr>
+                      <a:r>
+                        <a:t>MCP</a:t>
+                      </a:r>
+                    </a:p>
+                  </a:txBody>
+                  <a:tcPr/>
+                </a:tc>
+                <a:tc>
+                  <a:txBody>
+                    <a:bodyPr/>
+                    <a:lstStyle/>
+                    <a:p>
+                      <a:pPr>
+                        <a:defRPr sz="1100">
+                          <a:latin typeface="Calibri"/>
+                        </a:defRPr>
+                      </a:pPr>
+                      <a:r>
+                        <a:t>priority</a:t>
+                      </a:r>
+                    </a:p>
+                  </a:txBody>
+                  <a:tcPr/>
+                </a:tc>
+              </a:tr>
+              <a:tr h="331470">
+                <a:tc>
+                  <a:txBody>
+                    <a:bodyPr/>
+                    <a:lstStyle/>
+                    <a:p>
+                      <a:pPr>
+                        <a:defRPr sz="1100">
+                          <a:latin typeface="Calibri"/>
+                        </a:defRPr>
+                      </a:pPr>
+                      <a:r>
+                        <a:t>23</a:t>
+                      </a:r>
+                    </a:p>
+                  </a:txBody>
+                  <a:tcPr>
+                    <a:solidFill>
+                      <a:srgbClr val="F8F8F8"/>
+                    </a:solidFill>
+                  </a:tcPr>
+                </a:tc>
+                <a:tc>
+                  <a:txBody>
+                    <a:bodyPr/>
+                    <a:lstStyle/>
+                    <a:p>
+                      <a:pPr>
+                        <a:defRPr sz="1100">
+                          <a:latin typeface="Calibri"/>
+                        </a:defRPr>
+                      </a:pPr>
+                      <a:r>
+                        <a:t>sprio_weights</a:t>
+                      </a:r>
+                    </a:p>
+                  </a:txBody>
+                  <a:tcPr>
+                    <a:solidFill>
+                      <a:srgbClr val="F8F8F8"/>
+                    </a:solidFill>
+                  </a:tcPr>
+                </a:tc>
+                <a:tc>
+                  <a:txBody>
+                    <a:bodyPr/>
+                    <a:lstStyle/>
+                    <a:p>
+                      <a:pPr>
+                        <a:defRPr sz="1100">
+                          <a:latin typeface="Calibri"/>
+                        </a:defRPr>
+                      </a:pPr>
+                      <a:r>
+                        <a:t>MCP</a:t>
+                      </a:r>
+                    </a:p>
+                  </a:txBody>
+                  <a:tcPr>
+                    <a:solidFill>
+                      <a:srgbClr val="F8F8F8"/>
+                    </a:solidFill>
+                  </a:tcPr>
+                </a:tc>
+                <a:tc>
+                  <a:txBody>
+                    <a:bodyPr/>
+                    <a:lstStyle/>
+                    <a:p>
+                      <a:pPr>
+                        <a:defRPr sz="1100">
+                          <a:latin typeface="Calibri"/>
+                        </a:defRPr>
+                      </a:pPr>
+                      <a:r>
+                        <a:t>priority</a:t>
+                      </a:r>
+                    </a:p>
+                  </a:txBody>
+                  <a:tcPr>
+                    <a:solidFill>
+                      <a:srgbClr val="F8F8F8"/>
+                    </a:solidFill>
+                  </a:tcPr>
+                </a:tc>
+              </a:tr>
+              <a:tr h="331470">
+                <a:tc>
+                  <a:txBody>
+                    <a:bodyPr/>
+                    <a:lstStyle/>
+                    <a:p>
+                      <a:pPr>
+                        <a:defRPr sz="1100">
+                          <a:latin typeface="Calibri"/>
+                        </a:defRPr>
+                      </a:pPr>
+                      <a:r>
+                        <a:t>24</a:t>
+                      </a:r>
+                    </a:p>
+                  </a:txBody>
+                  <a:tcPr/>
+                </a:tc>
+                <a:tc>
+                  <a:txBody>
+                    <a:bodyPr/>
+                    <a:lstStyle/>
+                    <a:p>
+                      <a:pPr>
+                        <a:defRPr sz="1100">
+                          <a:latin typeface="Calibri"/>
+                        </a:defRPr>
+                      </a:pPr>
+                      <a:r>
+                        <a:t>sreport</a:t>
+                      </a:r>
+                    </a:p>
+                  </a:txBody>
+                  <a:tcPr/>
+                </a:tc>
+                <a:tc>
+                  <a:txBody>
+                    <a:bodyPr/>
+                    <a:lstStyle/>
+                    <a:p>
+                      <a:pPr>
+                        <a:defRPr sz="1100">
+                          <a:latin typeface="Calibri"/>
+                        </a:defRPr>
+                      </a:pPr>
+                      <a:r>
+                        <a:t>MCP</a:t>
+                      </a:r>
+                    </a:p>
+                  </a:txBody>
+                  <a:tcPr/>
+                </a:tc>
+                <a:tc>
+                  <a:txBody>
+                    <a:bodyPr/>
+                    <a:lstStyle/>
+                    <a:p>
+                      <a:pPr>
+                        <a:defRPr sz="1100">
+                          <a:latin typeface="Calibri"/>
+                        </a:defRPr>
+                      </a:pPr>
+                      <a:r>
+                        <a:t>reporting</a:t>
+                      </a:r>
+                    </a:p>
+                  </a:txBody>
+                  <a:tcPr/>
+                </a:tc>
+              </a:tr>
+              <a:tr h="331470">
+                <a:tc>
+                  <a:txBody>
+                    <a:bodyPr/>
+                    <a:lstStyle/>
+                    <a:p>
+                      <a:pPr>
+                        <a:defRPr sz="1100">
+                          <a:latin typeface="Calibri"/>
+                        </a:defRPr>
+                      </a:pPr>
+                      <a:r>
+                        <a:t>25</a:t>
+                      </a:r>
+                    </a:p>
+                  </a:txBody>
+                  <a:tcPr>
+                    <a:solidFill>
+                      <a:srgbClr val="F8F8F8"/>
+                    </a:solidFill>
+                  </a:tcPr>
+                </a:tc>
+                <a:tc>
+                  <a:txBody>
+                    <a:bodyPr/>
+                    <a:lstStyle/>
+                    <a:p>
+                      <a:pPr>
+                        <a:defRPr sz="1100">
+                          <a:latin typeface="Calibri"/>
+                        </a:defRPr>
+                      </a:pPr>
+                      <a:r>
+                        <a:t>sdiag</a:t>
+                      </a:r>
+                    </a:p>
+                  </a:txBody>
+                  <a:tcPr>
+                    <a:solidFill>
+                      <a:srgbClr val="F8F8F8"/>
+                    </a:solidFill>
+                  </a:tcPr>
+                </a:tc>
+                <a:tc>
+                  <a:txBody>
+                    <a:bodyPr/>
+                    <a:lstStyle/>
+                    <a:p>
+                      <a:pPr>
+                        <a:defRPr sz="1100">
+                          <a:latin typeface="Calibri"/>
+                        </a:defRPr>
+                      </a:pPr>
+                      <a:r>
+                        <a:t>MCP</a:t>
+                      </a:r>
+                    </a:p>
+                  </a:txBody>
+                  <a:tcPr>
+                    <a:solidFill>
+                      <a:srgbClr val="F8F8F8"/>
+                    </a:solidFill>
+                  </a:tcPr>
+                </a:tc>
+                <a:tc>
+                  <a:txBody>
+                    <a:bodyPr/>
+                    <a:lstStyle/>
+                    <a:p>
+                      <a:pPr>
+                        <a:defRPr sz="1100">
+                          <a:latin typeface="Calibri"/>
+                        </a:defRPr>
+                      </a:pPr>
+                      <a:r>
+                        <a:t>diagnostics</a:t>
+                      </a:r>
+                    </a:p>
+                  </a:txBody>
+                  <a:tcPr>
+                    <a:solidFill>
+                      <a:srgbClr val="F8F8F8"/>
+                    </a:solidFill>
+                  </a:tcPr>
+                </a:tc>
+              </a:tr>
+              <a:tr h="331470">
+                <a:tc>
+                  <a:txBody>
+                    <a:bodyPr/>
+                    <a:lstStyle/>
+                    <a:p>
+                      <a:pPr>
+                        <a:defRPr sz="1100">
+                          <a:latin typeface="Calibri"/>
+                        </a:defRPr>
+                      </a:pPr>
+                      <a:r>
+                        <a:t>26</a:t>
+                      </a:r>
+                    </a:p>
+                  </a:txBody>
+                  <a:tcPr/>
+                </a:tc>
+                <a:tc>
+                  <a:txBody>
+                    <a:bodyPr/>
+                    <a:lstStyle/>
+                    <a:p>
+                      <a:pPr>
+                        <a:defRPr sz="1100">
+                          <a:latin typeface="Calibri"/>
+                        </a:defRPr>
+                      </a:pPr>
+                      <a:r>
+                        <a:t>strigger_get</a:t>
+                      </a:r>
+                    </a:p>
+                  </a:txBody>
+                  <a:tcPr/>
+                </a:tc>
+                <a:tc>
+                  <a:txBody>
+                    <a:bodyPr/>
+                    <a:lstStyle/>
+                    <a:p>
+                      <a:pPr>
+                        <a:defRPr sz="1100">
+                          <a:latin typeface="Calibri"/>
+                        </a:defRPr>
+                      </a:pPr>
+                      <a:r>
+                        <a:t>MCP</a:t>
+                      </a:r>
+                    </a:p>
+                  </a:txBody>
+                  <a:tcPr/>
+                </a:tc>
+                <a:tc>
+                  <a:txBody>
+                    <a:bodyPr/>
+                    <a:lstStyle/>
+                    <a:p>
+                      <a:pPr>
+                        <a:defRPr sz="1100">
+                          <a:latin typeface="Calibri"/>
+                        </a:defRPr>
+                      </a:pPr>
+                      <a:r>
+                        <a:t>triggers</a:t>
+                      </a:r>
+                    </a:p>
+                  </a:txBody>
+                  <a:tcPr/>
+                </a:tc>
+              </a:tr>
+              <a:tr h="331470">
+                <a:tc>
+                  <a:txBody>
+                    <a:bodyPr/>
+                    <a:lstStyle/>
+                    <a:p>
+                      <a:pPr>
+                        <a:defRPr sz="1100">
+                          <a:latin typeface="Calibri"/>
+                        </a:defRPr>
+                      </a:pPr>
+                      <a:r>
+                        <a:t>27</a:t>
+                      </a:r>
+                    </a:p>
+                  </a:txBody>
+                  <a:tcPr>
+                    <a:solidFill>
+                      <a:srgbClr val="F8F8F8"/>
+                    </a:solidFill>
+                  </a:tcPr>
+                </a:tc>
+                <a:tc>
+                  <a:txBody>
+                    <a:bodyPr/>
+                    <a:lstStyle/>
+                    <a:p>
+                      <a:pPr>
+                        <a:defRPr sz="1100">
+                          <a:latin typeface="Calibri"/>
+                        </a:defRPr>
+                      </a:pPr>
+                      <a:r>
+                        <a:t>read_file</a:t>
+                      </a:r>
+                    </a:p>
+                  </a:txBody>
+                  <a:tcPr>
+                    <a:solidFill>
+                      <a:srgbClr val="F8F8F8"/>
+                    </a:solidFill>
+                  </a:tcPr>
+                </a:tc>
+                <a:tc>
+                  <a:txBody>
+                    <a:bodyPr/>
+                    <a:lstStyle/>
+                    <a:p>
+                      <a:pPr>
+                        <a:defRPr sz="1100">
+                          <a:latin typeface="Calibri"/>
+                        </a:defRPr>
+                      </a:pPr>
+                      <a:r>
+                        <a:t>MCP</a:t>
+                      </a:r>
+                    </a:p>
+                  </a:txBody>
+                  <a:tcPr>
+                    <a:solidFill>
+                      <a:srgbClr val="F8F8F8"/>
+                    </a:solidFill>
+                  </a:tcPr>
+                </a:tc>
+                <a:tc>
+                  <a:txBody>
+                    <a:bodyPr/>
+                    <a:lstStyle/>
+                    <a:p>
+                      <a:pPr>
+                        <a:defRPr sz="1100">
+                          <a:latin typeface="Calibri"/>
+                        </a:defRPr>
+                      </a:pPr>
+                      <a:r>
+                        <a:t>utility</a:t>
+                      </a:r>
+                    </a:p>
+                  </a:txBody>
+                  <a:tcPr>
+                    <a:solidFill>
+                      <a:srgbClr val="F8F8F8"/>
+                    </a:solidFill>
+                  </a:tcPr>
+                </a:tc>
+              </a:tr>
+              <a:tr h="331470">
+                <a:tc>
+                  <a:txBody>
+                    <a:bodyPr/>
+                    <a:lstStyle/>
+                    <a:p>
+                      <a:pPr>
+                        <a:defRPr sz="1100">
+                          <a:latin typeface="Calibri"/>
+                        </a:defRPr>
+                      </a:pPr>
+                      <a:r>
+                        <a:t>28</a:t>
+                      </a:r>
+                    </a:p>
+                  </a:txBody>
+                  <a:tcPr/>
+                </a:tc>
+                <a:tc>
+                  <a:txBody>
+                    <a:bodyPr/>
+                    <a:lstStyle/>
+                    <a:p>
+                      <a:pPr>
+                        <a:defRPr sz="1100">
+                          <a:latin typeface="Calibri"/>
+                        </a:defRPr>
+                      </a:pPr>
+                      <a:r>
+                        <a:t>web_search</a:t>
+                      </a:r>
+                    </a:p>
+                  </a:txBody>
+                  <a:tcPr/>
+                </a:tc>
+                <a:tc>
+                  <a:txBody>
+                    <a:bodyPr/>
+                    <a:lstStyle/>
+                    <a:p>
+                      <a:pPr>
+                        <a:defRPr sz="1100">
+                          <a:latin typeface="Calibri"/>
+                        </a:defRPr>
+                      </a:pPr>
+                      <a:r>
+                        <a:t>MCP</a:t>
+                      </a:r>
+                    </a:p>
+                  </a:txBody>
+                  <a:tcPr/>
+                </a:tc>
+                <a:tc>
+                  <a:txBody>
+                    <a:bodyPr/>
+                    <a:lstStyle/>
+                    <a:p>
+                      <a:pPr>
+                        <a:defRPr sz="1100">
+                          <a:latin typeface="Calibri"/>
+                        </a:defRPr>
+                      </a:pPr>
+                      <a:r>
+                        <a:t>utility</a:t>
+                      </a:r>
+                    </a:p>
+                  </a:txBody>
+                  <a:tcPr/>
+                </a:tc>
+              </a:tr>
+              <a:tr h="331470">
+                <a:tc>
+                  <a:txBody>
+                    <a:bodyPr/>
+                    <a:lstStyle/>
+                    <a:p>
+                      <a:pPr>
+                        <a:defRPr sz="1100">
+                          <a:latin typeface="Calibri"/>
+                        </a:defRPr>
+                      </a:pPr>
+                      <a:r>
+                        <a:t>29</a:t>
+                      </a:r>
+                    </a:p>
+                  </a:txBody>
+                  <a:tcPr>
+                    <a:solidFill>
+                      <a:srgbClr val="F8F8F8"/>
+                    </a:solidFill>
+                  </a:tcPr>
+                </a:tc>
+                <a:tc>
+                  <a:txBody>
+                    <a:bodyPr/>
+                    <a:lstStyle/>
+                    <a:p>
+                      <a:pPr>
+                        <a:defRPr sz="1100">
+                          <a:latin typeface="Calibri"/>
+                        </a:defRPr>
+                      </a:pPr>
+                      <a:r>
+                        <a:t>get_mock_state_snapshot</a:t>
+                      </a:r>
+                    </a:p>
+                  </a:txBody>
+                  <a:tcPr>
+                    <a:solidFill>
+                      <a:srgbClr val="F8F8F8"/>
+                    </a:solidFill>
+                  </a:tcPr>
+                </a:tc>
+                <a:tc>
+                  <a:txBody>
+                    <a:bodyPr/>
+                    <a:lstStyle/>
+                    <a:p>
+                      <a:pPr>
+                        <a:defRPr sz="1100">
+                          <a:latin typeface="Calibri"/>
+                        </a:defRPr>
+                      </a:pPr>
+                      <a:r>
+                        <a:t>MCP</a:t>
+                      </a:r>
+                    </a:p>
+                  </a:txBody>
+                  <a:tcPr>
+                    <a:solidFill>
+                      <a:srgbClr val="F8F8F8"/>
+                    </a:solidFill>
+                  </a:tcPr>
+                </a:tc>
+                <a:tc>
+                  <a:txBody>
+                    <a:bodyPr/>
+                    <a:lstStyle/>
+                    <a:p>
+                      <a:pPr>
+                        <a:defRPr sz="1100">
+                          <a:latin typeface="Calibri"/>
+                        </a:defRPr>
+                      </a:pPr>
+                      <a:r>
+                        <a:t>internal</a:t>
+                      </a:r>
+                    </a:p>
+                  </a:txBody>
+                  <a:tcPr>
+                    <a:solidFill>
+                      <a:srgbClr val="F8F8F8"/>
+                    </a:solidFill>
+                  </a:tcPr>
+                </a:tc>
+              </a:tr>
+              <a:tr h="331470">
+                <a:tc>
+                  <a:txBody>
+                    <a:bodyPr/>
+                    <a:lstStyle/>
+                    <a:p>
+                      <a:pPr>
+                        <a:defRPr sz="1100">
+                          <a:latin typeface="Calibri"/>
+                        </a:defRPr>
+                      </a:pPr>
+                      <a:r>
+                        <a:t>30</a:t>
+                      </a:r>
+                    </a:p>
+                  </a:txBody>
+                  <a:tcPr/>
+                </a:tc>
+                <a:tc>
+                  <a:txBody>
+                    <a:bodyPr/>
+                    <a:lstStyle/>
+                    <a:p>
+                      <a:pPr>
+                        <a:defRPr sz="1100">
+                          <a:latin typeface="Calibri"/>
+                        </a:defRPr>
+                      </a:pPr>
+                      <a:r>
+                        <a:t>lookup_skill</a:t>
+                      </a:r>
+                    </a:p>
+                  </a:txBody>
+                  <a:tcPr/>
+                </a:tc>
+                <a:tc>
+                  <a:txBody>
+                    <a:bodyPr/>
+                    <a:lstStyle/>
+                    <a:p>
+                      <a:pPr>
+                        <a:defRPr sz="1100">
+                          <a:latin typeface="Calibri"/>
+                        </a:defRPr>
+                      </a:pPr>
+                      <a:r>
+                        <a:t>FunctionTool</a:t>
+                      </a:r>
+                    </a:p>
+                  </a:txBody>
+                  <a:tcPr/>
+                </a:tc>
+                <a:tc>
+                  <a:txBody>
+                    <a:bodyPr/>
+                    <a:lstStyle/>
+                    <a:p>
+                      <a:pPr>
+                        <a:defRPr sz="1100">
+                          <a:latin typeface="Calibri"/>
+                        </a:defRPr>
+                      </a:pPr>
+                      <a:r>
+                        <a:t>runbooks</a:t>
+                      </a:r>
+                    </a:p>
+                  </a:txBody>
+                  <a:tcPr/>
+                </a:tc>
+              </a:tr>
+            </a:tbl>
+          </a:graphicData>
+        </a:graphic>
+      </p:graphicFrame>
+      <p:sp>
+        <p:nvSpPr>
+          <p:cNvPr id="5" name="TextBox 4"/>
+          <p:cNvSpPr txBox="1"/>
+          <p:nvPr/>
+        </p:nvSpPr>
+        <p:spPr>
+          <a:xfrm>
+            <a:off x="411480" y="6217920"/>
+            <a:ext cx="11155680" cy="411480"/>
+          </a:xfrm>
+          <a:prstGeom prst="rect">
+            <a:avLst/>
+          </a:prstGeom>
+          <a:noFill/>
+        </p:spPr>
+        <p:txBody>
+          <a:bodyPr wrap="none">
+            <a:spAutoFit/>
+          </a:bodyPr>
+          <a:lstStyle/>
+          <a:p>
+            <a:pPr>
+              <a:defRPr sz="1100" i="1">
+                <a:latin typeface="Calibri"/>
+              </a:defRPr>
+            </a:pPr>
+            <a:r>
+              <a:t>Part 2 of 2 • Hidden from Observer: cluster_history, reset_mock_state</a:t>
+            </a:r>
+          </a:p>
+        </p:txBody>
+      </p:sp>
+    </p:spTree>
+  </p:cSld>
+  <p:clrMapOvr>
+    <a:masterClrMapping/>
+  </p:clrMapOvr>
+</p:sld>
+</file>
+
+<file path=ppt/slides/slide4.xml><?xml version="1.0" encoding="utf-8"?>
+<p:sld xmlns:a="http://schemas.openxmlformats.org/drawingml/2006/main" xmlns:p="http://schemas.openxmlformats.org/presentationml/2006/main" xmlns:r="http://schemas.openxmlformats.org/officeDocument/2006/relationships">
+  <p:cSld>
+    <p:spTree>
+      <p:nvGrpSpPr>
+        <p:cNvPr id="1" name=""/>
+        <p:cNvGrpSpPr/>
+        <p:nvPr/>
+      </p:nvGrpSpPr>
+      <p:grpSpPr/>
+      <p:sp>
+        <p:nvSpPr>
+          <p:cNvPr id="2" name="Title 1"/>
+          <p:cNvSpPr>
+            <a:spLocks noGrp="1"/>
+          </p:cNvSpPr>
+          <p:nvPr>
+            <p:ph type="title"/>
+          </p:nvPr>
+        </p:nvSpPr>
+        <p:spPr/>
+        <p:txBody>
+          <a:bodyPr/>
+          <a:lstStyle/>
+          <a:p/>
+        </p:txBody>
+      </p:sp>
+      <p:sp>
+        <p:nvSpPr>
+          <p:cNvPr id="3" name="TextBox 2"/>
+          <p:cNvSpPr txBox="1"/>
+          <p:nvPr/>
+        </p:nvSpPr>
+        <p:spPr>
+          <a:xfrm>
+            <a:off x="365760" y="182880"/>
+            <a:ext cx="11521440" cy="548640"/>
+          </a:xfrm>
+          <a:prstGeom prst="rect">
+            <a:avLst/>
+          </a:prstGeom>
+          <a:noFill/>
+        </p:spPr>
+        <p:txBody>
+          <a:bodyPr wrap="none">
+            <a:spAutoFit/>
+          </a:bodyPr>
+          <a:lstStyle/>
+          <a:p>
+            <a:pPr>
+              <a:defRPr sz="2400" b="1">
+                <a:latin typeface="Calibri"/>
+              </a:defRPr>
+            </a:pPr>
+            <a:r>
+              <a:t>Operator Tool Inventory</a:t>
+            </a:r>
+          </a:p>
+        </p:txBody>
+      </p:sp>
+      <p:graphicFrame>
+        <p:nvGraphicFramePr>
+          <p:cNvPr id="4" name="Table 3"/>
+          <p:cNvGraphicFramePr>
+            <a:graphicFrameLocks noGrp="1"/>
+          </p:cNvGraphicFramePr>
+          <p:nvPr/>
+        </p:nvGraphicFramePr>
+        <p:xfrm>
+          <a:off x="365760" y="822960"/>
+          <a:ext cx="11521440" cy="5303520"/>
+        </p:xfrm>
+        <a:graphic>
+          <a:graphicData uri="http://schemas.openxmlformats.org/drawingml/2006/table">
+            <a:tbl>
+              <a:tblPr firstRow="1" bandRow="1">
+                <a:tableStyleId>{5C22544A-7EE6-4342-B048-85BDC9FD1C3A}</a:tableStyleId>
+              </a:tblPr>
+              <a:tblGrid>
+                <a:gridCol w="731520"/>
+                <a:gridCol w="5029200"/>
+                <a:gridCol w="2560320"/>
+                <a:gridCol w="3200400"/>
+              </a:tblGrid>
+              <a:tr h="265176">
+                <a:tc>
+                  <a:txBody>
+                    <a:bodyPr/>
+                    <a:lstStyle/>
+                    <a:p>
+                      <a:pPr>
+                        <a:defRPr b="1" sz="1100">
+                          <a:latin typeface="Calibri"/>
+                        </a:defRPr>
+                      </a:pPr>
+                      <a:r>
+                        <a:t>#</a:t>
+                      </a:r>
+                    </a:p>
+                  </a:txBody>
+                  <a:tcPr>
+                    <a:solidFill>
+                      <a:srgbClr val="E6E6E6"/>
+                    </a:solidFill>
+                  </a:tcPr>
+                </a:tc>
+                <a:tc>
+                  <a:txBody>
+                    <a:bodyPr/>
+                    <a:lstStyle/>
+                    <a:p>
+                      <a:pPr>
+                        <a:defRPr b="1" sz="1100">
+                          <a:latin typeface="Calibri"/>
+                        </a:defRPr>
+                      </a:pPr>
+                      <a:r>
+                        <a:t>Tool</a:t>
+                      </a:r>
+                    </a:p>
+                  </a:txBody>
+                  <a:tcPr>
+                    <a:solidFill>
+                      <a:srgbClr val="E6E6E6"/>
+                    </a:solidFill>
+                  </a:tcPr>
+                </a:tc>
+                <a:tc>
+                  <a:txBody>
+                    <a:bodyPr/>
+                    <a:lstStyle/>
+                    <a:p>
+                      <a:pPr>
+                        <a:defRPr b="1" sz="1100">
+                          <a:latin typeface="Calibri"/>
+                        </a:defRPr>
+                      </a:pPr>
+                      <a:r>
+                        <a:t>Type</a:t>
+                      </a:r>
+                    </a:p>
+                  </a:txBody>
+                  <a:tcPr>
+                    <a:solidFill>
+                      <a:srgbClr val="E6E6E6"/>
+                    </a:solidFill>
+                  </a:tcPr>
+                </a:tc>
+                <a:tc>
+                  <a:txBody>
+                    <a:bodyPr/>
+                    <a:lstStyle/>
+                    <a:p>
+                      <a:pPr>
+                        <a:defRPr b="1" sz="1100">
+                          <a:latin typeface="Calibri"/>
+                        </a:defRPr>
+                      </a:pPr>
+                      <a:r>
+                        <a:t>Category</a:t>
+                      </a:r>
+                    </a:p>
+                  </a:txBody>
+                  <a:tcPr>
+                    <a:solidFill>
+                      <a:srgbClr val="E6E6E6"/>
+                    </a:solidFill>
+                  </a:tcPr>
+                </a:tc>
+              </a:tr>
+              <a:tr h="265176">
+                <a:tc>
+                  <a:txBody>
+                    <a:bodyPr/>
+                    <a:lstStyle/>
+                    <a:p>
+                      <a:pPr>
+                        <a:defRPr sz="1100">
+                          <a:latin typeface="Calibri"/>
+                        </a:defRPr>
+                      </a:pPr>
+                      <a:r>
+                        <a:t>1</a:t>
+                      </a:r>
+                    </a:p>
+                  </a:txBody>
+                  <a:tcPr/>
+                </a:tc>
+                <a:tc>
+                  <a:txBody>
+                    <a:bodyPr/>
+                    <a:lstStyle/>
+                    <a:p>
+                      <a:pPr>
+                        <a:defRPr sz="1100">
+                          <a:latin typeface="Calibri"/>
+                        </a:defRPr>
+                      </a:pPr>
+                      <a:r>
+                        <a:t>squeue</a:t>
+                      </a:r>
+                    </a:p>
+                  </a:txBody>
+                  <a:tcPr/>
+                </a:tc>
+                <a:tc>
+                  <a:txBody>
+                    <a:bodyPr/>
+                    <a:lstStyle/>
+                    <a:p>
+                      <a:pPr>
+                        <a:defRPr sz="1100">
+                          <a:latin typeface="Calibri"/>
+                        </a:defRPr>
+                      </a:pPr>
+                      <a:r>
+                        <a:t>MCP</a:t>
+                      </a:r>
+                    </a:p>
+                  </a:txBody>
+                  <a:tcPr/>
+                </a:tc>
+                <a:tc>
+                  <a:txBody>
+                    <a:bodyPr/>
+                    <a:lstStyle/>
+                    <a:p>
+                      <a:pPr>
+                        <a:defRPr sz="1100">
+                          <a:latin typeface="Calibri"/>
+                        </a:defRPr>
+                      </a:pPr>
+                      <a:r>
+                        <a:t>pre-action verify</a:t>
+                      </a:r>
+                    </a:p>
+                  </a:txBody>
+                  <a:tcPr/>
+                </a:tc>
+              </a:tr>
+              <a:tr h="265176">
+                <a:tc>
+                  <a:txBody>
+                    <a:bodyPr/>
+                    <a:lstStyle/>
+                    <a:p>
+                      <a:pPr>
+                        <a:defRPr sz="1100">
+                          <a:latin typeface="Calibri"/>
+                        </a:defRPr>
+                      </a:pPr>
+                      <a:r>
+                        <a:t>2</a:t>
+                      </a:r>
+                    </a:p>
+                  </a:txBody>
+                  <a:tcPr>
+                    <a:solidFill>
+                      <a:srgbClr val="F8F8F8"/>
+                    </a:solidFill>
+                  </a:tcPr>
+                </a:tc>
+                <a:tc>
+                  <a:txBody>
+                    <a:bodyPr/>
+                    <a:lstStyle/>
+                    <a:p>
+                      <a:pPr>
+                        <a:defRPr sz="1100">
+                          <a:latin typeface="Calibri"/>
+                        </a:defRPr>
+                      </a:pPr>
+                      <a:r>
+                        <a:t>scontrol_show</a:t>
+                      </a:r>
+                    </a:p>
+                  </a:txBody>
+                  <a:tcPr>
+                    <a:solidFill>
+                      <a:srgbClr val="F8F8F8"/>
+                    </a:solidFill>
+                  </a:tcPr>
+                </a:tc>
+                <a:tc>
+                  <a:txBody>
+                    <a:bodyPr/>
+                    <a:lstStyle/>
+                    <a:p>
+                      <a:pPr>
+                        <a:defRPr sz="1100">
+                          <a:latin typeface="Calibri"/>
+                        </a:defRPr>
+                      </a:pPr>
+                      <a:r>
+                        <a:t>MCP</a:t>
+                      </a:r>
+                    </a:p>
+                  </a:txBody>
+                  <a:tcPr>
+                    <a:solidFill>
+                      <a:srgbClr val="F8F8F8"/>
+                    </a:solidFill>
+                  </a:tcPr>
+                </a:tc>
+                <a:tc>
+                  <a:txBody>
+                    <a:bodyPr/>
+                    <a:lstStyle/>
+                    <a:p>
+                      <a:pPr>
+                        <a:defRPr sz="1100">
+                          <a:latin typeface="Calibri"/>
+                        </a:defRPr>
+                      </a:pPr>
+                      <a:r>
+                        <a:t>pre-action verify</a:t>
+                      </a:r>
+                    </a:p>
+                  </a:txBody>
+                  <a:tcPr>
+                    <a:solidFill>
+                      <a:srgbClr val="F8F8F8"/>
+                    </a:solidFill>
+                  </a:tcPr>
+                </a:tc>
+              </a:tr>
+              <a:tr h="265176">
+                <a:tc>
+                  <a:txBody>
+                    <a:bodyPr/>
+                    <a:lstStyle/>
+                    <a:p>
+                      <a:pPr>
+                        <a:defRPr sz="1100">
+                          <a:latin typeface="Calibri"/>
+                        </a:defRPr>
+                      </a:pPr>
+                      <a:r>
+                        <a:t>3</a:t>
+                      </a:r>
+                    </a:p>
+                  </a:txBody>
+                  <a:tcPr/>
+                </a:tc>
+                <a:tc>
+                  <a:txBody>
+                    <a:bodyPr/>
+                    <a:lstStyle/>
+                    <a:p>
+                      <a:pPr>
+                        <a:defRPr sz="1100">
+                          <a:latin typeface="Calibri"/>
+                        </a:defRPr>
+                      </a:pPr>
+                      <a:r>
+                        <a:t>sbatch</a:t>
+                      </a:r>
+                    </a:p>
+                  </a:txBody>
+                  <a:tcPr/>
+                </a:tc>
+                <a:tc>
+                  <a:txBody>
+                    <a:bodyPr/>
+                    <a:lstStyle/>
+                    <a:p>
+                      <a:pPr>
+                        <a:defRPr sz="1100">
+                          <a:latin typeface="Calibri"/>
+                        </a:defRPr>
+                      </a:pPr>
+                      <a:r>
+                        <a:t>FunctionTool (HITL)</a:t>
+                      </a:r>
+                    </a:p>
+                  </a:txBody>
+                  <a:tcPr/>
+                </a:tc>
+                <a:tc>
+                  <a:txBody>
+                    <a:bodyPr/>
+                    <a:lstStyle/>
+                    <a:p>
+                      <a:pPr>
+                        <a:defRPr sz="1100">
+                          <a:latin typeface="Calibri"/>
+                        </a:defRPr>
+                      </a:pPr>
+                      <a:r>
+                        <a:t>job submission</a:t>
+                      </a:r>
+                    </a:p>
+                  </a:txBody>
+                  <a:tcPr/>
+                </a:tc>
+              </a:tr>
+              <a:tr h="265176">
+                <a:tc>
+                  <a:txBody>
+                    <a:bodyPr/>
+                    <a:lstStyle/>
+                    <a:p>
+                      <a:pPr>
+                        <a:defRPr sz="1100">
+                          <a:latin typeface="Calibri"/>
+                        </a:defRPr>
+                      </a:pPr>
+                      <a:r>
+                        <a:t>4</a:t>
+                      </a:r>
+                    </a:p>
+                  </a:txBody>
+                  <a:tcPr>
+                    <a:solidFill>
+                      <a:srgbClr val="F8F8F8"/>
+                    </a:solidFill>
+                  </a:tcPr>
+                </a:tc>
+                <a:tc>
+                  <a:txBody>
+                    <a:bodyPr/>
+                    <a:lstStyle/>
+                    <a:p>
+                      <a:pPr>
+                        <a:defRPr sz="1100">
+                          <a:latin typeface="Calibri"/>
+                        </a:defRPr>
+                      </a:pPr>
+                      <a:r>
+                        <a:t>scancel</a:t>
+                      </a:r>
+                    </a:p>
+                  </a:txBody>
+                  <a:tcPr>
+                    <a:solidFill>
+                      <a:srgbClr val="F8F8F8"/>
+                    </a:solidFill>
+                  </a:tcPr>
+                </a:tc>
+                <a:tc>
+                  <a:txBody>
+                    <a:bodyPr/>
+                    <a:lstStyle/>
+                    <a:p>
+                      <a:pPr>
+                        <a:defRPr sz="1100">
+                          <a:latin typeface="Calibri"/>
+                        </a:defRPr>
+                      </a:pPr>
+                      <a:r>
+                        <a:t>FunctionTool (HITL)</a:t>
+                      </a:r>
+                    </a:p>
+                  </a:txBody>
+                  <a:tcPr>
+                    <a:solidFill>
+                      <a:srgbClr val="F8F8F8"/>
+                    </a:solidFill>
+                  </a:tcPr>
+                </a:tc>
+                <a:tc>
+                  <a:txBody>
+                    <a:bodyPr/>
+                    <a:lstStyle/>
+                    <a:p>
+                      <a:pPr>
+                        <a:defRPr sz="1100">
+                          <a:latin typeface="Calibri"/>
+                        </a:defRPr>
+                      </a:pPr>
+                      <a:r>
+                        <a:t>job control</a:t>
+                      </a:r>
+                    </a:p>
+                  </a:txBody>
+                  <a:tcPr>
+                    <a:solidFill>
+                      <a:srgbClr val="F8F8F8"/>
+                    </a:solidFill>
+                  </a:tcPr>
+                </a:tc>
+              </a:tr>
+              <a:tr h="265176">
+                <a:tc>
+                  <a:txBody>
+                    <a:bodyPr/>
+                    <a:lstStyle/>
+                    <a:p>
+                      <a:pPr>
+                        <a:defRPr sz="1100">
+                          <a:latin typeface="Calibri"/>
+                        </a:defRPr>
+                      </a:pPr>
+                      <a:r>
+                        <a:t>5</a:t>
+                      </a:r>
+                    </a:p>
+                  </a:txBody>
+                  <a:tcPr/>
+                </a:tc>
+                <a:tc>
+                  <a:txBody>
+                    <a:bodyPr/>
+                    <a:lstStyle/>
+                    <a:p>
+                      <a:pPr>
+                        <a:defRPr sz="1100">
+                          <a:latin typeface="Calibri"/>
+                        </a:defRPr>
+                      </a:pPr>
+                      <a:r>
+                        <a:t>scontrol_hold</a:t>
+                      </a:r>
+                    </a:p>
+                  </a:txBody>
+                  <a:tcPr/>
+                </a:tc>
+                <a:tc>
+                  <a:txBody>
+                    <a:bodyPr/>
+                    <a:lstStyle/>
+                    <a:p>
+                      <a:pPr>
+                        <a:defRPr sz="1100">
+                          <a:latin typeface="Calibri"/>
+                        </a:defRPr>
+                      </a:pPr>
+                      <a:r>
+                        <a:t>FunctionTool (HITL)</a:t>
+                      </a:r>
+                    </a:p>
+                  </a:txBody>
+                  <a:tcPr/>
+                </a:tc>
+                <a:tc>
+                  <a:txBody>
+                    <a:bodyPr/>
+                    <a:lstStyle/>
+                    <a:p>
+                      <a:pPr>
+                        <a:defRPr sz="1100">
+                          <a:latin typeface="Calibri"/>
+                        </a:defRPr>
+                      </a:pPr>
+                      <a:r>
+                        <a:t>job control</a:t>
+                      </a:r>
+                    </a:p>
+                  </a:txBody>
+                  <a:tcPr/>
+                </a:tc>
+              </a:tr>
+              <a:tr h="265176">
+                <a:tc>
+                  <a:txBody>
+                    <a:bodyPr/>
+                    <a:lstStyle/>
+                    <a:p>
+                      <a:pPr>
+                        <a:defRPr sz="1100">
+                          <a:latin typeface="Calibri"/>
+                        </a:defRPr>
+                      </a:pPr>
+                      <a:r>
+                        <a:t>6</a:t>
+                      </a:r>
+                    </a:p>
+                  </a:txBody>
+                  <a:tcPr>
+                    <a:solidFill>
+                      <a:srgbClr val="F8F8F8"/>
+                    </a:solidFill>
+                  </a:tcPr>
+                </a:tc>
+                <a:tc>
+                  <a:txBody>
+                    <a:bodyPr/>
+                    <a:lstStyle/>
+                    <a:p>
+                      <a:pPr>
+                        <a:defRPr sz="1100">
+                          <a:latin typeface="Calibri"/>
+                        </a:defRPr>
+                      </a:pPr>
+                      <a:r>
+                        <a:t>scontrol_release</a:t>
+                      </a:r>
+                    </a:p>
+                  </a:txBody>
+                  <a:tcPr>
+                    <a:solidFill>
+                      <a:srgbClr val="F8F8F8"/>
+                    </a:solidFill>
+                  </a:tcPr>
+                </a:tc>
+                <a:tc>
+                  <a:txBody>
+                    <a:bodyPr/>
+                    <a:lstStyle/>
+                    <a:p>
+                      <a:pPr>
+                        <a:defRPr sz="1100">
+                          <a:latin typeface="Calibri"/>
+                        </a:defRPr>
+                      </a:pPr>
+                      <a:r>
+                        <a:t>FunctionTool (HITL)</a:t>
+                      </a:r>
+                    </a:p>
+                  </a:txBody>
+                  <a:tcPr>
+                    <a:solidFill>
+                      <a:srgbClr val="F8F8F8"/>
+                    </a:solidFill>
+                  </a:tcPr>
+                </a:tc>
+                <a:tc>
+                  <a:txBody>
+                    <a:bodyPr/>
+                    <a:lstStyle/>
+                    <a:p>
+                      <a:pPr>
+                        <a:defRPr sz="1100">
+                          <a:latin typeface="Calibri"/>
+                        </a:defRPr>
+                      </a:pPr>
+                      <a:r>
+                        <a:t>job control</a:t>
+                      </a:r>
+                    </a:p>
+                  </a:txBody>
+                  <a:tcPr>
+                    <a:solidFill>
+                      <a:srgbClr val="F8F8F8"/>
+                    </a:solidFill>
+                  </a:tcPr>
+                </a:tc>
+              </a:tr>
+              <a:tr h="265176">
+                <a:tc>
+                  <a:txBody>
+                    <a:bodyPr/>
+                    <a:lstStyle/>
+                    <a:p>
+                      <a:pPr>
+                        <a:defRPr sz="1100">
+                          <a:latin typeface="Calibri"/>
+                        </a:defRPr>
+                      </a:pPr>
+                      <a:r>
+                        <a:t>7</a:t>
+                      </a:r>
+                    </a:p>
+                  </a:txBody>
+                  <a:tcPr/>
+                </a:tc>
+                <a:tc>
+                  <a:txBody>
+                    <a:bodyPr/>
+                    <a:lstStyle/>
+                    <a:p>
+                      <a:pPr>
+                        <a:defRPr sz="1100">
+                          <a:latin typeface="Calibri"/>
+                        </a:defRPr>
+                      </a:pPr>
+                      <a:r>
+                        <a:t>scontrol_requeue</a:t>
+                      </a:r>
+                    </a:p>
+                  </a:txBody>
+                  <a:tcPr/>
+                </a:tc>
+                <a:tc>
+                  <a:txBody>
+                    <a:bodyPr/>
+                    <a:lstStyle/>
+                    <a:p>
+                      <a:pPr>
+                        <a:defRPr sz="1100">
+                          <a:latin typeface="Calibri"/>
+                        </a:defRPr>
+                      </a:pPr>
+                      <a:r>
+                        <a:t>FunctionTool (HITL)</a:t>
+                      </a:r>
+                    </a:p>
+                  </a:txBody>
+                  <a:tcPr/>
+                </a:tc>
+                <a:tc>
+                  <a:txBody>
+                    <a:bodyPr/>
+                    <a:lstStyle/>
+                    <a:p>
+                      <a:pPr>
+                        <a:defRPr sz="1100">
+                          <a:latin typeface="Calibri"/>
+                        </a:defRPr>
+                      </a:pPr>
+                      <a:r>
+                        <a:t>job control</a:t>
+                      </a:r>
+                    </a:p>
+                  </a:txBody>
+                  <a:tcPr/>
+                </a:tc>
+              </a:tr>
+              <a:tr h="265176">
+                <a:tc>
+                  <a:txBody>
+                    <a:bodyPr/>
+                    <a:lstStyle/>
+                    <a:p>
+                      <a:pPr>
+                        <a:defRPr sz="1100">
+                          <a:latin typeface="Calibri"/>
+                        </a:defRPr>
+                      </a:pPr>
+                      <a:r>
+                        <a:t>8</a:t>
+                      </a:r>
+                    </a:p>
+                  </a:txBody>
+                  <a:tcPr>
+                    <a:solidFill>
+                      <a:srgbClr val="F8F8F8"/>
+                    </a:solidFill>
+                  </a:tcPr>
+                </a:tc>
+                <a:tc>
+                  <a:txBody>
+                    <a:bodyPr/>
+                    <a:lstStyle/>
+                    <a:p>
+                      <a:pPr>
+                        <a:defRPr sz="1100">
+                          <a:latin typeface="Calibri"/>
+                        </a:defRPr>
+                      </a:pPr>
+                      <a:r>
+                        <a:t>scontrol_suspend</a:t>
+                      </a:r>
+                    </a:p>
+                  </a:txBody>
+                  <a:tcPr>
+                    <a:solidFill>
+                      <a:srgbClr val="F8F8F8"/>
+                    </a:solidFill>
+                  </a:tcPr>
+                </a:tc>
+                <a:tc>
+                  <a:txBody>
+                    <a:bodyPr/>
+                    <a:lstStyle/>
+                    <a:p>
+                      <a:pPr>
+                        <a:defRPr sz="1100">
+                          <a:latin typeface="Calibri"/>
+                        </a:defRPr>
+                      </a:pPr>
+                      <a:r>
+                        <a:t>FunctionTool (HITL)</a:t>
+                      </a:r>
+                    </a:p>
+                  </a:txBody>
+                  <a:tcPr>
+                    <a:solidFill>
+                      <a:srgbClr val="F8F8F8"/>
+                    </a:solidFill>
+                  </a:tcPr>
+                </a:tc>
+                <a:tc>
+                  <a:txBody>
+                    <a:bodyPr/>
+                    <a:lstStyle/>
+                    <a:p>
+                      <a:pPr>
+                        <a:defRPr sz="1100">
+                          <a:latin typeface="Calibri"/>
+                        </a:defRPr>
+                      </a:pPr>
+                      <a:r>
+                        <a:t>job control</a:t>
+                      </a:r>
+                    </a:p>
+                  </a:txBody>
+                  <a:tcPr>
+                    <a:solidFill>
+                      <a:srgbClr val="F8F8F8"/>
+                    </a:solidFill>
+                  </a:tcPr>
+                </a:tc>
+              </a:tr>
+              <a:tr h="265176">
+                <a:tc>
+                  <a:txBody>
+                    <a:bodyPr/>
+                    <a:lstStyle/>
+                    <a:p>
+                      <a:pPr>
+                        <a:defRPr sz="1100">
+                          <a:latin typeface="Calibri"/>
+                        </a:defRPr>
+                      </a:pPr>
+                      <a:r>
+                        <a:t>9</a:t>
+                      </a:r>
+                    </a:p>
+                  </a:txBody>
+                  <a:tcPr/>
+                </a:tc>
+                <a:tc>
+                  <a:txBody>
+                    <a:bodyPr/>
+                    <a:lstStyle/>
+                    <a:p>
+                      <a:pPr>
+                        <a:defRPr sz="1100">
+                          <a:latin typeface="Calibri"/>
+                        </a:defRPr>
+                      </a:pPr>
+                      <a:r>
+                        <a:t>scontrol_resume_job</a:t>
+                      </a:r>
+                    </a:p>
+                  </a:txBody>
+                  <a:tcPr/>
+                </a:tc>
+                <a:tc>
+                  <a:txBody>
+                    <a:bodyPr/>
+                    <a:lstStyle/>
+                    <a:p>
+                      <a:pPr>
+                        <a:defRPr sz="1100">
+                          <a:latin typeface="Calibri"/>
+                        </a:defRPr>
+                      </a:pPr>
+                      <a:r>
+                        <a:t>FunctionTool (HITL)</a:t>
+                      </a:r>
+                    </a:p>
+                  </a:txBody>
+                  <a:tcPr/>
+                </a:tc>
+                <a:tc>
+                  <a:txBody>
+                    <a:bodyPr/>
+                    <a:lstStyle/>
+                    <a:p>
+                      <a:pPr>
+                        <a:defRPr sz="1100">
+                          <a:latin typeface="Calibri"/>
+                        </a:defRPr>
+                      </a:pPr>
+                      <a:r>
+                        <a:t>job control</a:t>
+                      </a:r>
+                    </a:p>
+                  </a:txBody>
+                  <a:tcPr/>
+                </a:tc>
+              </a:tr>
+              <a:tr h="265176">
+                <a:tc>
+                  <a:txBody>
+                    <a:bodyPr/>
+                    <a:lstStyle/>
+                    <a:p>
+                      <a:pPr>
+                        <a:defRPr sz="1100">
+                          <a:latin typeface="Calibri"/>
+                        </a:defRPr>
+                      </a:pPr>
+                      <a:r>
+                        <a:t>10</a:t>
+                      </a:r>
+                    </a:p>
+                  </a:txBody>
+                  <a:tcPr>
+                    <a:solidFill>
+                      <a:srgbClr val="F8F8F8"/>
+                    </a:solidFill>
+                  </a:tcPr>
+                </a:tc>
+                <a:tc>
+                  <a:txBody>
+                    <a:bodyPr/>
+                    <a:lstStyle/>
+                    <a:p>
+                      <a:pPr>
+                        <a:defRPr sz="1100">
+                          <a:latin typeface="Calibri"/>
+                        </a:defRPr>
+                      </a:pPr>
+                      <a:r>
+                        <a:t>scontrol_update</a:t>
+                      </a:r>
+                    </a:p>
+                  </a:txBody>
+                  <a:tcPr>
+                    <a:solidFill>
+                      <a:srgbClr val="F8F8F8"/>
+                    </a:solidFill>
+                  </a:tcPr>
+                </a:tc>
+                <a:tc>
+                  <a:txBody>
+                    <a:bodyPr/>
+                    <a:lstStyle/>
+                    <a:p>
+                      <a:pPr>
+                        <a:defRPr sz="1100">
+                          <a:latin typeface="Calibri"/>
+                        </a:defRPr>
+                      </a:pPr>
+                      <a:r>
+                        <a:t>FunctionTool (HITL)</a:t>
+                      </a:r>
+                    </a:p>
+                  </a:txBody>
+                  <a:tcPr>
+                    <a:solidFill>
+                      <a:srgbClr val="F8F8F8"/>
+                    </a:solidFill>
+                  </a:tcPr>
+                </a:tc>
+                <a:tc>
+                  <a:txBody>
+                    <a:bodyPr/>
+                    <a:lstStyle/>
+                    <a:p>
+                      <a:pPr>
+                        <a:defRPr sz="1100">
+                          <a:latin typeface="Calibri"/>
+                        </a:defRPr>
+                      </a:pPr>
+                      <a:r>
+                        <a:t>job control</a:t>
+                      </a:r>
+                    </a:p>
+                  </a:txBody>
+                  <a:tcPr>
+                    <a:solidFill>
+                      <a:srgbClr val="F8F8F8"/>
+                    </a:solidFill>
+                  </a:tcPr>
+                </a:tc>
+              </a:tr>
+              <a:tr h="265176">
+                <a:tc>
+                  <a:txBody>
+                    <a:bodyPr/>
+                    <a:lstStyle/>
+                    <a:p>
+                      <a:pPr>
+                        <a:defRPr sz="1100">
+                          <a:latin typeface="Calibri"/>
+                        </a:defRPr>
+                      </a:pPr>
+                      <a:r>
+                        <a:t>11</a:t>
+                      </a:r>
+                    </a:p>
+                  </a:txBody>
+                  <a:tcPr/>
+                </a:tc>
+                <a:tc>
+                  <a:txBody>
+                    <a:bodyPr/>
+                    <a:lstStyle/>
+                    <a:p>
+                      <a:pPr>
+                        <a:defRPr sz="1100">
+                          <a:latin typeface="Calibri"/>
+                        </a:defRPr>
+                      </a:pPr>
+                      <a:r>
+                        <a:t>srun</a:t>
+                      </a:r>
+                    </a:p>
+                  </a:txBody>
+                  <a:tcPr/>
+                </a:tc>
+                <a:tc>
+                  <a:txBody>
+                    <a:bodyPr/>
+                    <a:lstStyle/>
+                    <a:p>
+                      <a:pPr>
+                        <a:defRPr sz="1100">
+                          <a:latin typeface="Calibri"/>
+                        </a:defRPr>
+                      </a:pPr>
+                      <a:r>
+                        <a:t>FunctionTool (HITL)</a:t>
+                      </a:r>
+                    </a:p>
+                  </a:txBody>
+                  <a:tcPr/>
+                </a:tc>
+                <a:tc>
+                  <a:txBody>
+                    <a:bodyPr/>
+                    <a:lstStyle/>
+                    <a:p>
+                      <a:pPr>
+                        <a:defRPr sz="1100">
+                          <a:latin typeface="Calibri"/>
+                        </a:defRPr>
+                      </a:pPr>
+                      <a:r>
+                        <a:t>job submission</a:t>
+                      </a:r>
+                    </a:p>
+                  </a:txBody>
+                  <a:tcPr/>
+                </a:tc>
+              </a:tr>
+              <a:tr h="265176">
+                <a:tc>
+                  <a:txBody>
+                    <a:bodyPr/>
+                    <a:lstStyle/>
+                    <a:p>
+                      <a:pPr>
+                        <a:defRPr sz="1100">
+                          <a:latin typeface="Calibri"/>
+                        </a:defRPr>
+                      </a:pPr>
+                      <a:r>
+                        <a:t>12</a:t>
+                      </a:r>
+                    </a:p>
+                  </a:txBody>
+                  <a:tcPr>
+                    <a:solidFill>
+                      <a:srgbClr val="F8F8F8"/>
+                    </a:solidFill>
+                  </a:tcPr>
+                </a:tc>
+                <a:tc>
+                  <a:txBody>
+                    <a:bodyPr/>
+                    <a:lstStyle/>
+                    <a:p>
+                      <a:pPr>
+                        <a:defRPr sz="1100">
+                          <a:latin typeface="Calibri"/>
+                        </a:defRPr>
+                      </a:pPr>
+                      <a:r>
+                        <a:t>salloc</a:t>
+                      </a:r>
+                    </a:p>
+                  </a:txBody>
+                  <a:tcPr>
+                    <a:solidFill>
+                      <a:srgbClr val="F8F8F8"/>
+                    </a:solidFill>
+                  </a:tcPr>
+                </a:tc>
+                <a:tc>
+                  <a:txBody>
+                    <a:bodyPr/>
+                    <a:lstStyle/>
+                    <a:p>
+                      <a:pPr>
+                        <a:defRPr sz="1100">
+                          <a:latin typeface="Calibri"/>
+                        </a:defRPr>
+                      </a:pPr>
+                      <a:r>
+                        <a:t>FunctionTool (HITL)</a:t>
+                      </a:r>
+                    </a:p>
+                  </a:txBody>
+                  <a:tcPr>
+                    <a:solidFill>
+                      <a:srgbClr val="F8F8F8"/>
+                    </a:solidFill>
+                  </a:tcPr>
+                </a:tc>
+                <a:tc>
+                  <a:txBody>
+                    <a:bodyPr/>
+                    <a:lstStyle/>
+                    <a:p>
+                      <a:pPr>
+                        <a:defRPr sz="1100">
+                          <a:latin typeface="Calibri"/>
+                        </a:defRPr>
+                      </a:pPr>
+                      <a:r>
+                        <a:t>job submission</a:t>
+                      </a:r>
+                    </a:p>
+                  </a:txBody>
+                  <a:tcPr>
+                    <a:solidFill>
+                      <a:srgbClr val="F8F8F8"/>
+                    </a:solidFill>
+                  </a:tcPr>
+                </a:tc>
+              </a:tr>
+              <a:tr h="265176">
+                <a:tc>
+                  <a:txBody>
+                    <a:bodyPr/>
+                    <a:lstStyle/>
+                    <a:p>
+                      <a:pPr>
+                        <a:defRPr sz="1100">
+                          <a:latin typeface="Calibri"/>
+                        </a:defRPr>
+                      </a:pPr>
+                      <a:r>
+                        <a:t>13</a:t>
+                      </a:r>
+                    </a:p>
+                  </a:txBody>
+                  <a:tcPr/>
+                </a:tc>
+                <a:tc>
+                  <a:txBody>
+                    <a:bodyPr/>
+                    <a:lstStyle/>
+                    <a:p>
+                      <a:pPr>
+                        <a:defRPr sz="1100">
+                          <a:latin typeface="Calibri"/>
+                        </a:defRPr>
+                      </a:pPr>
+                      <a:r>
+                        <a:t>sattach</a:t>
+                      </a:r>
+                    </a:p>
+                  </a:txBody>
+                  <a:tcPr/>
+                </a:tc>
+                <a:tc>
+                  <a:txBody>
+                    <a:bodyPr/>
+                    <a:lstStyle/>
+                    <a:p>
+                      <a:pPr>
+                        <a:defRPr sz="1100">
+                          <a:latin typeface="Calibri"/>
+                        </a:defRPr>
+                      </a:pPr>
+                      <a:r>
+                        <a:t>FunctionTool (HITL)</a:t>
+                      </a:r>
+                    </a:p>
+                  </a:txBody>
+                  <a:tcPr/>
+                </a:tc>
+                <a:tc>
+                  <a:txBody>
+                    <a:bodyPr/>
+                    <a:lstStyle/>
+                    <a:p>
+                      <a:pPr>
+                        <a:defRPr sz="1100">
+                          <a:latin typeface="Calibri"/>
+                        </a:defRPr>
+                      </a:pPr>
+                      <a:r>
+                        <a:t>job submission</a:t>
+                      </a:r>
+                    </a:p>
+                  </a:txBody>
+                  <a:tcPr/>
+                </a:tc>
+              </a:tr>
+              <a:tr h="265176">
+                <a:tc>
+                  <a:txBody>
+                    <a:bodyPr/>
+                    <a:lstStyle/>
+                    <a:p>
+                      <a:pPr>
+                        <a:defRPr sz="1100">
+                          <a:latin typeface="Calibri"/>
+                        </a:defRPr>
+                      </a:pPr>
+                      <a:r>
+                        <a:t>14</a:t>
+                      </a:r>
+                    </a:p>
+                  </a:txBody>
+                  <a:tcPr>
+                    <a:solidFill>
+                      <a:srgbClr val="F8F8F8"/>
+                    </a:solidFill>
+                  </a:tcPr>
+                </a:tc>
+                <a:tc>
+                  <a:txBody>
+                    <a:bodyPr/>
+                    <a:lstStyle/>
+                    <a:p>
+                      <a:pPr>
+                        <a:defRPr sz="1100">
+                          <a:latin typeface="Calibri"/>
+                        </a:defRPr>
+                      </a:pPr>
+                      <a:r>
+                        <a:t>sbcast</a:t>
+                      </a:r>
+                    </a:p>
+                  </a:txBody>
+                  <a:tcPr>
+                    <a:solidFill>
+                      <a:srgbClr val="F8F8F8"/>
+                    </a:solidFill>
+                  </a:tcPr>
+                </a:tc>
+                <a:tc>
+                  <a:txBody>
+                    <a:bodyPr/>
+                    <a:lstStyle/>
+                    <a:p>
+                      <a:pPr>
+                        <a:defRPr sz="1100">
+                          <a:latin typeface="Calibri"/>
+                        </a:defRPr>
+                      </a:pPr>
+                      <a:r>
+                        <a:t>FunctionTool (HITL)</a:t>
+                      </a:r>
+                    </a:p>
+                  </a:txBody>
+                  <a:tcPr>
+                    <a:solidFill>
+                      <a:srgbClr val="F8F8F8"/>
+                    </a:solidFill>
+                  </a:tcPr>
+                </a:tc>
+                <a:tc>
+                  <a:txBody>
+                    <a:bodyPr/>
+                    <a:lstStyle/>
+                    <a:p>
+                      <a:pPr>
+                        <a:defRPr sz="1100">
+                          <a:latin typeface="Calibri"/>
+                        </a:defRPr>
+                      </a:pPr>
+                      <a:r>
+                        <a:t>job submission</a:t>
+                      </a:r>
+                    </a:p>
+                  </a:txBody>
+                  <a:tcPr>
+                    <a:solidFill>
+                      <a:srgbClr val="F8F8F8"/>
+                    </a:solidFill>
+                  </a:tcPr>
+                </a:tc>
+              </a:tr>
+              <a:tr h="265176">
+                <a:tc>
+                  <a:txBody>
+                    <a:bodyPr/>
+                    <a:lstStyle/>
+                    <a:p>
+                      <a:pPr>
+                        <a:defRPr sz="1100">
+                          <a:latin typeface="Calibri"/>
+                        </a:defRPr>
+                      </a:pPr>
+                      <a:r>
+                        <a:t>15</a:t>
+                      </a:r>
+                    </a:p>
+                  </a:txBody>
+                  <a:tcPr/>
+                </a:tc>
+                <a:tc>
+                  <a:txBody>
+                    <a:bodyPr/>
+                    <a:lstStyle/>
+                    <a:p>
+                      <a:pPr>
+                        <a:defRPr sz="1100">
+                          <a:latin typeface="Calibri"/>
+                        </a:defRPr>
+                      </a:pPr>
+                      <a:r>
+                        <a:t>scontrol_node</a:t>
+                      </a:r>
+                    </a:p>
+                  </a:txBody>
+                  <a:tcPr/>
+                </a:tc>
+                <a:tc>
+                  <a:txBody>
+                    <a:bodyPr/>
+                    <a:lstStyle/>
+                    <a:p>
+                      <a:pPr>
+                        <a:defRPr sz="1100">
+                          <a:latin typeface="Calibri"/>
+                        </a:defRPr>
+                      </a:pPr>
+                      <a:r>
+                        <a:t>FunctionTool (HITL)</a:t>
+                      </a:r>
+                    </a:p>
+                  </a:txBody>
+                  <a:tcPr/>
+                </a:tc>
+                <a:tc>
+                  <a:txBody>
+                    <a:bodyPr/>
+                    <a:lstStyle/>
+                    <a:p>
+                      <a:pPr>
+                        <a:defRPr sz="1100">
+                          <a:latin typeface="Calibri"/>
+                        </a:defRPr>
+                      </a:pPr>
+                      <a:r>
+                        <a:t>node management</a:t>
+                      </a:r>
+                    </a:p>
+                  </a:txBody>
+                  <a:tcPr/>
+                </a:tc>
+              </a:tr>
+              <a:tr h="265176">
+                <a:tc>
+                  <a:txBody>
+                    <a:bodyPr/>
+                    <a:lstStyle/>
+                    <a:p>
+                      <a:pPr>
+                        <a:defRPr sz="1100">
+                          <a:latin typeface="Calibri"/>
+                        </a:defRPr>
+                      </a:pPr>
+                      <a:r>
+                        <a:t>16</a:t>
+                      </a:r>
+                    </a:p>
+                  </a:txBody>
+                  <a:tcPr>
+                    <a:solidFill>
+                      <a:srgbClr val="F8F8F8"/>
+                    </a:solidFill>
+                  </a:tcPr>
+                </a:tc>
+                <a:tc>
+                  <a:txBody>
+                    <a:bodyPr/>
+                    <a:lstStyle/>
+                    <a:p>
+                      <a:pPr>
+                        <a:defRPr sz="1100">
+                          <a:latin typeface="Calibri"/>
+                        </a:defRPr>
+                      </a:pPr>
+                      <a:r>
+                        <a:t>scontrol_node_power_down</a:t>
+                      </a:r>
+                    </a:p>
+                  </a:txBody>
+                  <a:tcPr>
+                    <a:solidFill>
+                      <a:srgbClr val="F8F8F8"/>
+                    </a:solidFill>
+                  </a:tcPr>
+                </a:tc>
+                <a:tc>
+                  <a:txBody>
+                    <a:bodyPr/>
+                    <a:lstStyle/>
+                    <a:p>
+                      <a:pPr>
+                        <a:defRPr sz="1100">
+                          <a:latin typeface="Calibri"/>
+                        </a:defRPr>
+                      </a:pPr>
+                      <a:r>
+                        <a:t>FunctionTool (HITL)</a:t>
+                      </a:r>
+                    </a:p>
+                  </a:txBody>
+                  <a:tcPr>
+                    <a:solidFill>
+                      <a:srgbClr val="F8F8F8"/>
+                    </a:solidFill>
+                  </a:tcPr>
+                </a:tc>
+                <a:tc>
+                  <a:txBody>
+                    <a:bodyPr/>
+                    <a:lstStyle/>
+                    <a:p>
+                      <a:pPr>
+                        <a:defRPr sz="1100">
+                          <a:latin typeface="Calibri"/>
+                        </a:defRPr>
+                      </a:pPr>
+                      <a:r>
+                        <a:t>node management</a:t>
+                      </a:r>
+                    </a:p>
+                  </a:txBody>
+                  <a:tcPr>
+                    <a:solidFill>
+                      <a:srgbClr val="F8F8F8"/>
+                    </a:solidFill>
+                  </a:tcPr>
+                </a:tc>
+              </a:tr>
+              <a:tr h="265176">
+                <a:tc>
+                  <a:txBody>
+                    <a:bodyPr/>
+                    <a:lstStyle/>
+                    <a:p>
+                      <a:pPr>
+                        <a:defRPr sz="1100">
+                          <a:latin typeface="Calibri"/>
+                        </a:defRPr>
+                      </a:pPr>
+                      <a:r>
+                        <a:t>17</a:t>
+                      </a:r>
+                    </a:p>
+                  </a:txBody>
+                  <a:tcPr/>
+                </a:tc>
+                <a:tc>
+                  <a:txBody>
+                    <a:bodyPr/>
+                    <a:lstStyle/>
+                    <a:p>
+                      <a:pPr>
+                        <a:defRPr sz="1100">
+                          <a:latin typeface="Calibri"/>
+                        </a:defRPr>
+                      </a:pPr>
+                      <a:r>
+                        <a:t>scontrol_node_power_up</a:t>
+                      </a:r>
+                    </a:p>
+                  </a:txBody>
+                  <a:tcPr/>
+                </a:tc>
+                <a:tc>
+                  <a:txBody>
+                    <a:bodyPr/>
+                    <a:lstStyle/>
+                    <a:p>
+                      <a:pPr>
+                        <a:defRPr sz="1100">
+                          <a:latin typeface="Calibri"/>
+                        </a:defRPr>
+                      </a:pPr>
+                      <a:r>
+                        <a:t>FunctionTool (HITL)</a:t>
+                      </a:r>
+                    </a:p>
+                  </a:txBody>
+                  <a:tcPr/>
+                </a:tc>
+                <a:tc>
+                  <a:txBody>
+                    <a:bodyPr/>
+                    <a:lstStyle/>
+                    <a:p>
+                      <a:pPr>
+                        <a:defRPr sz="1100">
+                          <a:latin typeface="Calibri"/>
+                        </a:defRPr>
+                      </a:pPr>
+                      <a:r>
+                        <a:t>node management</a:t>
+                      </a:r>
+                    </a:p>
+                  </a:txBody>
+                  <a:tcPr/>
+                </a:tc>
+              </a:tr>
+              <a:tr h="265176">
+                <a:tc>
+                  <a:txBody>
+                    <a:bodyPr/>
+                    <a:lstStyle/>
+                    <a:p>
+                      <a:pPr>
+                        <a:defRPr sz="1100">
+                          <a:latin typeface="Calibri"/>
+                        </a:defRPr>
+                      </a:pPr>
+                      <a:r>
+                        <a:t>18</a:t>
+                      </a:r>
+                    </a:p>
+                  </a:txBody>
+                  <a:tcPr>
+                    <a:solidFill>
+                      <a:srgbClr val="F8F8F8"/>
+                    </a:solidFill>
+                  </a:tcPr>
+                </a:tc>
+                <a:tc>
+                  <a:txBody>
+                    <a:bodyPr/>
+                    <a:lstStyle/>
+                    <a:p>
+                      <a:pPr>
+                        <a:defRPr sz="1100">
+                          <a:latin typeface="Calibri"/>
+                        </a:defRPr>
+                      </a:pPr>
+                      <a:r>
+                        <a:t>scontrol_node_features</a:t>
+                      </a:r>
+                    </a:p>
+                  </a:txBody>
+                  <a:tcPr>
+                    <a:solidFill>
+                      <a:srgbClr val="F8F8F8"/>
+                    </a:solidFill>
+                  </a:tcPr>
+                </a:tc>
+                <a:tc>
+                  <a:txBody>
+                    <a:bodyPr/>
+                    <a:lstStyle/>
+                    <a:p>
+                      <a:pPr>
+                        <a:defRPr sz="1100">
+                          <a:latin typeface="Calibri"/>
+                        </a:defRPr>
+                      </a:pPr>
+                      <a:r>
+                        <a:t>FunctionTool (HITL)</a:t>
+                      </a:r>
+                    </a:p>
+                  </a:txBody>
+                  <a:tcPr>
+                    <a:solidFill>
+                      <a:srgbClr val="F8F8F8"/>
+                    </a:solidFill>
+                  </a:tcPr>
+                </a:tc>
+                <a:tc>
+                  <a:txBody>
+                    <a:bodyPr/>
+                    <a:lstStyle/>
+                    <a:p>
+                      <a:pPr>
+                        <a:defRPr sz="1100">
+                          <a:latin typeface="Calibri"/>
+                        </a:defRPr>
+                      </a:pPr>
+                      <a:r>
+                        <a:t>node management</a:t>
+                      </a:r>
+                    </a:p>
+                  </a:txBody>
+                  <a:tcPr>
+                    <a:solidFill>
+                      <a:srgbClr val="F8F8F8"/>
+                    </a:solidFill>
+                  </a:tcPr>
+                </a:tc>
+              </a:tr>
+              <a:tr h="265176">
+                <a:tc>
+                  <a:txBody>
+                    <a:bodyPr/>
+                    <a:lstStyle/>
+                    <a:p>
+                      <a:pPr>
+                        <a:defRPr sz="1100">
+                          <a:latin typeface="Calibri"/>
+                        </a:defRPr>
+                      </a:pPr>
+                      <a:r>
+                        <a:t>19</a:t>
+                      </a:r>
+                    </a:p>
+                  </a:txBody>
+                  <a:tcPr/>
+                </a:tc>
+                <a:tc>
+                  <a:txBody>
+                    <a:bodyPr/>
+                    <a:lstStyle/>
+                    <a:p>
+                      <a:pPr>
+                        <a:defRPr sz="1100">
+                          <a:latin typeface="Calibri"/>
+                        </a:defRPr>
+                      </a:pPr>
+                      <a:r>
+                        <a:t>scontrol_node_gres</a:t>
+                      </a:r>
+                    </a:p>
+                  </a:txBody>
+                  <a:tcPr/>
+                </a:tc>
+                <a:tc>
+                  <a:txBody>
+                    <a:bodyPr/>
+                    <a:lstStyle/>
+                    <a:p>
+                      <a:pPr>
+                        <a:defRPr sz="1100">
+                          <a:latin typeface="Calibri"/>
+                        </a:defRPr>
+                      </a:pPr>
+                      <a:r>
+                        <a:t>FunctionTool (HITL)</a:t>
+                      </a:r>
+                    </a:p>
+                  </a:txBody>
+                  <a:tcPr/>
+                </a:tc>
+                <a:tc>
+                  <a:txBody>
+                    <a:bodyPr/>
+                    <a:lstStyle/>
+                    <a:p>
+                      <a:pPr>
+                        <a:defRPr sz="1100">
+                          <a:latin typeface="Calibri"/>
+                        </a:defRPr>
+                      </a:pPr>
+                      <a:r>
+                        <a:t>node management</a:t>
+                      </a:r>
+                    </a:p>
+                  </a:txBody>
+                  <a:tcPr/>
+                </a:tc>
+              </a:tr>
+            </a:tbl>
+          </a:graphicData>
+        </a:graphic>
+      </p:graphicFrame>
+      <p:sp>
+        <p:nvSpPr>
+          <p:cNvPr id="5" name="TextBox 4"/>
+          <p:cNvSpPr txBox="1"/>
+          <p:nvPr/>
+        </p:nvSpPr>
+        <p:spPr>
+          <a:xfrm>
+            <a:off x="411480" y="6217920"/>
+            <a:ext cx="11155680" cy="411480"/>
+          </a:xfrm>
+          <a:prstGeom prst="rect">
+            <a:avLst/>
+          </a:prstGeom>
+          <a:noFill/>
+        </p:spPr>
+        <p:txBody>
+          <a:bodyPr wrap="none">
+            <a:spAutoFit/>
+          </a:bodyPr>
+          <a:lstStyle/>
+          <a:p>
+            <a:pPr>
+              <a:defRPr sz="1100" i="1">
+                <a:latin typeface="Calibri"/>
+              </a:defRPr>
+            </a:pPr>
+            <a:r>
+              <a:t>Part 1 of 2</a:t>
+            </a:r>
+          </a:p>
+        </p:txBody>
+      </p:sp>
+    </p:spTree>
+  </p:cSld>
+  <p:clrMapOvr>
+    <a:masterClrMapping/>
+  </p:clrMapOvr>
+</p:sld>
+</file>
+
+<file path=ppt/slides/slide5.xml><?xml version="1.0" encoding="utf-8"?>
+<p:sld xmlns:a="http://schemas.openxmlformats.org/drawingml/2006/main" xmlns:p="http://schemas.openxmlformats.org/presentationml/2006/main" xmlns:r="http://schemas.openxmlformats.org/officeDocument/2006/relationships">
+  <p:cSld>
+    <p:spTree>
+      <p:nvGrpSpPr>
+        <p:cNvPr id="1" name=""/>
+        <p:cNvGrpSpPr/>
+        <p:nvPr/>
+      </p:nvGrpSpPr>
+      <p:grpSpPr/>
+      <p:sp>
+        <p:nvSpPr>
+          <p:cNvPr id="2" name="Title 1"/>
+          <p:cNvSpPr>
+            <a:spLocks noGrp="1"/>
+          </p:cNvSpPr>
+          <p:nvPr>
+            <p:ph type="title"/>
+          </p:nvPr>
+        </p:nvSpPr>
+        <p:spPr/>
+        <p:txBody>
+          <a:bodyPr/>
+          <a:lstStyle/>
+          <a:p/>
+        </p:txBody>
+      </p:sp>
+      <p:sp>
+        <p:nvSpPr>
+          <p:cNvPr id="3" name="TextBox 2"/>
+          <p:cNvSpPr txBox="1"/>
+          <p:nvPr/>
+        </p:nvSpPr>
+        <p:spPr>
+          <a:xfrm>
+            <a:off x="365760" y="182880"/>
+            <a:ext cx="11521440" cy="548640"/>
+          </a:xfrm>
+          <a:prstGeom prst="rect">
+            <a:avLst/>
+          </a:prstGeom>
+          <a:noFill/>
+        </p:spPr>
+        <p:txBody>
+          <a:bodyPr wrap="none">
+            <a:spAutoFit/>
+          </a:bodyPr>
+          <a:lstStyle/>
+          <a:p>
+            <a:pPr>
+              <a:defRPr sz="2400" b="1">
+                <a:latin typeface="Calibri"/>
+              </a:defRPr>
+            </a:pPr>
+            <a:r>
+              <a:t>Operator Tool Inventory</a:t>
+            </a:r>
+          </a:p>
+        </p:txBody>
+      </p:sp>
+      <p:graphicFrame>
+        <p:nvGraphicFramePr>
+          <p:cNvPr id="4" name="Table 3"/>
+          <p:cNvGraphicFramePr>
+            <a:graphicFrameLocks noGrp="1"/>
+          </p:cNvGraphicFramePr>
+          <p:nvPr/>
+        </p:nvGraphicFramePr>
+        <p:xfrm>
+          <a:off x="365760" y="822960"/>
+          <a:ext cx="11521440" cy="5303520"/>
+        </p:xfrm>
+        <a:graphic>
+          <a:graphicData uri="http://schemas.openxmlformats.org/drawingml/2006/table">
+            <a:tbl>
+              <a:tblPr firstRow="1" bandRow="1">
+                <a:tableStyleId>{5C22544A-7EE6-4342-B048-85BDC9FD1C3A}</a:tableStyleId>
+              </a:tblPr>
+              <a:tblGrid>
+                <a:gridCol w="731520"/>
+                <a:gridCol w="5029200"/>
+                <a:gridCol w="2560320"/>
+                <a:gridCol w="3200400"/>
+              </a:tblGrid>
+              <a:tr h="279132">
+                <a:tc>
+                  <a:txBody>
+                    <a:bodyPr/>
+                    <a:lstStyle/>
+                    <a:p>
+                      <a:pPr>
+                        <a:defRPr b="1" sz="1100">
+                          <a:latin typeface="Calibri"/>
+                        </a:defRPr>
+                      </a:pPr>
+                      <a:r>
+                        <a:t>#</a:t>
+                      </a:r>
+                    </a:p>
+                  </a:txBody>
+                  <a:tcPr>
+                    <a:solidFill>
+                      <a:srgbClr val="E6E6E6"/>
+                    </a:solidFill>
+                  </a:tcPr>
+                </a:tc>
+                <a:tc>
+                  <a:txBody>
+                    <a:bodyPr/>
+                    <a:lstStyle/>
+                    <a:p>
+                      <a:pPr>
+                        <a:defRPr b="1" sz="1100">
+                          <a:latin typeface="Calibri"/>
+                        </a:defRPr>
+                      </a:pPr>
+                      <a:r>
+                        <a:t>Tool</a:t>
+                      </a:r>
+                    </a:p>
+                  </a:txBody>
+                  <a:tcPr>
+                    <a:solidFill>
+                      <a:srgbClr val="E6E6E6"/>
+                    </a:solidFill>
+                  </a:tcPr>
+                </a:tc>
+                <a:tc>
+                  <a:txBody>
+                    <a:bodyPr/>
+                    <a:lstStyle/>
+                    <a:p>
+                      <a:pPr>
+                        <a:defRPr b="1" sz="1100">
+                          <a:latin typeface="Calibri"/>
+                        </a:defRPr>
+                      </a:pPr>
+                      <a:r>
+                        <a:t>Type</a:t>
+                      </a:r>
+                    </a:p>
+                  </a:txBody>
+                  <a:tcPr>
+                    <a:solidFill>
+                      <a:srgbClr val="E6E6E6"/>
+                    </a:solidFill>
+                  </a:tcPr>
+                </a:tc>
+                <a:tc>
+                  <a:txBody>
+                    <a:bodyPr/>
+                    <a:lstStyle/>
+                    <a:p>
+                      <a:pPr>
+                        <a:defRPr b="1" sz="1100">
+                          <a:latin typeface="Calibri"/>
+                        </a:defRPr>
+                      </a:pPr>
+                      <a:r>
+                        <a:t>Category</a:t>
+                      </a:r>
+                    </a:p>
+                  </a:txBody>
+                  <a:tcPr>
+                    <a:solidFill>
+                      <a:srgbClr val="E6E6E6"/>
+                    </a:solidFill>
+                  </a:tcPr>
+                </a:tc>
+              </a:tr>
+              <a:tr h="279132">
+                <a:tc>
+                  <a:txBody>
+                    <a:bodyPr/>
+                    <a:lstStyle/>
+                    <a:p>
+                      <a:pPr>
+                        <a:defRPr sz="1100">
+                          <a:latin typeface="Calibri"/>
+                        </a:defRPr>
+                      </a:pPr>
+                      <a:r>
+                        <a:t>20</a:t>
+                      </a:r>
+                    </a:p>
+                  </a:txBody>
+                  <a:tcPr/>
+                </a:tc>
+                <a:tc>
+                  <a:txBody>
+                    <a:bodyPr/>
+                    <a:lstStyle/>
+                    <a:p>
+                      <a:pPr>
+                        <a:defRPr sz="1100">
+                          <a:latin typeface="Calibri"/>
+                        </a:defRPr>
+                      </a:pPr>
+                      <a:r>
+                        <a:t>scontrol_node_weight</a:t>
+                      </a:r>
+                    </a:p>
+                  </a:txBody>
+                  <a:tcPr/>
+                </a:tc>
+                <a:tc>
+                  <a:txBody>
+                    <a:bodyPr/>
+                    <a:lstStyle/>
+                    <a:p>
+                      <a:pPr>
+                        <a:defRPr sz="1100">
+                          <a:latin typeface="Calibri"/>
+                        </a:defRPr>
+                      </a:pPr>
+                      <a:r>
+                        <a:t>FunctionTool (HITL)</a:t>
+                      </a:r>
+                    </a:p>
+                  </a:txBody>
+                  <a:tcPr/>
+                </a:tc>
+                <a:tc>
+                  <a:txBody>
+                    <a:bodyPr/>
+                    <a:lstStyle/>
+                    <a:p>
+                      <a:pPr>
+                        <a:defRPr sz="1100">
+                          <a:latin typeface="Calibri"/>
+                        </a:defRPr>
+                      </a:pPr>
+                      <a:r>
+                        <a:t>node management</a:t>
+                      </a:r>
+                    </a:p>
+                  </a:txBody>
+                  <a:tcPr/>
+                </a:tc>
+              </a:tr>
+              <a:tr h="279132">
+                <a:tc>
+                  <a:txBody>
+                    <a:bodyPr/>
+                    <a:lstStyle/>
+                    <a:p>
+                      <a:pPr>
+                        <a:defRPr sz="1100">
+                          <a:latin typeface="Calibri"/>
+                        </a:defRPr>
+                      </a:pPr>
+                      <a:r>
+                        <a:t>21</a:t>
+                      </a:r>
+                    </a:p>
+                  </a:txBody>
+                  <a:tcPr>
+                    <a:solidFill>
+                      <a:srgbClr val="F8F8F8"/>
+                    </a:solidFill>
+                  </a:tcPr>
+                </a:tc>
+                <a:tc>
+                  <a:txBody>
+                    <a:bodyPr/>
+                    <a:lstStyle/>
+                    <a:p>
+                      <a:pPr>
+                        <a:defRPr sz="1100">
+                          <a:latin typeface="Calibri"/>
+                        </a:defRPr>
+                      </a:pPr>
+                      <a:r>
+                        <a:t>scontrol_create_reservation</a:t>
+                      </a:r>
+                    </a:p>
+                  </a:txBody>
+                  <a:tcPr>
+                    <a:solidFill>
+                      <a:srgbClr val="F8F8F8"/>
+                    </a:solidFill>
+                  </a:tcPr>
+                </a:tc>
+                <a:tc>
+                  <a:txBody>
+                    <a:bodyPr/>
+                    <a:lstStyle/>
+                    <a:p>
+                      <a:pPr>
+                        <a:defRPr sz="1100">
+                          <a:latin typeface="Calibri"/>
+                        </a:defRPr>
+                      </a:pPr>
+                      <a:r>
+                        <a:t>FunctionTool (HITL)</a:t>
+                      </a:r>
+                    </a:p>
+                  </a:txBody>
+                  <a:tcPr>
+                    <a:solidFill>
+                      <a:srgbClr val="F8F8F8"/>
+                    </a:solidFill>
+                  </a:tcPr>
+                </a:tc>
+                <a:tc>
+                  <a:txBody>
+                    <a:bodyPr/>
+                    <a:lstStyle/>
+                    <a:p>
+                      <a:pPr>
+                        <a:defRPr sz="1100">
+                          <a:latin typeface="Calibri"/>
+                        </a:defRPr>
+                      </a:pPr>
+                      <a:r>
+                        <a:t>reservations</a:t>
+                      </a:r>
+                    </a:p>
+                  </a:txBody>
+                  <a:tcPr>
+                    <a:solidFill>
+                      <a:srgbClr val="F8F8F8"/>
+                    </a:solidFill>
+                  </a:tcPr>
+                </a:tc>
+              </a:tr>
+              <a:tr h="279132">
+                <a:tc>
+                  <a:txBody>
+                    <a:bodyPr/>
+                    <a:lstStyle/>
+                    <a:p>
+                      <a:pPr>
+                        <a:defRPr sz="1100">
+                          <a:latin typeface="Calibri"/>
+                        </a:defRPr>
+                      </a:pPr>
+                      <a:r>
+                        <a:t>22</a:t>
+                      </a:r>
+                    </a:p>
+                  </a:txBody>
+                  <a:tcPr/>
+                </a:tc>
+                <a:tc>
+                  <a:txBody>
+                    <a:bodyPr/>
+                    <a:lstStyle/>
+                    <a:p>
+                      <a:pPr>
+                        <a:defRPr sz="1100">
+                          <a:latin typeface="Calibri"/>
+                        </a:defRPr>
+                      </a:pPr>
+                      <a:r>
+                        <a:t>scontrol_delete_reservation</a:t>
+                      </a:r>
+                    </a:p>
+                  </a:txBody>
+                  <a:tcPr/>
+                </a:tc>
+                <a:tc>
+                  <a:txBody>
+                    <a:bodyPr/>
+                    <a:lstStyle/>
+                    <a:p>
+                      <a:pPr>
+                        <a:defRPr sz="1100">
+                          <a:latin typeface="Calibri"/>
+                        </a:defRPr>
+                      </a:pPr>
+                      <a:r>
+                        <a:t>FunctionTool (HITL)</a:t>
+                      </a:r>
+                    </a:p>
+                  </a:txBody>
+                  <a:tcPr/>
+                </a:tc>
+                <a:tc>
+                  <a:txBody>
+                    <a:bodyPr/>
+                    <a:lstStyle/>
+                    <a:p>
+                      <a:pPr>
+                        <a:defRPr sz="1100">
+                          <a:latin typeface="Calibri"/>
+                        </a:defRPr>
+                      </a:pPr>
+                      <a:r>
+                        <a:t>reservations</a:t>
+                      </a:r>
+                    </a:p>
+                  </a:txBody>
+                  <a:tcPr/>
+                </a:tc>
+              </a:tr>
+              <a:tr h="279132">
+                <a:tc>
+                  <a:txBody>
+                    <a:bodyPr/>
+                    <a:lstStyle/>
+                    <a:p>
+                      <a:pPr>
+                        <a:defRPr sz="1100">
+                          <a:latin typeface="Calibri"/>
+                        </a:defRPr>
+                      </a:pPr>
+                      <a:r>
+                        <a:t>23</a:t>
+                      </a:r>
+                    </a:p>
+                  </a:txBody>
+                  <a:tcPr>
+                    <a:solidFill>
+                      <a:srgbClr val="F8F8F8"/>
+                    </a:solidFill>
+                  </a:tcPr>
+                </a:tc>
+                <a:tc>
+                  <a:txBody>
+                    <a:bodyPr/>
+                    <a:lstStyle/>
+                    <a:p>
+                      <a:pPr>
+                        <a:defRPr sz="1100">
+                          <a:latin typeface="Calibri"/>
+                        </a:defRPr>
+                      </a:pPr>
+                      <a:r>
+                        <a:t>scontrol_update_reservation</a:t>
+                      </a:r>
+                    </a:p>
+                  </a:txBody>
+                  <a:tcPr>
+                    <a:solidFill>
+                      <a:srgbClr val="F8F8F8"/>
+                    </a:solidFill>
+                  </a:tcPr>
+                </a:tc>
+                <a:tc>
+                  <a:txBody>
+                    <a:bodyPr/>
+                    <a:lstStyle/>
+                    <a:p>
+                      <a:pPr>
+                        <a:defRPr sz="1100">
+                          <a:latin typeface="Calibri"/>
+                        </a:defRPr>
+                      </a:pPr>
+                      <a:r>
+                        <a:t>FunctionTool (HITL)</a:t>
+                      </a:r>
+                    </a:p>
+                  </a:txBody>
+                  <a:tcPr>
+                    <a:solidFill>
+                      <a:srgbClr val="F8F8F8"/>
+                    </a:solidFill>
+                  </a:tcPr>
+                </a:tc>
+                <a:tc>
+                  <a:txBody>
+                    <a:bodyPr/>
+                    <a:lstStyle/>
+                    <a:p>
+                      <a:pPr>
+                        <a:defRPr sz="1100">
+                          <a:latin typeface="Calibri"/>
+                        </a:defRPr>
+                      </a:pPr>
+                      <a:r>
+                        <a:t>reservations</a:t>
+                      </a:r>
+                    </a:p>
+                  </a:txBody>
+                  <a:tcPr>
+                    <a:solidFill>
+                      <a:srgbClr val="F8F8F8"/>
+                    </a:solidFill>
+                  </a:tcPr>
+                </a:tc>
+              </a:tr>
+              <a:tr h="279132">
+                <a:tc>
+                  <a:txBody>
+                    <a:bodyPr/>
+                    <a:lstStyle/>
+                    <a:p>
+                      <a:pPr>
+                        <a:defRPr sz="1100">
+                          <a:latin typeface="Calibri"/>
+                        </a:defRPr>
+                      </a:pPr>
+                      <a:r>
+                        <a:t>24</a:t>
+                      </a:r>
+                    </a:p>
+                  </a:txBody>
+                  <a:tcPr/>
+                </a:tc>
+                <a:tc>
+                  <a:txBody>
+                    <a:bodyPr/>
+                    <a:lstStyle/>
+                    <a:p>
+                      <a:pPr>
+                        <a:defRPr sz="1100">
+                          <a:latin typeface="Calibri"/>
+                        </a:defRPr>
+                      </a:pPr>
+                      <a:r>
+                        <a:t>scontrol_reconfigure</a:t>
+                      </a:r>
+                    </a:p>
+                  </a:txBody>
+                  <a:tcPr/>
+                </a:tc>
+                <a:tc>
+                  <a:txBody>
+                    <a:bodyPr/>
+                    <a:lstStyle/>
+                    <a:p>
+                      <a:pPr>
+                        <a:defRPr sz="1100">
+                          <a:latin typeface="Calibri"/>
+                        </a:defRPr>
+                      </a:pPr>
+                      <a:r>
+                        <a:t>FunctionTool (HITL)</a:t>
+                      </a:r>
+                    </a:p>
+                  </a:txBody>
+                  <a:tcPr/>
+                </a:tc>
+                <a:tc>
+                  <a:txBody>
+                    <a:bodyPr/>
+                    <a:lstStyle/>
+                    <a:p>
+                      <a:pPr>
+                        <a:defRPr sz="1100">
+                          <a:latin typeface="Calibri"/>
+                        </a:defRPr>
+                      </a:pPr>
+                      <a:r>
+                        <a:t>cluster control</a:t>
+                      </a:r>
+                    </a:p>
+                  </a:txBody>
+                  <a:tcPr/>
+                </a:tc>
+              </a:tr>
+              <a:tr h="279132">
+                <a:tc>
+                  <a:txBody>
+                    <a:bodyPr/>
+                    <a:lstStyle/>
+                    <a:p>
+                      <a:pPr>
+                        <a:defRPr sz="1100">
+                          <a:latin typeface="Calibri"/>
+                        </a:defRPr>
+                      </a:pPr>
+                      <a:r>
+                        <a:t>25</a:t>
+                      </a:r>
+                    </a:p>
+                  </a:txBody>
+                  <a:tcPr>
+                    <a:solidFill>
+                      <a:srgbClr val="F8F8F8"/>
+                    </a:solidFill>
+                  </a:tcPr>
+                </a:tc>
+                <a:tc>
+                  <a:txBody>
+                    <a:bodyPr/>
+                    <a:lstStyle/>
+                    <a:p>
+                      <a:pPr>
+                        <a:defRPr sz="1100">
+                          <a:latin typeface="Calibri"/>
+                        </a:defRPr>
+                      </a:pPr>
+                      <a:r>
+                        <a:t>scontrol_write_config</a:t>
+                      </a:r>
+                    </a:p>
+                  </a:txBody>
+                  <a:tcPr>
+                    <a:solidFill>
+                      <a:srgbClr val="F8F8F8"/>
+                    </a:solidFill>
+                  </a:tcPr>
+                </a:tc>
+                <a:tc>
+                  <a:txBody>
+                    <a:bodyPr/>
+                    <a:lstStyle/>
+                    <a:p>
+                      <a:pPr>
+                        <a:defRPr sz="1100">
+                          <a:latin typeface="Calibri"/>
+                        </a:defRPr>
+                      </a:pPr>
+                      <a:r>
+                        <a:t>FunctionTool (HITL)</a:t>
+                      </a:r>
+                    </a:p>
+                  </a:txBody>
+                  <a:tcPr>
+                    <a:solidFill>
+                      <a:srgbClr val="F8F8F8"/>
+                    </a:solidFill>
+                  </a:tcPr>
+                </a:tc>
+                <a:tc>
+                  <a:txBody>
+                    <a:bodyPr/>
+                    <a:lstStyle/>
+                    <a:p>
+                      <a:pPr>
+                        <a:defRPr sz="1100">
+                          <a:latin typeface="Calibri"/>
+                        </a:defRPr>
+                      </a:pPr>
+                      <a:r>
+                        <a:t>cluster control</a:t>
+                      </a:r>
+                    </a:p>
+                  </a:txBody>
+                  <a:tcPr>
+                    <a:solidFill>
+                      <a:srgbClr val="F8F8F8"/>
+                    </a:solidFill>
+                  </a:tcPr>
+                </a:tc>
+              </a:tr>
+              <a:tr h="279132">
+                <a:tc>
+                  <a:txBody>
+                    <a:bodyPr/>
+                    <a:lstStyle/>
+                    <a:p>
+                      <a:pPr>
+                        <a:defRPr sz="1100">
+                          <a:latin typeface="Calibri"/>
+                        </a:defRPr>
+                      </a:pPr>
+                      <a:r>
+                        <a:t>26</a:t>
+                      </a:r>
+                    </a:p>
+                  </a:txBody>
+                  <a:tcPr/>
+                </a:tc>
+                <a:tc>
+                  <a:txBody>
+                    <a:bodyPr/>
+                    <a:lstStyle/>
+                    <a:p>
+                      <a:pPr>
+                        <a:defRPr sz="1100">
+                          <a:latin typeface="Calibri"/>
+                        </a:defRPr>
+                      </a:pPr>
+                      <a:r>
+                        <a:t>scontrol_setdebug</a:t>
+                      </a:r>
+                    </a:p>
+                  </a:txBody>
+                  <a:tcPr/>
+                </a:tc>
+                <a:tc>
+                  <a:txBody>
+                    <a:bodyPr/>
+                    <a:lstStyle/>
+                    <a:p>
+                      <a:pPr>
+                        <a:defRPr sz="1100">
+                          <a:latin typeface="Calibri"/>
+                        </a:defRPr>
+                      </a:pPr>
+                      <a:r>
+                        <a:t>FunctionTool (HITL)</a:t>
+                      </a:r>
+                    </a:p>
+                  </a:txBody>
+                  <a:tcPr/>
+                </a:tc>
+                <a:tc>
+                  <a:txBody>
+                    <a:bodyPr/>
+                    <a:lstStyle/>
+                    <a:p>
+                      <a:pPr>
+                        <a:defRPr sz="1100">
+                          <a:latin typeface="Calibri"/>
+                        </a:defRPr>
+                      </a:pPr>
+                      <a:r>
+                        <a:t>cluster control</a:t>
+                      </a:r>
+                    </a:p>
+                  </a:txBody>
+                  <a:tcPr/>
+                </a:tc>
+              </a:tr>
+              <a:tr h="279132">
+                <a:tc>
+                  <a:txBody>
+                    <a:bodyPr/>
+                    <a:lstStyle/>
+                    <a:p>
+                      <a:pPr>
+                        <a:defRPr sz="1100">
+                          <a:latin typeface="Calibri"/>
+                        </a:defRPr>
+                      </a:pPr>
+                      <a:r>
+                        <a:t>27</a:t>
+                      </a:r>
+                    </a:p>
+                  </a:txBody>
+                  <a:tcPr>
+                    <a:solidFill>
+                      <a:srgbClr val="F8F8F8"/>
+                    </a:solidFill>
+                  </a:tcPr>
+                </a:tc>
+                <a:tc>
+                  <a:txBody>
+                    <a:bodyPr/>
+                    <a:lstStyle/>
+                    <a:p>
+                      <a:pPr>
+                        <a:defRPr sz="1100">
+                          <a:latin typeface="Calibri"/>
+                        </a:defRPr>
+                      </a:pPr>
+                      <a:r>
+                        <a:t>scontrol_token</a:t>
+                      </a:r>
+                    </a:p>
+                  </a:txBody>
+                  <a:tcPr>
+                    <a:solidFill>
+                      <a:srgbClr val="F8F8F8"/>
+                    </a:solidFill>
+                  </a:tcPr>
+                </a:tc>
+                <a:tc>
+                  <a:txBody>
+                    <a:bodyPr/>
+                    <a:lstStyle/>
+                    <a:p>
+                      <a:pPr>
+                        <a:defRPr sz="1100">
+                          <a:latin typeface="Calibri"/>
+                        </a:defRPr>
+                      </a:pPr>
+                      <a:r>
+                        <a:t>FunctionTool (HITL)</a:t>
+                      </a:r>
+                    </a:p>
+                  </a:txBody>
+                  <a:tcPr>
+                    <a:solidFill>
+                      <a:srgbClr val="F8F8F8"/>
+                    </a:solidFill>
+                  </a:tcPr>
+                </a:tc>
+                <a:tc>
+                  <a:txBody>
+                    <a:bodyPr/>
+                    <a:lstStyle/>
+                    <a:p>
+                      <a:pPr>
+                        <a:defRPr sz="1100">
+                          <a:latin typeface="Calibri"/>
+                        </a:defRPr>
+                      </a:pPr>
+                      <a:r>
+                        <a:t>cluster control</a:t>
+                      </a:r>
+                    </a:p>
+                  </a:txBody>
+                  <a:tcPr>
+                    <a:solidFill>
+                      <a:srgbClr val="F8F8F8"/>
+                    </a:solidFill>
+                  </a:tcPr>
+                </a:tc>
+              </a:tr>
+              <a:tr h="279132">
+                <a:tc>
+                  <a:txBody>
+                    <a:bodyPr/>
+                    <a:lstStyle/>
+                    <a:p>
+                      <a:pPr>
+                        <a:defRPr sz="1100">
+                          <a:latin typeface="Calibri"/>
+                        </a:defRPr>
+                      </a:pPr>
+                      <a:r>
+                        <a:t>28</a:t>
+                      </a:r>
+                    </a:p>
+                  </a:txBody>
+                  <a:tcPr/>
+                </a:tc>
+                <a:tc>
+                  <a:txBody>
+                    <a:bodyPr/>
+                    <a:lstStyle/>
+                    <a:p>
+                      <a:pPr>
+                        <a:defRPr sz="1100">
+                          <a:latin typeface="Calibri"/>
+                        </a:defRPr>
+                      </a:pPr>
+                      <a:r>
+                        <a:t>scontrol_shutdown</a:t>
+                      </a:r>
+                    </a:p>
+                  </a:txBody>
+                  <a:tcPr/>
+                </a:tc>
+                <a:tc>
+                  <a:txBody>
+                    <a:bodyPr/>
+                    <a:lstStyle/>
+                    <a:p>
+                      <a:pPr>
+                        <a:defRPr sz="1100">
+                          <a:latin typeface="Calibri"/>
+                        </a:defRPr>
+                      </a:pPr>
+                      <a:r>
+                        <a:t>FunctionTool (HITL)</a:t>
+                      </a:r>
+                    </a:p>
+                  </a:txBody>
+                  <a:tcPr/>
+                </a:tc>
+                <a:tc>
+                  <a:txBody>
+                    <a:bodyPr/>
+                    <a:lstStyle/>
+                    <a:p>
+                      <a:pPr>
+                        <a:defRPr sz="1100">
+                          <a:latin typeface="Calibri"/>
+                        </a:defRPr>
+                      </a:pPr>
+                      <a:r>
+                        <a:t>cluster control</a:t>
+                      </a:r>
+                    </a:p>
+                  </a:txBody>
+                  <a:tcPr/>
+                </a:tc>
+              </a:tr>
+              <a:tr h="279132">
+                <a:tc>
+                  <a:txBody>
+                    <a:bodyPr/>
+                    <a:lstStyle/>
+                    <a:p>
+                      <a:pPr>
+                        <a:defRPr sz="1100">
+                          <a:latin typeface="Calibri"/>
+                        </a:defRPr>
+                      </a:pPr>
+                      <a:r>
+                        <a:t>29</a:t>
+                      </a:r>
+                    </a:p>
+                  </a:txBody>
+                  <a:tcPr>
+                    <a:solidFill>
+                      <a:srgbClr val="F8F8F8"/>
+                    </a:solidFill>
+                  </a:tcPr>
+                </a:tc>
+                <a:tc>
+                  <a:txBody>
+                    <a:bodyPr/>
+                    <a:lstStyle/>
+                    <a:p>
+                      <a:pPr>
+                        <a:defRPr sz="1100">
+                          <a:latin typeface="Calibri"/>
+                        </a:defRPr>
+                      </a:pPr>
+                      <a:r>
+                        <a:t>sacctmgr_add</a:t>
+                      </a:r>
+                    </a:p>
+                  </a:txBody>
+                  <a:tcPr>
+                    <a:solidFill>
+                      <a:srgbClr val="F8F8F8"/>
+                    </a:solidFill>
+                  </a:tcPr>
+                </a:tc>
+                <a:tc>
+                  <a:txBody>
+                    <a:bodyPr/>
+                    <a:lstStyle/>
+                    <a:p>
+                      <a:pPr>
+                        <a:defRPr sz="1100">
+                          <a:latin typeface="Calibri"/>
+                        </a:defRPr>
+                      </a:pPr>
+                      <a:r>
+                        <a:t>FunctionTool (HITL)</a:t>
+                      </a:r>
+                    </a:p>
+                  </a:txBody>
+                  <a:tcPr>
+                    <a:solidFill>
+                      <a:srgbClr val="F8F8F8"/>
+                    </a:solidFill>
+                  </a:tcPr>
+                </a:tc>
+                <a:tc>
+                  <a:txBody>
+                    <a:bodyPr/>
+                    <a:lstStyle/>
+                    <a:p>
+                      <a:pPr>
+                        <a:defRPr sz="1100">
+                          <a:latin typeface="Calibri"/>
+                        </a:defRPr>
+                      </a:pPr>
+                      <a:r>
+                        <a:t>accounting</a:t>
+                      </a:r>
+                    </a:p>
+                  </a:txBody>
+                  <a:tcPr>
+                    <a:solidFill>
+                      <a:srgbClr val="F8F8F8"/>
+                    </a:solidFill>
+                  </a:tcPr>
+                </a:tc>
+              </a:tr>
+              <a:tr h="279132">
+                <a:tc>
+                  <a:txBody>
+                    <a:bodyPr/>
+                    <a:lstStyle/>
+                    <a:p>
+                      <a:pPr>
+                        <a:defRPr sz="1100">
+                          <a:latin typeface="Calibri"/>
+                        </a:defRPr>
+                      </a:pPr>
+                      <a:r>
+                        <a:t>30</a:t>
+                      </a:r>
+                    </a:p>
+                  </a:txBody>
+                  <a:tcPr/>
+                </a:tc>
+                <a:tc>
+                  <a:txBody>
+                    <a:bodyPr/>
+                    <a:lstStyle/>
+                    <a:p>
+                      <a:pPr>
+                        <a:defRPr sz="1100">
+                          <a:latin typeface="Calibri"/>
+                        </a:defRPr>
+                      </a:pPr>
+                      <a:r>
+                        <a:t>sacctmgr_modify</a:t>
+                      </a:r>
+                    </a:p>
+                  </a:txBody>
+                  <a:tcPr/>
+                </a:tc>
+                <a:tc>
+                  <a:txBody>
+                    <a:bodyPr/>
+                    <a:lstStyle/>
+                    <a:p>
+                      <a:pPr>
+                        <a:defRPr sz="1100">
+                          <a:latin typeface="Calibri"/>
+                        </a:defRPr>
+                      </a:pPr>
+                      <a:r>
+                        <a:t>FunctionTool (HITL)</a:t>
+                      </a:r>
+                    </a:p>
+                  </a:txBody>
+                  <a:tcPr/>
+                </a:tc>
+                <a:tc>
+                  <a:txBody>
+                    <a:bodyPr/>
+                    <a:lstStyle/>
+                    <a:p>
+                      <a:pPr>
+                        <a:defRPr sz="1100">
+                          <a:latin typeface="Calibri"/>
+                        </a:defRPr>
+                      </a:pPr>
+                      <a:r>
+                        <a:t>accounting</a:t>
+                      </a:r>
+                    </a:p>
+                  </a:txBody>
+                  <a:tcPr/>
+                </a:tc>
+              </a:tr>
+              <a:tr h="279132">
+                <a:tc>
+                  <a:txBody>
+                    <a:bodyPr/>
+                    <a:lstStyle/>
+                    <a:p>
+                      <a:pPr>
+                        <a:defRPr sz="1100">
+                          <a:latin typeface="Calibri"/>
+                        </a:defRPr>
+                      </a:pPr>
+                      <a:r>
+                        <a:t>31</a:t>
+                      </a:r>
+                    </a:p>
+                  </a:txBody>
+                  <a:tcPr>
+                    <a:solidFill>
+                      <a:srgbClr val="F8F8F8"/>
+                    </a:solidFill>
+                  </a:tcPr>
+                </a:tc>
+                <a:tc>
+                  <a:txBody>
+                    <a:bodyPr/>
+                    <a:lstStyle/>
+                    <a:p>
+                      <a:pPr>
+                        <a:defRPr sz="1100">
+                          <a:latin typeface="Calibri"/>
+                        </a:defRPr>
+                      </a:pPr>
+                      <a:r>
+                        <a:t>sacctmgr_delete</a:t>
+                      </a:r>
+                    </a:p>
+                  </a:txBody>
+                  <a:tcPr>
+                    <a:solidFill>
+                      <a:srgbClr val="F8F8F8"/>
+                    </a:solidFill>
+                  </a:tcPr>
+                </a:tc>
+                <a:tc>
+                  <a:txBody>
+                    <a:bodyPr/>
+                    <a:lstStyle/>
+                    <a:p>
+                      <a:pPr>
+                        <a:defRPr sz="1100">
+                          <a:latin typeface="Calibri"/>
+                        </a:defRPr>
+                      </a:pPr>
+                      <a:r>
+                        <a:t>FunctionTool (HITL)</a:t>
+                      </a:r>
+                    </a:p>
+                  </a:txBody>
+                  <a:tcPr>
+                    <a:solidFill>
+                      <a:srgbClr val="F8F8F8"/>
+                    </a:solidFill>
+                  </a:tcPr>
+                </a:tc>
+                <a:tc>
+                  <a:txBody>
+                    <a:bodyPr/>
+                    <a:lstStyle/>
+                    <a:p>
+                      <a:pPr>
+                        <a:defRPr sz="1100">
+                          <a:latin typeface="Calibri"/>
+                        </a:defRPr>
+                      </a:pPr>
+                      <a:r>
+                        <a:t>accounting</a:t>
+                      </a:r>
+                    </a:p>
+                  </a:txBody>
+                  <a:tcPr>
+                    <a:solidFill>
+                      <a:srgbClr val="F8F8F8"/>
+                    </a:solidFill>
+                  </a:tcPr>
+                </a:tc>
+              </a:tr>
+              <a:tr h="279132">
+                <a:tc>
+                  <a:txBody>
+                    <a:bodyPr/>
+                    <a:lstStyle/>
+                    <a:p>
+                      <a:pPr>
+                        <a:defRPr sz="1100">
+                          <a:latin typeface="Calibri"/>
+                        </a:defRPr>
+                      </a:pPr>
+                      <a:r>
+                        <a:t>32</a:t>
+                      </a:r>
+                    </a:p>
+                  </a:txBody>
+                  <a:tcPr/>
+                </a:tc>
+                <a:tc>
+                  <a:txBody>
+                    <a:bodyPr/>
+                    <a:lstStyle/>
+                    <a:p>
+                      <a:pPr>
+                        <a:defRPr sz="1100">
+                          <a:latin typeface="Calibri"/>
+                        </a:defRPr>
+                      </a:pPr>
+                      <a:r>
+                        <a:t>sacctmgr_recalc</a:t>
+                      </a:r>
+                    </a:p>
+                  </a:txBody>
+                  <a:tcPr/>
+                </a:tc>
+                <a:tc>
+                  <a:txBody>
+                    <a:bodyPr/>
+                    <a:lstStyle/>
+                    <a:p>
+                      <a:pPr>
+                        <a:defRPr sz="1100">
+                          <a:latin typeface="Calibri"/>
+                        </a:defRPr>
+                      </a:pPr>
+                      <a:r>
+                        <a:t>FunctionTool (HITL)</a:t>
+                      </a:r>
+                    </a:p>
+                  </a:txBody>
+                  <a:tcPr/>
+                </a:tc>
+                <a:tc>
+                  <a:txBody>
+                    <a:bodyPr/>
+                    <a:lstStyle/>
+                    <a:p>
+                      <a:pPr>
+                        <a:defRPr sz="1100">
+                          <a:latin typeface="Calibri"/>
+                        </a:defRPr>
+                      </a:pPr>
+                      <a:r>
+                        <a:t>accounting</a:t>
+                      </a:r>
+                    </a:p>
+                  </a:txBody>
+                  <a:tcPr/>
+                </a:tc>
+              </a:tr>
+              <a:tr h="279132">
+                <a:tc>
+                  <a:txBody>
+                    <a:bodyPr/>
+                    <a:lstStyle/>
+                    <a:p>
+                      <a:pPr>
+                        <a:defRPr sz="1100">
+                          <a:latin typeface="Calibri"/>
+                        </a:defRPr>
+                      </a:pPr>
+                      <a:r>
+                        <a:t>33</a:t>
+                      </a:r>
+                    </a:p>
+                  </a:txBody>
+                  <a:tcPr>
+                    <a:solidFill>
+                      <a:srgbClr val="F8F8F8"/>
+                    </a:solidFill>
+                  </a:tcPr>
+                </a:tc>
+                <a:tc>
+                  <a:txBody>
+                    <a:bodyPr/>
+                    <a:lstStyle/>
+                    <a:p>
+                      <a:pPr>
+                        <a:defRPr sz="1100">
+                          <a:latin typeface="Calibri"/>
+                        </a:defRPr>
+                      </a:pPr>
+                      <a:r>
+                        <a:t>sacctmgr_archive</a:t>
+                      </a:r>
+                    </a:p>
+                  </a:txBody>
+                  <a:tcPr>
+                    <a:solidFill>
+                      <a:srgbClr val="F8F8F8"/>
+                    </a:solidFill>
+                  </a:tcPr>
+                </a:tc>
+                <a:tc>
+                  <a:txBody>
+                    <a:bodyPr/>
+                    <a:lstStyle/>
+                    <a:p>
+                      <a:pPr>
+                        <a:defRPr sz="1100">
+                          <a:latin typeface="Calibri"/>
+                        </a:defRPr>
+                      </a:pPr>
+                      <a:r>
+                        <a:t>FunctionTool (HITL)</a:t>
+                      </a:r>
+                    </a:p>
+                  </a:txBody>
+                  <a:tcPr>
+                    <a:solidFill>
+                      <a:srgbClr val="F8F8F8"/>
+                    </a:solidFill>
+                  </a:tcPr>
+                </a:tc>
+                <a:tc>
+                  <a:txBody>
+                    <a:bodyPr/>
+                    <a:lstStyle/>
+                    <a:p>
+                      <a:pPr>
+                        <a:defRPr sz="1100">
+                          <a:latin typeface="Calibri"/>
+                        </a:defRPr>
+                      </a:pPr>
+                      <a:r>
+                        <a:t>accounting</a:t>
+                      </a:r>
+                    </a:p>
+                  </a:txBody>
+                  <a:tcPr>
+                    <a:solidFill>
+                      <a:srgbClr val="F8F8F8"/>
+                    </a:solidFill>
+                  </a:tcPr>
+                </a:tc>
+              </a:tr>
+              <a:tr h="279132">
+                <a:tc>
+                  <a:txBody>
+                    <a:bodyPr/>
+                    <a:lstStyle/>
+                    <a:p>
+                      <a:pPr>
+                        <a:defRPr sz="1100">
+                          <a:latin typeface="Calibri"/>
+                        </a:defRPr>
+                      </a:pPr>
+                      <a:r>
+                        <a:t>34</a:t>
+                      </a:r>
+                    </a:p>
+                  </a:txBody>
+                  <a:tcPr/>
+                </a:tc>
+                <a:tc>
+                  <a:txBody>
+                    <a:bodyPr/>
+                    <a:lstStyle/>
+                    <a:p>
+                      <a:pPr>
+                        <a:defRPr sz="1100">
+                          <a:latin typeface="Calibri"/>
+                        </a:defRPr>
+                      </a:pPr>
+                      <a:r>
+                        <a:t>sacctmgr_load</a:t>
+                      </a:r>
+                    </a:p>
+                  </a:txBody>
+                  <a:tcPr/>
+                </a:tc>
+                <a:tc>
+                  <a:txBody>
+                    <a:bodyPr/>
+                    <a:lstStyle/>
+                    <a:p>
+                      <a:pPr>
+                        <a:defRPr sz="1100">
+                          <a:latin typeface="Calibri"/>
+                        </a:defRPr>
+                      </a:pPr>
+                      <a:r>
+                        <a:t>FunctionTool (HITL)</a:t>
+                      </a:r>
+                    </a:p>
+                  </a:txBody>
+                  <a:tcPr/>
+                </a:tc>
+                <a:tc>
+                  <a:txBody>
+                    <a:bodyPr/>
+                    <a:lstStyle/>
+                    <a:p>
+                      <a:pPr>
+                        <a:defRPr sz="1100">
+                          <a:latin typeface="Calibri"/>
+                        </a:defRPr>
+                      </a:pPr>
+                      <a:r>
+                        <a:t>accounting</a:t>
+                      </a:r>
+                    </a:p>
+                  </a:txBody>
+                  <a:tcPr/>
+                </a:tc>
+              </a:tr>
+              <a:tr h="279132">
+                <a:tc>
+                  <a:txBody>
+                    <a:bodyPr/>
+                    <a:lstStyle/>
+                    <a:p>
+                      <a:pPr>
+                        <a:defRPr sz="1100">
+                          <a:latin typeface="Calibri"/>
+                        </a:defRPr>
+                      </a:pPr>
+                      <a:r>
+                        <a:t>35</a:t>
+                      </a:r>
+                    </a:p>
+                  </a:txBody>
+                  <a:tcPr>
+                    <a:solidFill>
+                      <a:srgbClr val="F8F8F8"/>
+                    </a:solidFill>
+                  </a:tcPr>
+                </a:tc>
+                <a:tc>
+                  <a:txBody>
+                    <a:bodyPr/>
+                    <a:lstStyle/>
+                    <a:p>
+                      <a:pPr>
+                        <a:defRPr sz="1100">
+                          <a:latin typeface="Calibri"/>
+                        </a:defRPr>
+                      </a:pPr>
+                      <a:r>
+                        <a:t>sacctmgr_dump</a:t>
+                      </a:r>
+                    </a:p>
+                  </a:txBody>
+                  <a:tcPr>
+                    <a:solidFill>
+                      <a:srgbClr val="F8F8F8"/>
+                    </a:solidFill>
+                  </a:tcPr>
+                </a:tc>
+                <a:tc>
+                  <a:txBody>
+                    <a:bodyPr/>
+                    <a:lstStyle/>
+                    <a:p>
+                      <a:pPr>
+                        <a:defRPr sz="1100">
+                          <a:latin typeface="Calibri"/>
+                        </a:defRPr>
+                      </a:pPr>
+                      <a:r>
+                        <a:t>FunctionTool (HITL)</a:t>
+                      </a:r>
+                    </a:p>
+                  </a:txBody>
+                  <a:tcPr>
+                    <a:solidFill>
+                      <a:srgbClr val="F8F8F8"/>
+                    </a:solidFill>
+                  </a:tcPr>
+                </a:tc>
+                <a:tc>
+                  <a:txBody>
+                    <a:bodyPr/>
+                    <a:lstStyle/>
+                    <a:p>
+                      <a:pPr>
+                        <a:defRPr sz="1100">
+                          <a:latin typeface="Calibri"/>
+                        </a:defRPr>
+                      </a:pPr>
+                      <a:r>
+                        <a:t>accounting</a:t>
+                      </a:r>
+                    </a:p>
+                  </a:txBody>
+                  <a:tcPr>
+                    <a:solidFill>
+                      <a:srgbClr val="F8F8F8"/>
+                    </a:solidFill>
+                  </a:tcPr>
+                </a:tc>
+              </a:tr>
+              <a:tr h="279132">
+                <a:tc>
+                  <a:txBody>
+                    <a:bodyPr/>
+                    <a:lstStyle/>
+                    <a:p>
+                      <a:pPr>
+                        <a:defRPr sz="1100">
+                          <a:latin typeface="Calibri"/>
+                        </a:defRPr>
+                      </a:pPr>
+                      <a:r>
+                        <a:t>36</a:t>
+                      </a:r>
+                    </a:p>
+                  </a:txBody>
+                  <a:tcPr/>
+                </a:tc>
+                <a:tc>
+                  <a:txBody>
+                    <a:bodyPr/>
+                    <a:lstStyle/>
+                    <a:p>
+                      <a:pPr>
+                        <a:defRPr sz="1100">
+                          <a:latin typeface="Calibri"/>
+                        </a:defRPr>
+                      </a:pPr>
+                      <a:r>
+                        <a:t>strigger_set</a:t>
+                      </a:r>
+                    </a:p>
+                  </a:txBody>
+                  <a:tcPr/>
+                </a:tc>
+                <a:tc>
+                  <a:txBody>
+                    <a:bodyPr/>
+                    <a:lstStyle/>
+                    <a:p>
+                      <a:pPr>
+                        <a:defRPr sz="1100">
+                          <a:latin typeface="Calibri"/>
+                        </a:defRPr>
+                      </a:pPr>
+                      <a:r>
+                        <a:t>FunctionTool (HITL)</a:t>
+                      </a:r>
+                    </a:p>
+                  </a:txBody>
+                  <a:tcPr/>
+                </a:tc>
+                <a:tc>
+                  <a:txBody>
+                    <a:bodyPr/>
+                    <a:lstStyle/>
+                    <a:p>
+                      <a:pPr>
+                        <a:defRPr sz="1100">
+                          <a:latin typeface="Calibri"/>
+                        </a:defRPr>
+                      </a:pPr>
+                      <a:r>
+                        <a:t>triggers</a:t>
+                      </a:r>
+                    </a:p>
+                  </a:txBody>
+                  <a:tcPr/>
+                </a:tc>
+              </a:tr>
+              <a:tr h="279144">
+                <a:tc>
+                  <a:txBody>
+                    <a:bodyPr/>
+                    <a:lstStyle/>
+                    <a:p>
+                      <a:pPr>
+                        <a:defRPr sz="1100">
+                          <a:latin typeface="Calibri"/>
+                        </a:defRPr>
+                      </a:pPr>
+                      <a:r>
+                        <a:t>37</a:t>
+                      </a:r>
+                    </a:p>
+                  </a:txBody>
+                  <a:tcPr>
+                    <a:solidFill>
+                      <a:srgbClr val="F8F8F8"/>
+                    </a:solidFill>
+                  </a:tcPr>
+                </a:tc>
+                <a:tc>
+                  <a:txBody>
+                    <a:bodyPr/>
+                    <a:lstStyle/>
+                    <a:p>
+                      <a:pPr>
+                        <a:defRPr sz="1100">
+                          <a:latin typeface="Calibri"/>
+                        </a:defRPr>
+                      </a:pPr>
+                      <a:r>
+                        <a:t>strigger_clear</a:t>
+                      </a:r>
+                    </a:p>
+                  </a:txBody>
+                  <a:tcPr>
+                    <a:solidFill>
+                      <a:srgbClr val="F8F8F8"/>
+                    </a:solidFill>
+                  </a:tcPr>
+                </a:tc>
+                <a:tc>
+                  <a:txBody>
+                    <a:bodyPr/>
+                    <a:lstStyle/>
+                    <a:p>
+                      <a:pPr>
+                        <a:defRPr sz="1100">
+                          <a:latin typeface="Calibri"/>
+                        </a:defRPr>
+                      </a:pPr>
+                      <a:r>
+                        <a:t>FunctionTool (HITL)</a:t>
+                      </a:r>
+                    </a:p>
+                  </a:txBody>
+                  <a:tcPr>
+                    <a:solidFill>
+                      <a:srgbClr val="F8F8F8"/>
+                    </a:solidFill>
+                  </a:tcPr>
+                </a:tc>
+                <a:tc>
+                  <a:txBody>
+                    <a:bodyPr/>
+                    <a:lstStyle/>
+                    <a:p>
+                      <a:pPr>
+                        <a:defRPr sz="1100">
+                          <a:latin typeface="Calibri"/>
+                        </a:defRPr>
+                      </a:pPr>
+                      <a:r>
+                        <a:t>triggers</a:t>
+                      </a:r>
+                    </a:p>
+                  </a:txBody>
+                  <a:tcPr>
+                    <a:solidFill>
+                      <a:srgbClr val="F8F8F8"/>
+                    </a:solidFill>
+                  </a:tcPr>
+                </a:tc>
+              </a:tr>
+            </a:tbl>
+          </a:graphicData>
+        </a:graphic>
+      </p:graphicFrame>
+      <p:sp>
+        <p:nvSpPr>
+          <p:cNvPr id="5" name="TextBox 4"/>
+          <p:cNvSpPr txBox="1"/>
+          <p:nvPr/>
+        </p:nvSpPr>
+        <p:spPr>
+          <a:xfrm>
+            <a:off x="411480" y="6217920"/>
+            <a:ext cx="11155680" cy="411480"/>
+          </a:xfrm>
+          <a:prstGeom prst="rect">
+            <a:avLst/>
+          </a:prstGeom>
+          <a:noFill/>
+        </p:spPr>
+        <p:txBody>
+          <a:bodyPr wrap="none">
+            <a:spAutoFit/>
+          </a:bodyPr>
+          <a:lstStyle/>
+          <a:p>
+            <a:pPr>
+              <a:defRPr sz="1100" i="1">
+                <a:latin typeface="Calibri"/>
+              </a:defRPr>
+            </a:pPr>
+            <a:r>
+              <a:t>Part 2 of 2</a:t>
+            </a:r>
+          </a:p>
+        </p:txBody>
+      </p:sp>
+    </p:spTree>
+  </p:cSld>
+  <p:clrMapOvr>
+    <a:masterClrMapping/>
+  </p:clrMapOvr>
+</p:sld>
+</file>
+
+<file path=ppt/slides/slide6.xml><?xml version="1.0" encoding="utf-8"?>
+<p:sld xmlns:a="http://schemas.openxmlformats.org/drawingml/2006/main" xmlns:p="http://schemas.openxmlformats.org/presentationml/2006/main" xmlns:r="http://schemas.openxmlformats.org/officeDocument/2006/relationships">
+  <p:cSld>
+    <p:spTree>
+      <p:nvGrpSpPr>
+        <p:cNvPr id="1" name=""/>
+        <p:cNvGrpSpPr/>
+        <p:nvPr/>
+      </p:nvGrpSpPr>
+      <p:grpSpPr/>
+      <p:sp>
+        <p:nvSpPr>
+          <p:cNvPr id="2" name="Title 1"/>
+          <p:cNvSpPr>
+            <a:spLocks noGrp="1"/>
+          </p:cNvSpPr>
+          <p:nvPr>
+            <p:ph type="title"/>
+          </p:nvPr>
+        </p:nvSpPr>
+        <p:spPr/>
+        <p:txBody>
+          <a:bodyPr/>
+          <a:lstStyle/>
+          <a:p/>
+        </p:txBody>
+      </p:sp>
+      <p:sp>
+        <p:nvSpPr>
+          <p:cNvPr id="3" name="TextBox 2"/>
+          <p:cNvSpPr txBox="1"/>
+          <p:nvPr/>
+        </p:nvSpPr>
+        <p:spPr>
+          <a:xfrm>
+            <a:off x="365760" y="228600"/>
+            <a:ext cx="11521440" cy="640080"/>
+          </a:xfrm>
+          <a:prstGeom prst="rect">
+            <a:avLst/>
+          </a:prstGeom>
+          <a:noFill/>
+        </p:spPr>
+        <p:txBody>
+          <a:bodyPr wrap="none">
+            <a:spAutoFit/>
+          </a:bodyPr>
+          <a:lstStyle/>
+          <a:p>
+            <a:pPr>
+              <a:defRPr sz="2600" b="1">
+                <a:latin typeface="Calibri"/>
+              </a:defRPr>
+            </a:pPr>
+            <a:r>
+              <a:t>Totals</a:t>
+            </a:r>
+          </a:p>
+        </p:txBody>
+      </p:sp>
+      <p:graphicFrame>
+        <p:nvGraphicFramePr>
+          <p:cNvPr id="4" name="Table 3"/>
+          <p:cNvGraphicFramePr>
+            <a:graphicFrameLocks noGrp="1"/>
+          </p:cNvGraphicFramePr>
+          <p:nvPr/>
+        </p:nvGraphicFramePr>
+        <p:xfrm>
+          <a:off x="1188720" y="1097280"/>
+          <a:ext cx="9784080" cy="3474720"/>
+        </p:xfrm>
+        <a:graphic>
+          <a:graphicData uri="http://schemas.openxmlformats.org/drawingml/2006/table">
+            <a:tbl>
+              <a:tblPr firstRow="1" bandRow="1">
+                <a:tableStyleId>{5C22544A-7EE6-4342-B048-85BDC9FD1C3A}</a:tableStyleId>
+              </a:tblPr>
+              <a:tblGrid>
+                <a:gridCol w="6583680"/>
+                <a:gridCol w="3200400"/>
+              </a:tblGrid>
+              <a:tr h="579120">
+                <a:tc>
+                  <a:txBody>
+                    <a:bodyPr/>
+                    <a:lstStyle/>
+                    <a:p>
+                      <a:pPr>
+                        <a:defRPr b="1" sz="1400">
+                          <a:latin typeface="Calibri"/>
+                        </a:defRPr>
+                      </a:pPr>
+                      <a:r>
+                        <a:t>Metric</a:t>
+                      </a:r>
+                    </a:p>
+                  </a:txBody>
+                  <a:tcPr>
+                    <a:solidFill>
+                      <a:srgbClr val="E6E6E6"/>
+                    </a:solidFill>
+                  </a:tcPr>
+                </a:tc>
+                <a:tc>
+                  <a:txBody>
+                    <a:bodyPr/>
+                    <a:lstStyle/>
+                    <a:p>
+                      <a:pPr>
+                        <a:defRPr b="1" sz="1400">
+                          <a:latin typeface="Calibri"/>
+                        </a:defRPr>
+                      </a:pPr>
+                      <a:r>
+                        <a:t>Count</a:t>
+                      </a:r>
+                    </a:p>
+                  </a:txBody>
+                  <a:tcPr>
+                    <a:solidFill>
+                      <a:srgbClr val="E6E6E6"/>
+                    </a:solidFill>
+                  </a:tcPr>
+                </a:tc>
+              </a:tr>
+              <a:tr h="579120">
+                <a:tc>
+                  <a:txBody>
+                    <a:bodyPr/>
+                    <a:lstStyle/>
+                    <a:p>
+                      <a:pPr>
+                        <a:defRPr sz="1400">
+                          <a:latin typeface="Calibri"/>
+                        </a:defRPr>
+                      </a:pPr>
+                      <a:r>
+                        <a:t>Observer MCP</a:t>
+                      </a:r>
+                    </a:p>
+                  </a:txBody>
+                  <a:tcPr/>
+                </a:tc>
+                <a:tc>
+                  <a:txBody>
+                    <a:bodyPr/>
+                    <a:lstStyle/>
+                    <a:p>
+                      <a:pPr>
+                        <a:defRPr sz="1400">
+                          <a:latin typeface="Calibri"/>
+                        </a:defRPr>
+                      </a:pPr>
+                      <a:r>
+                        <a:t>29</a:t>
+                      </a:r>
+                    </a:p>
+                  </a:txBody>
+                  <a:tcPr/>
+                </a:tc>
+              </a:tr>
+              <a:tr h="579120">
+                <a:tc>
+                  <a:txBody>
+                    <a:bodyPr/>
+                    <a:lstStyle/>
+                    <a:p>
+                      <a:pPr>
+                        <a:defRPr sz="1400">
+                          <a:latin typeface="Calibri"/>
+                        </a:defRPr>
+                      </a:pPr>
+                      <a:r>
+                        <a:t>Observer FunctionTools</a:t>
+                      </a:r>
+                    </a:p>
+                  </a:txBody>
+                  <a:tcPr>
+                    <a:solidFill>
+                      <a:srgbClr val="F8F8F8"/>
+                    </a:solidFill>
+                  </a:tcPr>
+                </a:tc>
+                <a:tc>
+                  <a:txBody>
+                    <a:bodyPr/>
+                    <a:lstStyle/>
+                    <a:p>
+                      <a:pPr>
+                        <a:defRPr sz="1400">
+                          <a:latin typeface="Calibri"/>
+                        </a:defRPr>
+                      </a:pPr>
+                      <a:r>
+                        <a:t>1 (lookup_skill)</a:t>
+                      </a:r>
+                    </a:p>
+                  </a:txBody>
+                  <a:tcPr>
+                    <a:solidFill>
+                      <a:srgbClr val="F8F8F8"/>
+                    </a:solidFill>
+                  </a:tcPr>
+                </a:tc>
+              </a:tr>
+              <a:tr h="579120">
+                <a:tc>
+                  <a:txBody>
+                    <a:bodyPr/>
+                    <a:lstStyle/>
+                    <a:p>
+                      <a:pPr>
+                        <a:defRPr sz="1400">
+                          <a:latin typeface="Calibri"/>
+                        </a:defRPr>
+                      </a:pPr>
+                      <a:r>
+                        <a:t>Operator MCP</a:t>
+                      </a:r>
+                    </a:p>
+                  </a:txBody>
+                  <a:tcPr/>
+                </a:tc>
+                <a:tc>
+                  <a:txBody>
+                    <a:bodyPr/>
+                    <a:lstStyle/>
+                    <a:p>
+                      <a:pPr>
+                        <a:defRPr sz="1400">
+                          <a:latin typeface="Calibri"/>
+                        </a:defRPr>
+                      </a:pPr>
+                      <a:r>
+                        <a:t>2</a:t>
+                      </a:r>
+                    </a:p>
+                  </a:txBody>
+                  <a:tcPr/>
+                </a:tc>
+              </a:tr>
+              <a:tr h="579120">
+                <a:tc>
+                  <a:txBody>
+                    <a:bodyPr/>
+                    <a:lstStyle/>
+                    <a:p>
+                      <a:pPr>
+                        <a:defRPr sz="1400">
+                          <a:latin typeface="Calibri"/>
+                        </a:defRPr>
+                      </a:pPr>
+                      <a:r>
+                        <a:t>Operator FunctionTools (HITL)</a:t>
+                      </a:r>
+                    </a:p>
+                  </a:txBody>
+                  <a:tcPr>
+                    <a:solidFill>
+                      <a:srgbClr val="F8F8F8"/>
+                    </a:solidFill>
+                  </a:tcPr>
+                </a:tc>
+                <a:tc>
+                  <a:txBody>
+                    <a:bodyPr/>
+                    <a:lstStyle/>
+                    <a:p>
+                      <a:pPr>
+                        <a:defRPr sz="1400">
+                          <a:latin typeface="Calibri"/>
+                        </a:defRPr>
+                      </a:pPr>
+                      <a:r>
+                        <a:t>37</a:t>
+                      </a:r>
+                    </a:p>
+                  </a:txBody>
+                  <a:tcPr>
+                    <a:solidFill>
+                      <a:srgbClr val="F8F8F8"/>
+                    </a:solidFill>
+                  </a:tcPr>
+                </a:tc>
+              </a:tr>
+              <a:tr h="579120">
+                <a:tc>
+                  <a:txBody>
+                    <a:bodyPr/>
+                    <a:lstStyle/>
+                    <a:p>
+                      <a:pPr>
+                        <a:defRPr sz="1400">
+                          <a:latin typeface="Calibri"/>
+                        </a:defRPr>
+                      </a:pPr>
+                      <a:r>
+                        <a:t>MCP server total</a:t>
+                      </a:r>
+                    </a:p>
+                  </a:txBody>
+                  <a:tcPr/>
+                </a:tc>
+                <a:tc>
+                  <a:txBody>
+                    <a:bodyPr/>
+                    <a:lstStyle/>
+                    <a:p>
+                      <a:pPr>
+                        <a:defRPr sz="1400">
+                          <a:latin typeface="Calibri"/>
+                        </a:defRPr>
+                      </a:pPr>
+                      <a:r>
+                        <a:t>71</a:t>
+                      </a:r>
+                    </a:p>
+                  </a:txBody>
+                  <a:tcPr/>
+                </a:tc>
+              </a:tr>
+            </a:tbl>
+          </a:graphicData>
+        </a:graphic>
+      </p:graphicFrame>
+      <p:sp>
+        <p:nvSpPr>
+          <p:cNvPr id="5" name="TextBox 4"/>
+          <p:cNvSpPr txBox="1"/>
+          <p:nvPr/>
+        </p:nvSpPr>
+        <p:spPr>
+          <a:xfrm>
+            <a:off x="1188720" y="4937760"/>
+            <a:ext cx="9784080" cy="1097280"/>
+          </a:xfrm>
+          <a:prstGeom prst="rect">
+            <a:avLst/>
+          </a:prstGeom>
+          <a:noFill/>
+        </p:spPr>
+        <p:txBody>
+          <a:bodyPr wrap="none">
+            <a:spAutoFit/>
+          </a:bodyPr>
+          <a:lstStyle/>
+          <a:p>
+            <a:pPr>
+              <a:defRPr sz="1200">
+                <a:latin typeface="Calibri"/>
+              </a:defRPr>
+            </a:pPr>
+            <a:r>
+              <a:t>Hidden from Observer (present on MCP but filtered): cluster_history, reset_mock_state</a:t>
             </a:r>
           </a:p>
         </p:txBody>
